--- a/docs/IPA_modifiche_hardcoded.pptx
+++ b/docs/IPA_modifiche_hardcoded.pptx
@@ -15,7 +15,9 @@
     <p:sldId id="263" r:id="rId9"/>
     <p:sldId id="264" r:id="rId10"/>
     <p:sldId id="265" r:id="rId11"/>
+    <p:sldId id="271" r:id="rId20"/>
     <p:sldId id="266" r:id="rId12"/>
+    <p:sldId id="272" r:id="rId21"/>
     <p:sldId id="268" r:id="rId13"/>
     <p:sldId id="269" r:id="rId14"/>
     <p:sldId id="270" r:id="rId15"/>
@@ -3809,7 +3811,7 @@
               </a:spcAft>
             </a:pPr>
             <a:r>
-              <a:rPr sz="1350" b="1" dirty="0">
+              <a:rPr sz="1350" b="1">
                 <a:solidFill>
                   <a:srgbClr val="F5A623"/>
                 </a:solidFill>
@@ -3818,76 +3820,22 @@
               <a:t>▸ </a:t>
             </a:r>
             <a:r>
-              <a:rPr sz="1350" b="1" dirty="0">
+              <a:rPr sz="1350" b="1">
                 <a:solidFill>
                   <a:srgbClr val="CD8C21"/>
                 </a:solidFill>
                 <a:latin typeface="Segoe UI"/>
               </a:rPr>
-              <a:t>Hardcoded </a:t>
-            </a:r>
-            <a:r>
-              <a:rPr sz="1350" b="1" dirty="0" err="1">
-                <a:solidFill>
-                  <a:srgbClr val="CD8C21"/>
-                </a:solidFill>
-                <a:latin typeface="Segoe UI"/>
-              </a:rPr>
-              <a:t>aggiunge</a:t>
-            </a:r>
-            <a:r>
-              <a:rPr sz="1350" b="1" dirty="0">
-                <a:solidFill>
-                  <a:srgbClr val="CD8C21"/>
-                </a:solidFill>
-                <a:latin typeface="Segoe UI"/>
-              </a:rPr>
-              <a:t> </a:t>
-            </a:r>
-            <a:r>
-              <a:rPr lang="it-IT" sz="1350" b="1" dirty="0">
-                <a:solidFill>
-                  <a:srgbClr val="CD8C21"/>
-                </a:solidFill>
-                <a:latin typeface="Segoe UI"/>
-              </a:rPr>
-              <a:t>pochi</a:t>
-            </a:r>
-            <a:r>
-              <a:rPr sz="1350" b="1" dirty="0">
-                <a:solidFill>
-                  <a:srgbClr val="CD8C21"/>
-                </a:solidFill>
-                <a:latin typeface="Segoe UI"/>
-              </a:rPr>
-              <a:t> ns </a:t>
-            </a:r>
-            <a:r>
-              <a:rPr sz="1350" dirty="0">
-                <a:solidFill>
-                  <a:srgbClr val="E6EDF3"/>
-                </a:solidFill>
-                <a:latin typeface="Segoe UI"/>
-              </a:rPr>
-              <a:t>(tail call + secondo parse + rete int8) → solo ~1.6× il </a:t>
-            </a:r>
-            <a:r>
-              <a:rPr sz="1350" dirty="0" err="1">
-                <a:solidFill>
-                  <a:srgbClr val="E6EDF3"/>
-                </a:solidFill>
-                <a:latin typeface="Segoe UI"/>
-              </a:rPr>
-              <a:t>pavimento</a:t>
-            </a:r>
-            <a:r>
-              <a:rPr sz="1350" dirty="0">
-                <a:solidFill>
-                  <a:srgbClr val="E6EDF3"/>
-                </a:solidFill>
-                <a:latin typeface="Segoe UI"/>
-              </a:rPr>
-              <a:t>.</a:t>
+              <a:t>Hardcoded aggiunge ~19 ns </a:t>
+            </a:r>
+            <a:r>
+              <a:rPr sz="1350" b="0">
+                <a:solidFill>
+                  <a:srgbClr val="E6EDF3"/>
+                </a:solidFill>
+                <a:latin typeface="Segoe UI"/>
+              </a:rPr>
+              <a:t>(tail call + secondo parse + rete int8) → 1.68× il pavimento XDP.</a:t>
             </a:r>
           </a:p>
           <a:p>
@@ -4449,7 +4397,7 @@
                 </a:solidFill>
                 <a:latin typeface="Segoe UI"/>
               </a:rPr>
-              <a:t>21–39</a:t>
+              <a:t>28</a:t>
             </a:r>
           </a:p>
         </p:txBody>
@@ -4488,7 +4436,7 @@
                 </a:solidFill>
                 <a:latin typeface="Segoe UI"/>
               </a:rPr>
-              <a:t>35–63</a:t>
+              <a:t>47</a:t>
             </a:r>
           </a:p>
         </p:txBody>
@@ -4613,7 +4561,7 @@
                 </a:solidFill>
                 <a:latin typeface="Segoe UI"/>
               </a:rPr>
-              <a:t>25–48</a:t>
+              <a:t>35.7</a:t>
             </a:r>
           </a:p>
         </p:txBody>
@@ -4626,8 +4574,8 @@
         </p:nvSpPr>
         <p:spPr>
           <a:xfrm>
-            <a:off x="10287000" y="3338526"/>
-            <a:ext cx="1371600" cy="180947"/>
+            <a:off x="10287000" y="3200400"/>
+            <a:ext cx="1371600" cy="457200"/>
           </a:xfrm>
           <a:prstGeom prst="rect">
             <a:avLst/>
@@ -4652,34 +4600,7 @@
                 </a:solidFill>
                 <a:latin typeface="Segoe UI"/>
               </a:rPr>
-              <a:t>1</a:t>
-            </a:r>
-            <a:r>
-              <a:rPr lang="it-IT" sz="1200" b="0" dirty="0">
-                <a:solidFill>
-                  <a:srgbClr val="8B949E"/>
-                </a:solidFill>
-                <a:latin typeface="Segoe UI"/>
-              </a:rPr>
-              <a:t>4</a:t>
-            </a:r>
-            <a:r>
-              <a:rPr sz="1200" b="0" dirty="0">
-                <a:solidFill>
-                  <a:srgbClr val="8B949E"/>
-                </a:solidFill>
-                <a:latin typeface="Segoe UI"/>
-              </a:rPr>
-              <a:t>–2</a:t>
-            </a:r>
-            <a:r>
-              <a:rPr lang="it-IT" sz="1200" b="0" dirty="0">
-                <a:solidFill>
-                  <a:srgbClr val="8B949E"/>
-                </a:solidFill>
-                <a:latin typeface="Segoe UI"/>
-              </a:rPr>
-              <a:t>4</a:t>
+              <a:t>21.3</a:t>
             </a:r>
             <a:endParaRPr sz="1200" b="0" dirty="0">
               <a:solidFill>
@@ -4810,7 +4731,7 @@
                 </a:solidFill>
                 <a:latin typeface="Segoe UI"/>
               </a:rPr>
-              <a:t>113</a:t>
+              <a:t>129</a:t>
             </a:r>
           </a:p>
         </p:txBody>
@@ -4849,7 +4770,7 @@
                 </a:solidFill>
                 <a:latin typeface="Segoe UI"/>
               </a:rPr>
-              <a:t>980</a:t>
+              <a:t>997</a:t>
             </a:r>
           </a:p>
         </p:txBody>
@@ -4884,7 +4805,7 @@
                 </a:solidFill>
                 <a:latin typeface="Segoe UI"/>
               </a:rPr>
-              <a:t>Valori assoluti variabili tra run (VM condivisa); conta il rapporto relativo, stabile. Misure come minimo su 7 trial.</a:t>
+              <a:t>Minimo su 14 trial (2 run indipendenti da 7). I valori assoluti dipendono dalla macchina: su un box più lento baseline e hardcoded salgono insieme e il rapporto 1.68× resta.</a:t>
             </a:r>
           </a:p>
         </p:txBody>
@@ -4898,7 +4819,7 @@
 </file>
 
 <file path=ppt/slides/slide11.xml><?xml version="1.0" encoding="utf-8"?>
-<p:sld xmlns:a="http://schemas.openxmlformats.org/drawingml/2006/main" xmlns:r="http://schemas.openxmlformats.org/officeDocument/2006/relationships" xmlns:p="http://schemas.openxmlformats.org/presentationml/2006/main">
+<p:sld xmlns:a="http://schemas.openxmlformats.org/drawingml/2006/main" xmlns:p="http://schemas.openxmlformats.org/presentationml/2006/main" xmlns:r="http://schemas.openxmlformats.org/officeDocument/2006/relationships">
   <p:cSld>
     <p:spTree>
       <p:nvGrpSpPr>
@@ -4906,14 +4827,7 @@
         <p:cNvGrpSpPr/>
         <p:nvPr/>
       </p:nvGrpSpPr>
-      <p:grpSpPr>
-        <a:xfrm>
-          <a:off x="0" y="0"/>
-          <a:ext cx="0" cy="0"/>
-          <a:chOff x="0" y="0"/>
-          <a:chExt cx="0" cy="0"/>
-        </a:xfrm>
-      </p:grpSpPr>
+      <p:grpSpPr/>
       <p:sp>
         <p:nvSpPr>
           <p:cNvPr id="2" name="Rectangle 1"/>
@@ -4922,7 +4836,7 @@
         </p:nvSpPr>
         <p:spPr>
           <a:xfrm>
-            <a:off x="0" y="0"/>
+            <a:off x="0" y="7883"/>
             <a:ext cx="12191695" cy="6858000"/>
           </a:xfrm>
           <a:prstGeom prst="rect">
@@ -4989,7 +4903,7 @@
                 </a:solidFill>
                 <a:latin typeface="Georgia"/>
               </a:rPr>
-              <a:t>06</a:t>
+              <a:t>05</a:t>
             </a:r>
           </a:p>
         </p:txBody>
@@ -5024,7 +4938,7 @@
                 </a:solidFill>
                 <a:latin typeface="Georgia"/>
               </a:rPr>
-              <a:t>Ottimizzazione: mac_table da HASH ad ARRAY</a:t>
+              <a:t>Il design space misurato</a:t>
             </a:r>
           </a:p>
         </p:txBody>
@@ -5059,7 +4973,7 @@
                 </a:solidFill>
                 <a:latin typeface="Segoe UI"/>
               </a:rPr>
-              <a:t>Collo di bottiglia trasversale, identico in tutte e tre le pipeline</a:t>
+              <a:t>Le tre pipeline sullo stesso nodo, stesso modello, stessa aritmetica</a:t>
             </a:r>
           </a:p>
         </p:txBody>
@@ -5073,7 +4987,7 @@
         <p:spPr>
           <a:xfrm>
             <a:off x="640080" y="1783080"/>
-            <a:ext cx="5577840" cy="4114800"/>
+            <a:ext cx="5394960" cy="1473096"/>
           </a:xfrm>
           <a:prstGeom prst="rect">
             <a:avLst/>
@@ -5095,7 +5009,7 @@
               </a:spcAft>
             </a:pPr>
             <a:r>
-              <a:rPr sz="1400" b="1" dirty="0">
+              <a:rPr sz="1350" b="1">
                 <a:solidFill>
                   <a:srgbClr val="F5A623"/>
                 </a:solidFill>
@@ -5104,121 +5018,22 @@
               <a:t>▸ </a:t>
             </a:r>
             <a:r>
-              <a:rPr sz="1400" b="1" dirty="0" err="1">
-                <a:solidFill>
-                  <a:srgbClr val="F5A623"/>
-                </a:solidFill>
-                <a:latin typeface="Segoe UI"/>
-              </a:rPr>
-              <a:t>mac_table</a:t>
-            </a:r>
-            <a:r>
-              <a:rPr sz="1400" b="1" dirty="0">
-                <a:solidFill>
-                  <a:srgbClr val="F5A623"/>
-                </a:solidFill>
-                <a:latin typeface="Segoe UI"/>
-              </a:rPr>
-              <a:t> </a:t>
-            </a:r>
-            <a:r>
-              <a:rPr sz="1400" dirty="0">
-                <a:solidFill>
-                  <a:srgbClr val="E6EDF3"/>
-                </a:solidFill>
-                <a:latin typeface="Segoe UI"/>
-              </a:rPr>
-              <a:t>traduce la </a:t>
-            </a:r>
-            <a:r>
-              <a:rPr sz="1400" dirty="0" err="1">
-                <a:solidFill>
-                  <a:srgbClr val="E6EDF3"/>
-                </a:solidFill>
-                <a:latin typeface="Segoe UI"/>
-              </a:rPr>
-              <a:t>classe</a:t>
-            </a:r>
-            <a:r>
-              <a:rPr sz="1400" dirty="0">
-                <a:solidFill>
-                  <a:srgbClr val="E6EDF3"/>
-                </a:solidFill>
-                <a:latin typeface="Segoe UI"/>
-              </a:rPr>
-              <a:t> </a:t>
-            </a:r>
-            <a:r>
-              <a:rPr sz="1400" dirty="0" err="1">
-                <a:solidFill>
-                  <a:srgbClr val="E6EDF3"/>
-                </a:solidFill>
-                <a:latin typeface="Segoe UI"/>
-              </a:rPr>
-              <a:t>dell'argmax</a:t>
-            </a:r>
-            <a:r>
-              <a:rPr sz="1400" dirty="0">
-                <a:solidFill>
-                  <a:srgbClr val="E6EDF3"/>
-                </a:solidFill>
-                <a:latin typeface="Segoe UI"/>
-              </a:rPr>
-              <a:t> (</a:t>
-            </a:r>
-            <a:r>
-              <a:rPr sz="1400" dirty="0" err="1">
-                <a:solidFill>
-                  <a:srgbClr val="E6EDF3"/>
-                </a:solidFill>
-                <a:latin typeface="Segoe UI"/>
-              </a:rPr>
-              <a:t>intero</a:t>
-            </a:r>
-            <a:r>
-              <a:rPr sz="1400" dirty="0">
-                <a:solidFill>
-                  <a:srgbClr val="E6EDF3"/>
-                </a:solidFill>
-                <a:latin typeface="Segoe UI"/>
-              </a:rPr>
-              <a:t> </a:t>
-            </a:r>
-            <a:r>
-              <a:rPr sz="1400" dirty="0" err="1">
-                <a:solidFill>
-                  <a:srgbClr val="E6EDF3"/>
-                </a:solidFill>
-                <a:latin typeface="Segoe UI"/>
-              </a:rPr>
-              <a:t>denso</a:t>
-            </a:r>
-            <a:r>
-              <a:rPr sz="1400" dirty="0">
-                <a:solidFill>
-                  <a:srgbClr val="E6EDF3"/>
-                </a:solidFill>
-                <a:latin typeface="Segoe UI"/>
-              </a:rPr>
-              <a:t> 0..6) </a:t>
-            </a:r>
-            <a:r>
-              <a:rPr sz="1400" dirty="0" err="1">
-                <a:solidFill>
-                  <a:srgbClr val="E6EDF3"/>
-                </a:solidFill>
-                <a:latin typeface="Segoe UI"/>
-              </a:rPr>
-              <a:t>nell'azione</a:t>
-            </a:r>
-            <a:r>
-              <a:rPr sz="1400" dirty="0">
-                <a:solidFill>
-                  <a:srgbClr val="E6EDF3"/>
-                </a:solidFill>
-                <a:latin typeface="Segoe UI"/>
-              </a:rPr>
-              <a:t> di forwarding.</a:t>
+              <a:rPr sz="1350" b="1">
+                <a:solidFill>
+                  <a:srgbClr val="CD8C21"/>
+                </a:solidFill>
+                <a:latin typeface="Segoe UI"/>
+              </a:rPr>
+              <a:t>Costo monotono. </a:t>
+            </a:r>
+            <a:r>
+              <a:rPr sz="1350" b="0">
+                <a:solidFill>
+                  <a:srgbClr val="E6EDF3"/>
+                </a:solidFill>
+                <a:latin typeface="Segoe UI"/>
+              </a:rPr>
+              <a:t>Istruzioni, tail call, letture di mappa e memoria crescono da P1 a P3; le prestazioni calano nello stesso ordine.</a:t>
             </a:r>
           </a:p>
           <a:p>
@@ -5231,121 +5046,31 @@
               </a:spcAft>
             </a:pPr>
             <a:r>
-              <a:rPr sz="1400" b="1" dirty="0">
+              <a:rPr sz="1350" b="1">
                 <a:solidFill>
                   <a:srgbClr val="F5A623"/>
                 </a:solidFill>
                 <a:latin typeface="Segoe UI"/>
               </a:rPr>
-              <a:t>▸ Era BPF_HASH: </a:t>
-            </a:r>
-            <a:r>
-              <a:rPr sz="1400" dirty="0" err="1">
-                <a:solidFill>
-                  <a:srgbClr val="E6EDF3"/>
-                </a:solidFill>
-                <a:latin typeface="Segoe UI"/>
-              </a:rPr>
-              <a:t>ogni</a:t>
-            </a:r>
-            <a:r>
-              <a:rPr sz="1400" dirty="0">
-                <a:solidFill>
-                  <a:srgbClr val="E6EDF3"/>
-                </a:solidFill>
-                <a:latin typeface="Segoe UI"/>
-              </a:rPr>
-              <a:t> </a:t>
-            </a:r>
-            <a:r>
-              <a:rPr sz="1400" dirty="0" err="1">
-                <a:solidFill>
-                  <a:srgbClr val="E6EDF3"/>
-                </a:solidFill>
-                <a:latin typeface="Segoe UI"/>
-              </a:rPr>
-              <a:t>pacchetto</a:t>
-            </a:r>
-            <a:r>
-              <a:rPr sz="1400" dirty="0">
-                <a:solidFill>
-                  <a:srgbClr val="E6EDF3"/>
-                </a:solidFill>
-                <a:latin typeface="Segoe UI"/>
-              </a:rPr>
-              <a:t> </a:t>
-            </a:r>
-            <a:r>
-              <a:rPr sz="1400" dirty="0" err="1">
-                <a:solidFill>
-                  <a:srgbClr val="E6EDF3"/>
-                </a:solidFill>
-                <a:latin typeface="Segoe UI"/>
-              </a:rPr>
-              <a:t>redirettato</a:t>
-            </a:r>
-            <a:r>
-              <a:rPr sz="1400" dirty="0">
-                <a:solidFill>
-                  <a:srgbClr val="E6EDF3"/>
-                </a:solidFill>
-                <a:latin typeface="Segoe UI"/>
-              </a:rPr>
-              <a:t> </a:t>
-            </a:r>
-            <a:r>
-              <a:rPr sz="1400" dirty="0" err="1">
-                <a:solidFill>
-                  <a:srgbClr val="E6EDF3"/>
-                </a:solidFill>
-                <a:latin typeface="Segoe UI"/>
-              </a:rPr>
-              <a:t>paga</a:t>
-            </a:r>
-            <a:r>
-              <a:rPr sz="1400" dirty="0">
-                <a:solidFill>
-                  <a:srgbClr val="E6EDF3"/>
-                </a:solidFill>
-                <a:latin typeface="Segoe UI"/>
-              </a:rPr>
-              <a:t> hash + bucket + </a:t>
-            </a:r>
-            <a:r>
-              <a:rPr sz="1400" dirty="0" err="1">
-                <a:solidFill>
-                  <a:srgbClr val="E6EDF3"/>
-                </a:solidFill>
-                <a:latin typeface="Segoe UI"/>
-              </a:rPr>
-              <a:t>confronto</a:t>
-            </a:r>
-            <a:r>
-              <a:rPr sz="1400" dirty="0">
-                <a:solidFill>
-                  <a:srgbClr val="E6EDF3"/>
-                </a:solidFill>
-                <a:latin typeface="Segoe UI"/>
-              </a:rPr>
-              <a:t> — inutile con </a:t>
-            </a:r>
-            <a:r>
-              <a:rPr sz="1400" dirty="0" err="1">
-                <a:solidFill>
-                  <a:srgbClr val="E6EDF3"/>
-                </a:solidFill>
-                <a:latin typeface="Segoe UI"/>
-              </a:rPr>
-              <a:t>chiavi</a:t>
-            </a:r>
-            <a:r>
-              <a:rPr sz="1400" dirty="0">
-                <a:solidFill>
-                  <a:srgbClr val="E6EDF3"/>
-                </a:solidFill>
-                <a:latin typeface="Segoe UI"/>
-              </a:rPr>
-              <a:t> dense.</a:t>
+              <a:t>▸ </a:t>
+            </a:r>
+            <a:r>
+              <a:rPr sz="1350" b="1">
+                <a:solidFill>
+                  <a:srgbClr val="CD8C21"/>
+                </a:solidFill>
+                <a:latin typeface="Segoe UI"/>
+              </a:rPr>
+              <a:t>Accuratezza invariante. </a:t>
+            </a:r>
+            <a:r>
+              <a:rPr sz="1350" b="0">
+                <a:solidFill>
+                  <a:srgbClr val="E6EDF3"/>
+                </a:solidFill>
+                <a:latin typeface="Segoe UI"/>
+              </a:rPr>
+              <a:t>Le tre pipeline fanno la stessa aritmetica int8 e scelgono la stessa classe del riferimento Python: non è un asse del design space.</a:t>
             </a:r>
           </a:p>
           <a:p>
@@ -5358,144 +5083,56 @@
               </a:spcAft>
             </a:pPr>
             <a:r>
-              <a:rPr sz="1400" b="1" dirty="0">
+              <a:rPr sz="1350" b="1">
                 <a:solidFill>
                   <a:srgbClr val="F5A623"/>
                 </a:solidFill>
                 <a:latin typeface="Segoe UI"/>
               </a:rPr>
-              <a:t>▸ Ora BPF_ARRAY: </a:t>
-            </a:r>
-            <a:r>
-              <a:rPr sz="1400" dirty="0" err="1">
-                <a:solidFill>
-                  <a:srgbClr val="E6EDF3"/>
-                </a:solidFill>
-                <a:latin typeface="Segoe UI"/>
-              </a:rPr>
-              <a:t>indice</a:t>
-            </a:r>
-            <a:r>
-              <a:rPr sz="1400" dirty="0">
-                <a:solidFill>
-                  <a:srgbClr val="E6EDF3"/>
-                </a:solidFill>
-                <a:latin typeface="Segoe UI"/>
-              </a:rPr>
-              <a:t> </a:t>
-            </a:r>
-            <a:r>
-              <a:rPr sz="1400" dirty="0" err="1">
-                <a:solidFill>
-                  <a:srgbClr val="E6EDF3"/>
-                </a:solidFill>
-                <a:latin typeface="Segoe UI"/>
-              </a:rPr>
-              <a:t>diretto</a:t>
-            </a:r>
-            <a:r>
-              <a:rPr sz="1400" dirty="0">
-                <a:solidFill>
-                  <a:srgbClr val="E6EDF3"/>
-                </a:solidFill>
-                <a:latin typeface="Segoe UI"/>
-              </a:rPr>
-              <a:t> O(1), </a:t>
-            </a:r>
-            <a:r>
-              <a:rPr sz="1400" dirty="0" err="1">
-                <a:solidFill>
-                  <a:srgbClr val="E6EDF3"/>
-                </a:solidFill>
-                <a:latin typeface="Segoe UI"/>
-              </a:rPr>
-              <a:t>memoria</a:t>
-            </a:r>
-            <a:r>
-              <a:rPr sz="1400" dirty="0">
-                <a:solidFill>
-                  <a:srgbClr val="E6EDF3"/>
-                </a:solidFill>
-                <a:latin typeface="Segoe UI"/>
-              </a:rPr>
-              <a:t> </a:t>
-            </a:r>
-            <a:r>
-              <a:rPr sz="1400" dirty="0" err="1">
-                <a:solidFill>
-                  <a:srgbClr val="E6EDF3"/>
-                </a:solidFill>
-                <a:latin typeface="Segoe UI"/>
-              </a:rPr>
-              <a:t>contigua</a:t>
-            </a:r>
-            <a:r>
-              <a:rPr sz="1400" dirty="0">
-                <a:solidFill>
-                  <a:srgbClr val="E6EDF3"/>
-                </a:solidFill>
-                <a:latin typeface="Segoe UI"/>
-              </a:rPr>
-              <a:t>. In P1, P2, P3 e </a:t>
-            </a:r>
-            <a:r>
-              <a:rPr sz="1400" dirty="0" err="1">
-                <a:solidFill>
-                  <a:srgbClr val="E6EDF3"/>
-                </a:solidFill>
-                <a:latin typeface="Segoe UI"/>
-              </a:rPr>
-              <a:t>nel</a:t>
-            </a:r>
-            <a:r>
-              <a:rPr sz="1400" dirty="0">
-                <a:solidFill>
-                  <a:srgbClr val="E6EDF3"/>
-                </a:solidFill>
-                <a:latin typeface="Segoe UI"/>
-              </a:rPr>
-              <a:t> </a:t>
-            </a:r>
-            <a:r>
-              <a:rPr sz="1400" dirty="0" err="1">
-                <a:solidFill>
-                  <a:srgbClr val="E6EDF3"/>
-                </a:solidFill>
-                <a:latin typeface="Segoe UI"/>
-              </a:rPr>
-              <a:t>generatore</a:t>
-            </a:r>
-            <a:r>
-              <a:rPr sz="1400" dirty="0">
-                <a:solidFill>
-                  <a:srgbClr val="E6EDF3"/>
-                </a:solidFill>
-                <a:latin typeface="Segoe UI"/>
-              </a:rPr>
-              <a:t> AOT.</a:t>
-            </a:r>
-          </a:p>
-        </p:txBody>
-      </p:sp>
-      <p:sp>
-        <p:nvSpPr>
-          <p:cNvPr id="7" name="Rounded Rectangle 6"/>
+              <a:t>▸ </a:t>
+            </a:r>
+            <a:r>
+              <a:rPr sz="1350" b="1">
+                <a:solidFill>
+                  <a:srgbClr val="CD8C21"/>
+                </a:solidFill>
+                <a:latin typeface="Segoe UI"/>
+              </a:rPr>
+              <a:t>Latenza normalizzata. </a:t>
+            </a:r>
+            <a:r>
+              <a:rPr sz="1350" b="0">
+                <a:solidFill>
+                  <a:srgbClr val="E6EDF3"/>
+                </a:solidFill>
+                <a:latin typeface="Segoe UI"/>
+              </a:rPr>
+              <a:t>Rapporto sul baseline della stessa macchina — l'unico modo di confrontare misure prese su hardware diverso.</a:t>
+            </a:r>
+          </a:p>
+        </p:txBody>
+      </p:sp>
+      <p:sp>
+        <p:nvSpPr>
+          <p:cNvPr id="7" name="Rectangle 6"/>
           <p:cNvSpPr/>
           <p:nvPr/>
         </p:nvSpPr>
         <p:spPr>
           <a:xfrm>
-            <a:off x="6400800" y="1828800"/>
-            <a:ext cx="5257800" cy="1417320"/>
-          </a:xfrm>
-          <a:prstGeom prst="roundRect">
+            <a:off x="6355080" y="1828800"/>
+            <a:ext cx="5349240" cy="457200"/>
+          </a:xfrm>
+          <a:prstGeom prst="rect">
             <a:avLst/>
           </a:prstGeom>
           <a:solidFill>
-            <a:srgbClr val="1B222E"/>
+            <a:srgbClr val="222B38"/>
           </a:solidFill>
-          <a:ln>
-            <a:noFill/>
+          <a:ln w="6350">
+            <a:solidFill>
+              <a:srgbClr val="303945"/>
+            </a:solidFill>
           </a:ln>
           <a:effectLst/>
         </p:spPr>
@@ -5524,23 +5161,142 @@
       </p:sp>
       <p:sp>
         <p:nvSpPr>
-          <p:cNvPr id="8" name="Rectangle 7"/>
+          <p:cNvPr id="8" name="TextBox 7"/>
+          <p:cNvSpPr txBox="1"/>
+          <p:nvPr/>
+        </p:nvSpPr>
+        <p:spPr>
+          <a:xfrm>
+            <a:off x="6446520" y="1828800"/>
+            <a:ext cx="1874519" cy="457200"/>
+          </a:xfrm>
+          <a:prstGeom prst="rect">
+            <a:avLst/>
+          </a:prstGeom>
+          <a:noFill/>
+        </p:spPr>
+        <p:txBody>
+          <a:bodyPr wrap="square" lIns="0" tIns="0" rIns="0" bIns="0" anchor="ctr">
+            <a:spAutoFit/>
+          </a:bodyPr>
+          <a:lstStyle/>
+          <a:p>
+            <a:pPr>
+              <a:lnSpc>
+                <a:spcPct val="98000"/>
+              </a:lnSpc>
+            </a:pPr>
+            <a:r>
+              <a:rPr sz="1200" b="1">
+                <a:solidFill>
+                  <a:srgbClr val="F5A623"/>
+                </a:solidFill>
+                <a:latin typeface="Segoe UI"/>
+              </a:rPr>
+              <a:t>Metrica</a:t>
+            </a:r>
+          </a:p>
+        </p:txBody>
+      </p:sp>
+      <p:sp>
+        <p:nvSpPr>
+          <p:cNvPr id="9" name="TextBox 8"/>
+          <p:cNvSpPr txBox="1"/>
+          <p:nvPr/>
+        </p:nvSpPr>
+        <p:spPr>
+          <a:xfrm>
+            <a:off x="8321040" y="1828800"/>
+            <a:ext cx="1051560" cy="457200"/>
+          </a:xfrm>
+          <a:prstGeom prst="rect">
+            <a:avLst/>
+          </a:prstGeom>
+          <a:noFill/>
+        </p:spPr>
+        <p:txBody>
+          <a:bodyPr wrap="square" lIns="0" tIns="0" rIns="0" bIns="0" anchor="ctr">
+            <a:spAutoFit/>
+          </a:bodyPr>
+          <a:lstStyle/>
+          <a:p>
+            <a:pPr>
+              <a:lnSpc>
+                <a:spcPct val="98000"/>
+              </a:lnSpc>
+            </a:pPr>
+            <a:r>
+              <a:rPr sz="1200" b="1">
+                <a:solidFill>
+                  <a:srgbClr val="F5A623"/>
+                </a:solidFill>
+                <a:latin typeface="Segoe UI"/>
+              </a:rPr>
+              <a:t>P1</a:t>
+            </a:r>
+          </a:p>
+        </p:txBody>
+      </p:sp>
+      <p:sp>
+        <p:nvSpPr>
+          <p:cNvPr id="10" name="TextBox 9"/>
+          <p:cNvSpPr txBox="1"/>
+          <p:nvPr/>
+        </p:nvSpPr>
+        <p:spPr>
+          <a:xfrm>
+            <a:off x="9448800" y="1828800"/>
+            <a:ext cx="1051560" cy="457200"/>
+          </a:xfrm>
+          <a:prstGeom prst="rect">
+            <a:avLst/>
+          </a:prstGeom>
+          <a:noFill/>
+        </p:spPr>
+        <p:txBody>
+          <a:bodyPr wrap="square" lIns="0" tIns="0" rIns="0" bIns="0" anchor="ctr">
+            <a:spAutoFit/>
+          </a:bodyPr>
+          <a:lstStyle/>
+          <a:p>
+            <a:pPr>
+              <a:lnSpc>
+                <a:spcPct val="98000"/>
+              </a:lnSpc>
+            </a:pPr>
+            <a:r>
+              <a:rPr sz="1200" b="1">
+                <a:solidFill>
+                  <a:srgbClr val="F5A623"/>
+                </a:solidFill>
+                <a:latin typeface="Segoe UI"/>
+              </a:rPr>
+              <a:t>P2</a:t>
+            </a:r>
+          </a:p>
+        </p:txBody>
+      </p:sp>
+      <p:sp>
+        <p:nvSpPr>
+          <p:cNvPr id="11" name="Rectangle 10"/>
           <p:cNvSpPr/>
           <p:nvPr/>
         </p:nvSpPr>
         <p:spPr>
           <a:xfrm>
-            <a:off x="6492240" y="1874520"/>
-            <a:ext cx="5074920" cy="50800"/>
+            <a:off x="6355080" y="2286000"/>
+            <a:ext cx="5349240" cy="457200"/>
           </a:xfrm>
           <a:prstGeom prst="rect">
             <a:avLst/>
           </a:prstGeom>
           <a:solidFill>
-            <a:srgbClr val="F5A623"/>
+            <a:srgbClr val="1B222E"/>
           </a:solidFill>
-          <a:ln>
-            <a:noFill/>
+          <a:ln w="6350">
+            <a:solidFill>
+              <a:srgbClr val="303945"/>
+            </a:solidFill>
           </a:ln>
           <a:effectLst/>
         </p:spPr>
@@ -5569,266 +5325,142 @@
       </p:sp>
       <p:sp>
         <p:nvSpPr>
-          <p:cNvPr id="9" name="TextBox 8"/>
-          <p:cNvSpPr txBox="1"/>
-          <p:nvPr/>
-        </p:nvSpPr>
-        <p:spPr>
-          <a:xfrm>
-            <a:off x="6601968" y="1975104"/>
-            <a:ext cx="4892040" cy="365760"/>
-          </a:xfrm>
-          <a:prstGeom prst="rect">
-            <a:avLst/>
-          </a:prstGeom>
-          <a:noFill/>
-        </p:spPr>
-        <p:txBody>
-          <a:bodyPr wrap="square" lIns="0" tIns="0" rIns="0" bIns="0">
-            <a:spAutoFit/>
-          </a:bodyPr>
-          <a:lstStyle/>
-          <a:p>
-            <a:pPr algn="l"/>
-            <a:r>
-              <a:rPr sz="1350" b="1" i="0">
-                <a:solidFill>
-                  <a:srgbClr val="F5A623"/>
-                </a:solidFill>
-                <a:latin typeface="Segoe UI"/>
-              </a:rPr>
-              <a:t>il cambio</a:t>
-            </a:r>
-          </a:p>
-        </p:txBody>
-      </p:sp>
-      <p:sp>
-        <p:nvSpPr>
-          <p:cNvPr id="10" name="TextBox 9"/>
-          <p:cNvSpPr txBox="1"/>
-          <p:nvPr/>
-        </p:nvSpPr>
-        <p:spPr>
-          <a:xfrm>
-            <a:off x="6601968" y="2194560"/>
-            <a:ext cx="4892040" cy="960120"/>
-          </a:xfrm>
-          <a:prstGeom prst="rect">
-            <a:avLst/>
-          </a:prstGeom>
-          <a:noFill/>
-        </p:spPr>
-        <p:txBody>
-          <a:bodyPr wrap="square" lIns="0" tIns="0" rIns="0" bIns="0">
+          <p:cNvPr id="12" name="TextBox 11"/>
+          <p:cNvSpPr txBox="1"/>
+          <p:nvPr/>
+        </p:nvSpPr>
+        <p:spPr>
+          <a:xfrm>
+            <a:off x="6446520" y="2286000"/>
+            <a:ext cx="1874519" cy="457200"/>
+          </a:xfrm>
+          <a:prstGeom prst="rect">
+            <a:avLst/>
+          </a:prstGeom>
+          <a:noFill/>
+        </p:spPr>
+        <p:txBody>
+          <a:bodyPr wrap="square" lIns="0" tIns="0" rIns="0" bIns="0" anchor="ctr">
             <a:spAutoFit/>
           </a:bodyPr>
           <a:lstStyle/>
           <a:p>
             <a:pPr>
               <a:lnSpc>
-                <a:spcPct val="115000"/>
+                <a:spcPct val="98000"/>
               </a:lnSpc>
             </a:pPr>
             <a:r>
-              <a:rPr sz="1200" dirty="0">
+              <a:rPr sz="1200" b="1">
+                <a:solidFill>
+                  <a:srgbClr val="E6EDF3"/>
+                </a:solidFill>
+                <a:latin typeface="Segoe UI"/>
+              </a:rPr>
+              <a:t>Tail call / pkt</a:t>
+            </a:r>
+          </a:p>
+        </p:txBody>
+      </p:sp>
+      <p:sp>
+        <p:nvSpPr>
+          <p:cNvPr id="13" name="TextBox 12"/>
+          <p:cNvSpPr txBox="1"/>
+          <p:nvPr/>
+        </p:nvSpPr>
+        <p:spPr>
+          <a:xfrm>
+            <a:off x="8321040" y="2286000"/>
+            <a:ext cx="1051560" cy="457200"/>
+          </a:xfrm>
+          <a:prstGeom prst="rect">
+            <a:avLst/>
+          </a:prstGeom>
+          <a:noFill/>
+        </p:spPr>
+        <p:txBody>
+          <a:bodyPr wrap="square" lIns="0" tIns="0" rIns="0" bIns="0" anchor="ctr">
+            <a:spAutoFit/>
+          </a:bodyPr>
+          <a:lstStyle/>
+          <a:p>
+            <a:pPr>
+              <a:lnSpc>
+                <a:spcPct val="98000"/>
+              </a:lnSpc>
+            </a:pPr>
+            <a:r>
+              <a:rPr sz="1200" b="0">
+                <a:solidFill>
+                  <a:srgbClr val="E6EDF3"/>
+                </a:solidFill>
+                <a:latin typeface="Segoe UI"/>
+              </a:rPr>
+              <a:t>1</a:t>
+            </a:r>
+          </a:p>
+        </p:txBody>
+      </p:sp>
+      <p:sp>
+        <p:nvSpPr>
+          <p:cNvPr id="14" name="TextBox 13"/>
+          <p:cNvSpPr txBox="1"/>
+          <p:nvPr/>
+        </p:nvSpPr>
+        <p:spPr>
+          <a:xfrm>
+            <a:off x="9448800" y="2286000"/>
+            <a:ext cx="1051560" cy="457200"/>
+          </a:xfrm>
+          <a:prstGeom prst="rect">
+            <a:avLst/>
+          </a:prstGeom>
+          <a:noFill/>
+        </p:spPr>
+        <p:txBody>
+          <a:bodyPr wrap="square" lIns="0" tIns="0" rIns="0" bIns="0" anchor="ctr">
+            <a:spAutoFit/>
+          </a:bodyPr>
+          <a:lstStyle/>
+          <a:p>
+            <a:pPr>
+              <a:lnSpc>
+                <a:spcPct val="98000"/>
+              </a:lnSpc>
+            </a:pPr>
+            <a:r>
+              <a:rPr sz="1200" b="0">
                 <a:solidFill>
                   <a:srgbClr val="8B949E"/>
                 </a:solidFill>
-                <a:latin typeface="Consolas"/>
-              </a:rPr>
-              <a:t>- BPF_HASH(</a:t>
-            </a:r>
-            <a:r>
-              <a:rPr sz="1200" dirty="0" err="1">
-                <a:solidFill>
-                  <a:srgbClr val="8B949E"/>
-                </a:solidFill>
-                <a:latin typeface="Consolas"/>
-              </a:rPr>
-              <a:t>mac_table</a:t>
-            </a:r>
-            <a:r>
-              <a:rPr sz="1200" dirty="0">
-                <a:solidFill>
-                  <a:srgbClr val="8B949E"/>
-                </a:solidFill>
-                <a:latin typeface="Consolas"/>
-              </a:rPr>
-              <a:t>, __u32, ...);</a:t>
-            </a:r>
-          </a:p>
-          <a:p>
-            <a:pPr>
-              <a:lnSpc>
-                <a:spcPct val="115000"/>
-              </a:lnSpc>
-            </a:pPr>
-            <a:r>
-              <a:rPr sz="1200" dirty="0">
-                <a:solidFill>
-                  <a:srgbClr val="8B949E"/>
-                </a:solidFill>
-                <a:latin typeface="Consolas"/>
-              </a:rPr>
-              <a:t>+ BPF_ARRAY(</a:t>
-            </a:r>
-            <a:r>
-              <a:rPr sz="1200" dirty="0" err="1">
-                <a:solidFill>
-                  <a:srgbClr val="8B949E"/>
-                </a:solidFill>
-                <a:latin typeface="Consolas"/>
-              </a:rPr>
-              <a:t>mac_table</a:t>
-            </a:r>
-            <a:r>
-              <a:rPr sz="1200" dirty="0">
-                <a:solidFill>
-                  <a:srgbClr val="8B949E"/>
-                </a:solidFill>
-                <a:latin typeface="Consolas"/>
-              </a:rPr>
-              <a:t>, </a:t>
-            </a:r>
-            <a:r>
-              <a:rPr sz="1200" dirty="0" err="1">
-                <a:solidFill>
-                  <a:srgbClr val="8B949E"/>
-                </a:solidFill>
-                <a:latin typeface="Consolas"/>
-              </a:rPr>
-              <a:t>fwd_action</a:t>
-            </a:r>
-            <a:r>
-              <a:rPr sz="1200" dirty="0">
-                <a:solidFill>
-                  <a:srgbClr val="8B949E"/>
-                </a:solidFill>
-                <a:latin typeface="Consolas"/>
-              </a:rPr>
-              <a:t>, 8);</a:t>
-            </a:r>
-          </a:p>
-          <a:p>
-            <a:pPr>
-              <a:lnSpc>
-                <a:spcPct val="115000"/>
-              </a:lnSpc>
-            </a:pPr>
-            <a:endParaRPr sz="1200" dirty="0">
-              <a:solidFill>
-                <a:srgbClr val="8B949E"/>
-              </a:solidFill>
-              <a:latin typeface="Consolas"/>
-            </a:endParaRPr>
-          </a:p>
-          <a:p>
-            <a:pPr>
-              <a:lnSpc>
-                <a:spcPct val="115000"/>
-              </a:lnSpc>
-            </a:pPr>
-            <a:r>
-              <a:rPr sz="1200" dirty="0">
-                <a:solidFill>
-                  <a:srgbClr val="8B949E"/>
-                </a:solidFill>
-                <a:latin typeface="Consolas"/>
-              </a:rPr>
-              <a:t>// ARRAY non </a:t>
-            </a:r>
-            <a:r>
-              <a:rPr sz="1200" dirty="0" err="1">
-                <a:solidFill>
-                  <a:srgbClr val="8B949E"/>
-                </a:solidFill>
-                <a:latin typeface="Consolas"/>
-              </a:rPr>
-              <a:t>ritorna</a:t>
-            </a:r>
-            <a:r>
-              <a:rPr sz="1200" dirty="0">
-                <a:solidFill>
-                  <a:srgbClr val="8B949E"/>
-                </a:solidFill>
-                <a:latin typeface="Consolas"/>
-              </a:rPr>
-              <a:t> </a:t>
-            </a:r>
-            <a:r>
-              <a:rPr sz="1200" dirty="0" err="1">
-                <a:solidFill>
-                  <a:srgbClr val="8B949E"/>
-                </a:solidFill>
-                <a:latin typeface="Consolas"/>
-              </a:rPr>
-              <a:t>mai</a:t>
-            </a:r>
-            <a:r>
-              <a:rPr sz="1200" dirty="0">
-                <a:solidFill>
-                  <a:srgbClr val="8B949E"/>
-                </a:solidFill>
-                <a:latin typeface="Consolas"/>
-              </a:rPr>
-              <a:t> NULL:</a:t>
-            </a:r>
-          </a:p>
-          <a:p>
-            <a:pPr>
-              <a:lnSpc>
-                <a:spcPct val="115000"/>
-              </a:lnSpc>
-            </a:pPr>
-            <a:r>
-              <a:rPr sz="1200" dirty="0">
-                <a:solidFill>
-                  <a:srgbClr val="8B949E"/>
-                </a:solidFill>
-                <a:latin typeface="Consolas"/>
-              </a:rPr>
-              <a:t>// MISS  =  act-&gt;</a:t>
-            </a:r>
-            <a:r>
-              <a:rPr sz="1200" dirty="0" err="1">
-                <a:solidFill>
-                  <a:srgbClr val="8B949E"/>
-                </a:solidFill>
-                <a:latin typeface="Consolas"/>
-              </a:rPr>
-              <a:t>ifindex</a:t>
-            </a:r>
-            <a:r>
-              <a:rPr sz="1200" dirty="0">
-                <a:solidFill>
-                  <a:srgbClr val="8B949E"/>
-                </a:solidFill>
-                <a:latin typeface="Consolas"/>
-              </a:rPr>
-              <a:t> == 0</a:t>
-            </a:r>
-          </a:p>
-        </p:txBody>
-      </p:sp>
-      <p:sp>
-        <p:nvSpPr>
-          <p:cNvPr id="11" name="Rounded Rectangle 10"/>
+                <a:latin typeface="Segoe UI"/>
+              </a:rPr>
+              <a:t>1</a:t>
+            </a:r>
+          </a:p>
+        </p:txBody>
+      </p:sp>
+      <p:sp>
+        <p:nvSpPr>
+          <p:cNvPr id="15" name="Rectangle 14"/>
           <p:cNvSpPr/>
           <p:nvPr/>
         </p:nvSpPr>
         <p:spPr>
           <a:xfrm>
-            <a:off x="6400800" y="3520440"/>
-            <a:ext cx="5257800" cy="1737360"/>
-          </a:xfrm>
-          <a:prstGeom prst="roundRect">
+            <a:off x="6355080" y="2743200"/>
+            <a:ext cx="5349240" cy="457200"/>
+          </a:xfrm>
+          <a:prstGeom prst="rect">
             <a:avLst/>
           </a:prstGeom>
           <a:solidFill>
             <a:srgbClr val="1B222E"/>
           </a:solidFill>
-          <a:ln>
-            <a:noFill/>
+          <a:ln w="6350">
+            <a:solidFill>
+              <a:srgbClr val="303945"/>
+            </a:solidFill>
           </a:ln>
           <a:effectLst/>
         </p:spPr>
@@ -5857,23 +5489,142 @@
       </p:sp>
       <p:sp>
         <p:nvSpPr>
-          <p:cNvPr id="12" name="Rectangle 11"/>
+          <p:cNvPr id="16" name="TextBox 15"/>
+          <p:cNvSpPr txBox="1"/>
+          <p:nvPr/>
+        </p:nvSpPr>
+        <p:spPr>
+          <a:xfrm>
+            <a:off x="6446520" y="2743200"/>
+            <a:ext cx="1874519" cy="457200"/>
+          </a:xfrm>
+          <a:prstGeom prst="rect">
+            <a:avLst/>
+          </a:prstGeom>
+          <a:noFill/>
+        </p:spPr>
+        <p:txBody>
+          <a:bodyPr wrap="square" lIns="0" tIns="0" rIns="0" bIns="0" anchor="ctr">
+            <a:spAutoFit/>
+          </a:bodyPr>
+          <a:lstStyle/>
+          <a:p>
+            <a:pPr>
+              <a:lnSpc>
+                <a:spcPct val="98000"/>
+              </a:lnSpc>
+            </a:pPr>
+            <a:r>
+              <a:rPr sz="1200" b="1">
+                <a:solidFill>
+                  <a:srgbClr val="E6EDF3"/>
+                </a:solidFill>
+                <a:latin typeface="Segoe UI"/>
+              </a:rPr>
+              <a:t>Lookup / pkt</a:t>
+            </a:r>
+          </a:p>
+        </p:txBody>
+      </p:sp>
+      <p:sp>
+        <p:nvSpPr>
+          <p:cNvPr id="17" name="TextBox 16"/>
+          <p:cNvSpPr txBox="1"/>
+          <p:nvPr/>
+        </p:nvSpPr>
+        <p:spPr>
+          <a:xfrm>
+            <a:off x="8321040" y="2743200"/>
+            <a:ext cx="1051560" cy="457200"/>
+          </a:xfrm>
+          <a:prstGeom prst="rect">
+            <a:avLst/>
+          </a:prstGeom>
+          <a:noFill/>
+        </p:spPr>
+        <p:txBody>
+          <a:bodyPr wrap="square" lIns="0" tIns="0" rIns="0" bIns="0" anchor="ctr">
+            <a:spAutoFit/>
+          </a:bodyPr>
+          <a:lstStyle/>
+          <a:p>
+            <a:pPr>
+              <a:lnSpc>
+                <a:spcPct val="98000"/>
+              </a:lnSpc>
+            </a:pPr>
+            <a:r>
+              <a:rPr sz="1200" b="0">
+                <a:solidFill>
+                  <a:srgbClr val="E6EDF3"/>
+                </a:solidFill>
+                <a:latin typeface="Segoe UI"/>
+              </a:rPr>
+              <a:t>4.0</a:t>
+            </a:r>
+          </a:p>
+        </p:txBody>
+      </p:sp>
+      <p:sp>
+        <p:nvSpPr>
+          <p:cNvPr id="18" name="TextBox 17"/>
+          <p:cNvSpPr txBox="1"/>
+          <p:nvPr/>
+        </p:nvSpPr>
+        <p:spPr>
+          <a:xfrm>
+            <a:off x="9448800" y="2743200"/>
+            <a:ext cx="1051560" cy="457200"/>
+          </a:xfrm>
+          <a:prstGeom prst="rect">
+            <a:avLst/>
+          </a:prstGeom>
+          <a:noFill/>
+        </p:spPr>
+        <p:txBody>
+          <a:bodyPr wrap="square" lIns="0" tIns="0" rIns="0" bIns="0" anchor="ctr">
+            <a:spAutoFit/>
+          </a:bodyPr>
+          <a:lstStyle/>
+          <a:p>
+            <a:pPr>
+              <a:lnSpc>
+                <a:spcPct val="98000"/>
+              </a:lnSpc>
+            </a:pPr>
+            <a:r>
+              <a:rPr sz="1200" b="0">
+                <a:solidFill>
+                  <a:srgbClr val="8B949E"/>
+                </a:solidFill>
+                <a:latin typeface="Segoe UI"/>
+              </a:rPr>
+              <a:t>8.0</a:t>
+            </a:r>
+          </a:p>
+        </p:txBody>
+      </p:sp>
+      <p:sp>
+        <p:nvSpPr>
+          <p:cNvPr id="19" name="Rectangle 18"/>
           <p:cNvSpPr/>
           <p:nvPr/>
         </p:nvSpPr>
         <p:spPr>
           <a:xfrm>
-            <a:off x="6400800" y="3520440"/>
-            <a:ext cx="50800" cy="1737360"/>
+            <a:off x="6355080" y="3200400"/>
+            <a:ext cx="5349240" cy="457200"/>
           </a:xfrm>
           <a:prstGeom prst="rect">
             <a:avLst/>
           </a:prstGeom>
           <a:solidFill>
-            <a:srgbClr val="3FB950"/>
+            <a:srgbClr val="1B222E"/>
           </a:solidFill>
-          <a:ln>
-            <a:noFill/>
+          <a:ln w="6350">
+            <a:solidFill>
+              <a:srgbClr val="303945"/>
+            </a:solidFill>
           </a:ln>
           <a:effectLst/>
         </p:spPr>
@@ -5902,14 +5653,14 @@
       </p:sp>
       <p:sp>
         <p:nvSpPr>
-          <p:cNvPr id="13" name="TextBox 12"/>
-          <p:cNvSpPr txBox="1"/>
-          <p:nvPr/>
-        </p:nvSpPr>
-        <p:spPr>
-          <a:xfrm>
-            <a:off x="6601968" y="3611880"/>
-            <a:ext cx="4910328" cy="1554480"/>
+          <p:cNvPr id="20" name="TextBox 19"/>
+          <p:cNvSpPr txBox="1"/>
+          <p:nvPr/>
+        </p:nvSpPr>
+        <p:spPr>
+          <a:xfrm>
+            <a:off x="6446520" y="3200400"/>
+            <a:ext cx="1874519" cy="457200"/>
           </a:xfrm>
           <a:prstGeom prst="rect">
             <a:avLst/>
@@ -5924,17 +5675,501 @@
           <a:p>
             <a:pPr>
               <a:lnSpc>
-                <a:spcPct val="106000"/>
+                <a:spcPct val="98000"/>
               </a:lnSpc>
             </a:pPr>
             <a:r>
-              <a:rPr sz="1200">
-                <a:solidFill>
-                  <a:srgbClr val="E6EDF3"/>
-                </a:solidFill>
-                <a:latin typeface="Segoe UI"/>
-              </a:rPr>
-              <a:t>Punto critico: una BPF_ARRAY non ritorna mai NULL (slot azzerati). La logica 'classe non provvista → MISS' usa ifindex==0 come sentinella. Suite --only kernel: PASS su tutte e 3.</a:t>
+              <a:rPr sz="1200" b="1">
+                <a:solidFill>
+                  <a:srgbClr val="E6EDF3"/>
+                </a:solidFill>
+                <a:latin typeface="Segoe UI"/>
+              </a:rPr>
+              <a:t>Latenza (ns)</a:t>
+            </a:r>
+          </a:p>
+        </p:txBody>
+      </p:sp>
+      <p:sp>
+        <p:nvSpPr>
+          <p:cNvPr id="21" name="TextBox 20"/>
+          <p:cNvSpPr txBox="1"/>
+          <p:nvPr/>
+        </p:nvSpPr>
+        <p:spPr>
+          <a:xfrm>
+            <a:off x="8321040" y="3200400"/>
+            <a:ext cx="1051560" cy="457200"/>
+          </a:xfrm>
+          <a:prstGeom prst="rect">
+            <a:avLst/>
+          </a:prstGeom>
+          <a:noFill/>
+        </p:spPr>
+        <p:txBody>
+          <a:bodyPr wrap="square" lIns="0" tIns="0" rIns="0" bIns="0" anchor="ctr">
+            <a:spAutoFit/>
+          </a:bodyPr>
+          <a:lstStyle/>
+          <a:p>
+            <a:pPr>
+              <a:lnSpc>
+                <a:spcPct val="98000"/>
+              </a:lnSpc>
+            </a:pPr>
+            <a:r>
+              <a:rPr sz="1200" b="0">
+                <a:solidFill>
+                  <a:srgbClr val="E6EDF3"/>
+                </a:solidFill>
+                <a:latin typeface="Segoe UI"/>
+              </a:rPr>
+              <a:t>47</a:t>
+            </a:r>
+          </a:p>
+        </p:txBody>
+      </p:sp>
+      <p:sp>
+        <p:nvSpPr>
+          <p:cNvPr id="22" name="TextBox 21"/>
+          <p:cNvSpPr txBox="1"/>
+          <p:nvPr/>
+        </p:nvSpPr>
+        <p:spPr>
+          <a:xfrm>
+            <a:off x="9448800" y="3200400"/>
+            <a:ext cx="1051560" cy="457200"/>
+          </a:xfrm>
+          <a:prstGeom prst="rect">
+            <a:avLst/>
+          </a:prstGeom>
+          <a:noFill/>
+        </p:spPr>
+        <p:txBody>
+          <a:bodyPr wrap="square" lIns="0" tIns="0" rIns="0" bIns="0" anchor="ctr">
+            <a:spAutoFit/>
+          </a:bodyPr>
+          <a:lstStyle/>
+          <a:p>
+            <a:pPr>
+              <a:lnSpc>
+                <a:spcPct val="98000"/>
+              </a:lnSpc>
+            </a:pPr>
+            <a:r>
+              <a:rPr sz="1200" b="0" dirty="0">
+                <a:solidFill>
+                  <a:srgbClr val="8B949E"/>
+                </a:solidFill>
+                <a:latin typeface="Segoe UI"/>
+              </a:rPr>
+              <a:t>224</a:t>
+            </a:r>
+            <a:endParaRPr sz="1200" b="0" dirty="0">
+              <a:solidFill>
+                <a:srgbClr val="8B949E"/>
+              </a:solidFill>
+              <a:latin typeface="Segoe UI"/>
+            </a:endParaRPr>
+          </a:p>
+        </p:txBody>
+      </p:sp>
+      <p:sp>
+        <p:nvSpPr>
+          <p:cNvPr id="23" name="Rectangle 22"/>
+          <p:cNvSpPr/>
+          <p:nvPr/>
+        </p:nvSpPr>
+        <p:spPr>
+          <a:xfrm>
+            <a:off x="6355080" y="3657600"/>
+            <a:ext cx="5349240" cy="457200"/>
+          </a:xfrm>
+          <a:prstGeom prst="rect">
+            <a:avLst/>
+          </a:prstGeom>
+          <a:solidFill>
+            <a:srgbClr val="1B222E"/>
+          </a:solidFill>
+          <a:ln w="6350">
+            <a:solidFill>
+              <a:srgbClr val="303945"/>
+            </a:solidFill>
+          </a:ln>
+          <a:effectLst/>
+        </p:spPr>
+        <p:style>
+          <a:lnRef idx="1">
+            <a:schemeClr val="accent1"/>
+          </a:lnRef>
+          <a:fillRef idx="3">
+            <a:schemeClr val="accent1"/>
+          </a:fillRef>
+          <a:effectRef idx="2">
+            <a:schemeClr val="accent1"/>
+          </a:effectRef>
+          <a:fontRef idx="minor">
+            <a:schemeClr val="lt1"/>
+          </a:fontRef>
+        </p:style>
+        <p:txBody>
+          <a:bodyPr rtlCol="0" anchor="ctr"/>
+          <a:lstStyle/>
+          <a:p>
+            <a:pPr algn="ctr"/>
+            <a:endParaRPr/>
+          </a:p>
+        </p:txBody>
+      </p:sp>
+      <p:sp>
+        <p:nvSpPr>
+          <p:cNvPr id="24" name="TextBox 23"/>
+          <p:cNvSpPr txBox="1"/>
+          <p:nvPr/>
+        </p:nvSpPr>
+        <p:spPr>
+          <a:xfrm>
+            <a:off x="6446520" y="3657600"/>
+            <a:ext cx="1874519" cy="457200"/>
+          </a:xfrm>
+          <a:prstGeom prst="rect">
+            <a:avLst/>
+          </a:prstGeom>
+          <a:noFill/>
+        </p:spPr>
+        <p:txBody>
+          <a:bodyPr wrap="square" lIns="0" tIns="0" rIns="0" bIns="0" anchor="ctr">
+            <a:spAutoFit/>
+          </a:bodyPr>
+          <a:lstStyle/>
+          <a:p>
+            <a:pPr>
+              <a:lnSpc>
+                <a:spcPct val="98000"/>
+              </a:lnSpc>
+            </a:pPr>
+            <a:r>
+              <a:rPr sz="1200" b="1">
+                <a:solidFill>
+                  <a:srgbClr val="E6EDF3"/>
+                </a:solidFill>
+                <a:latin typeface="Segoe UI"/>
+              </a:rPr>
+              <a:t>× baseline</a:t>
+            </a:r>
+          </a:p>
+        </p:txBody>
+      </p:sp>
+      <p:sp>
+        <p:nvSpPr>
+          <p:cNvPr id="25" name="TextBox 24"/>
+          <p:cNvSpPr txBox="1"/>
+          <p:nvPr/>
+        </p:nvSpPr>
+        <p:spPr>
+          <a:xfrm>
+            <a:off x="8321040" y="3657600"/>
+            <a:ext cx="1051560" cy="457200"/>
+          </a:xfrm>
+          <a:prstGeom prst="rect">
+            <a:avLst/>
+          </a:prstGeom>
+          <a:noFill/>
+        </p:spPr>
+        <p:txBody>
+          <a:bodyPr wrap="square" lIns="0" tIns="0" rIns="0" bIns="0" anchor="ctr">
+            <a:spAutoFit/>
+          </a:bodyPr>
+          <a:lstStyle/>
+          <a:p>
+            <a:pPr>
+              <a:lnSpc>
+                <a:spcPct val="98000"/>
+              </a:lnSpc>
+            </a:pPr>
+            <a:r>
+              <a:rPr sz="1200" b="0">
+                <a:solidFill>
+                  <a:srgbClr val="E6EDF3"/>
+                </a:solidFill>
+                <a:latin typeface="Segoe UI"/>
+              </a:rPr>
+              <a:t>1.68</a:t>
+            </a:r>
+          </a:p>
+        </p:txBody>
+      </p:sp>
+      <p:sp>
+        <p:nvSpPr>
+          <p:cNvPr id="26" name="TextBox 25"/>
+          <p:cNvSpPr txBox="1"/>
+          <p:nvPr/>
+        </p:nvSpPr>
+        <p:spPr>
+          <a:xfrm>
+            <a:off x="9448800" y="3657600"/>
+            <a:ext cx="1051560" cy="457200"/>
+          </a:xfrm>
+          <a:prstGeom prst="rect">
+            <a:avLst/>
+          </a:prstGeom>
+          <a:noFill/>
+        </p:spPr>
+        <p:txBody>
+          <a:bodyPr wrap="square" lIns="0" tIns="0" rIns="0" bIns="0" anchor="ctr">
+            <a:spAutoFit/>
+          </a:bodyPr>
+          <a:lstStyle/>
+          <a:p>
+            <a:pPr>
+              <a:lnSpc>
+                <a:spcPct val="98000"/>
+              </a:lnSpc>
+            </a:pPr>
+            <a:r>
+              <a:rPr sz="1200" b="0">
+                <a:solidFill>
+                  <a:srgbClr val="8B949E"/>
+                </a:solidFill>
+                <a:latin typeface="Segoe UI"/>
+              </a:rPr>
+              <a:t>8.00</a:t>
+            </a:r>
+          </a:p>
+        </p:txBody>
+      </p:sp>
+      <p:sp>
+        <p:nvSpPr>
+          <p:cNvPr id="27" name="TextBox 26"/>
+          <p:cNvSpPr txBox="1"/>
+          <p:nvPr/>
+        </p:nvSpPr>
+        <p:spPr>
+          <a:xfrm>
+            <a:off x="6355080" y="4663440"/>
+            <a:ext cx="5303520" cy="822960"/>
+          </a:xfrm>
+          <a:prstGeom prst="rect">
+            <a:avLst/>
+          </a:prstGeom>
+          <a:noFill/>
+        </p:spPr>
+        <p:txBody>
+          <a:bodyPr wrap="square" lIns="0" tIns="0" rIns="0" bIns="0">
+            <a:spAutoFit/>
+          </a:bodyPr>
+          <a:lstStyle/>
+          <a:p>
+            <a:pPr algn="l"/>
+            <a:r>
+              <a:rPr sz="1100" b="0" i="1">
+                <a:solidFill>
+                  <a:srgbClr val="8B949E"/>
+                </a:solidFill>
+                <a:latin typeface="Segoe UI"/>
+              </a:rPr>
+              <a:t>Suite --only kernel, minimo su 14 trial. P1 non è stato modificato e il suo rapporto sul baseline resta 1.67 → 1.68 fra le due macchine: è la verifica che la normalizzazione regge.</a:t>
+            </a:r>
+          </a:p>
+        </p:txBody>
+      </p:sp>
+      <p:sp>
+        <p:nvSpPr>
+          <p:cNvPr id="10" name="TextBox 9"/>
+          <p:cNvSpPr txBox="1"/>
+          <p:nvPr/>
+        </p:nvSpPr>
+        <p:spPr>
+          <a:xfrm>
+            <a:off x="10576560" y="1828800"/>
+            <a:ext cx="1051560" cy="457200"/>
+          </a:xfrm>
+          <a:prstGeom prst="rect">
+            <a:avLst/>
+          </a:prstGeom>
+          <a:noFill/>
+        </p:spPr>
+        <p:txBody>
+          <a:bodyPr wrap="square" lIns="0" tIns="0" rIns="0" bIns="0" anchor="ctr">
+            <a:spAutoFit/>
+          </a:bodyPr>
+          <a:lstStyle/>
+          <a:p>
+            <a:pPr>
+              <a:lnSpc>
+                <a:spcPct val="98000"/>
+              </a:lnSpc>
+            </a:pPr>
+            <a:r>
+              <a:rPr sz="1200" b="1">
+                <a:solidFill>
+                  <a:srgbClr val="F5A623"/>
+                </a:solidFill>
+                <a:latin typeface="Segoe UI"/>
+              </a:rPr>
+              <a:t>P3</a:t>
+            </a:r>
+          </a:p>
+        </p:txBody>
+      </p:sp>
+      <p:sp>
+        <p:nvSpPr>
+          <p:cNvPr id="14" name="TextBox 13"/>
+          <p:cNvSpPr txBox="1"/>
+          <p:nvPr/>
+        </p:nvSpPr>
+        <p:spPr>
+          <a:xfrm>
+            <a:off x="10576560" y="2286000"/>
+            <a:ext cx="1051560" cy="457200"/>
+          </a:xfrm>
+          <a:prstGeom prst="rect">
+            <a:avLst/>
+          </a:prstGeom>
+          <a:noFill/>
+        </p:spPr>
+        <p:txBody>
+          <a:bodyPr wrap="square" lIns="0" tIns="0" rIns="0" bIns="0" anchor="ctr">
+            <a:spAutoFit/>
+          </a:bodyPr>
+          <a:lstStyle/>
+          <a:p>
+            <a:pPr>
+              <a:lnSpc>
+                <a:spcPct val="98000"/>
+              </a:lnSpc>
+            </a:pPr>
+            <a:r>
+              <a:rPr sz="1200" b="0">
+                <a:solidFill>
+                  <a:srgbClr val="8B949E"/>
+                </a:solidFill>
+                <a:latin typeface="Segoe UI"/>
+              </a:rPr>
+              <a:t>3</a:t>
+            </a:r>
+          </a:p>
+        </p:txBody>
+      </p:sp>
+      <p:sp>
+        <p:nvSpPr>
+          <p:cNvPr id="18" name="TextBox 17"/>
+          <p:cNvSpPr txBox="1"/>
+          <p:nvPr/>
+        </p:nvSpPr>
+        <p:spPr>
+          <a:xfrm>
+            <a:off x="10576560" y="2743200"/>
+            <a:ext cx="1051560" cy="457200"/>
+          </a:xfrm>
+          <a:prstGeom prst="rect">
+            <a:avLst/>
+          </a:prstGeom>
+          <a:noFill/>
+        </p:spPr>
+        <p:txBody>
+          <a:bodyPr wrap="square" lIns="0" tIns="0" rIns="0" bIns="0" anchor="ctr">
+            <a:spAutoFit/>
+          </a:bodyPr>
+          <a:lstStyle/>
+          <a:p>
+            <a:pPr>
+              <a:lnSpc>
+                <a:spcPct val="98000"/>
+              </a:lnSpc>
+            </a:pPr>
+            <a:r>
+              <a:rPr sz="1200" b="0">
+                <a:solidFill>
+                  <a:srgbClr val="8B949E"/>
+                </a:solidFill>
+                <a:latin typeface="Segoe UI"/>
+              </a:rPr>
+              <a:t>26.0</a:t>
+            </a:r>
+          </a:p>
+        </p:txBody>
+      </p:sp>
+      <p:sp>
+        <p:nvSpPr>
+          <p:cNvPr id="22" name="TextBox 21"/>
+          <p:cNvSpPr txBox="1"/>
+          <p:nvPr/>
+        </p:nvSpPr>
+        <p:spPr>
+          <a:xfrm>
+            <a:off x="10576560" y="3200400"/>
+            <a:ext cx="1051560" cy="457200"/>
+          </a:xfrm>
+          <a:prstGeom prst="rect">
+            <a:avLst/>
+          </a:prstGeom>
+          <a:noFill/>
+        </p:spPr>
+        <p:txBody>
+          <a:bodyPr wrap="square" lIns="0" tIns="0" rIns="0" bIns="0" anchor="ctr">
+            <a:spAutoFit/>
+          </a:bodyPr>
+          <a:lstStyle/>
+          <a:p>
+            <a:pPr>
+              <a:lnSpc>
+                <a:spcPct val="98000"/>
+              </a:lnSpc>
+            </a:pPr>
+            <a:r>
+              <a:rPr sz="1200" b="0" dirty="0">
+                <a:solidFill>
+                  <a:srgbClr val="8B949E"/>
+                </a:solidFill>
+                <a:latin typeface="Segoe UI"/>
+              </a:rPr>
+              <a:t>387</a:t>
+            </a:r>
+            <a:endParaRPr sz="1200" b="0" dirty="0">
+              <a:solidFill>
+                <a:srgbClr val="8B949E"/>
+              </a:solidFill>
+              <a:latin typeface="Segoe UI"/>
+            </a:endParaRPr>
+          </a:p>
+        </p:txBody>
+      </p:sp>
+      <p:sp>
+        <p:nvSpPr>
+          <p:cNvPr id="26" name="TextBox 25"/>
+          <p:cNvSpPr txBox="1"/>
+          <p:nvPr/>
+        </p:nvSpPr>
+        <p:spPr>
+          <a:xfrm>
+            <a:off x="10576560" y="3657600"/>
+            <a:ext cx="1051560" cy="457200"/>
+          </a:xfrm>
+          <a:prstGeom prst="rect">
+            <a:avLst/>
+          </a:prstGeom>
+          <a:noFill/>
+        </p:spPr>
+        <p:txBody>
+          <a:bodyPr wrap="square" lIns="0" tIns="0" rIns="0" bIns="0" anchor="ctr">
+            <a:spAutoFit/>
+          </a:bodyPr>
+          <a:lstStyle/>
+          <a:p>
+            <a:pPr>
+              <a:lnSpc>
+                <a:spcPct val="98000"/>
+              </a:lnSpc>
+            </a:pPr>
+            <a:r>
+              <a:rPr sz="1200" b="0">
+                <a:solidFill>
+                  <a:srgbClr val="8B949E"/>
+                </a:solidFill>
+                <a:latin typeface="Segoe UI"/>
+              </a:rPr>
+              <a:t>13.82</a:t>
             </a:r>
           </a:p>
         </p:txBody>
@@ -5972,7 +6207,7 @@
         </p:nvSpPr>
         <p:spPr>
           <a:xfrm>
-            <a:off x="0" y="7883"/>
+            <a:off x="0" y="0"/>
             <a:ext cx="12191695" cy="6858000"/>
           </a:xfrm>
           <a:prstGeom prst="rect">
@@ -6039,7 +6274,7 @@
                 </a:solidFill>
                 <a:latin typeface="Georgia"/>
               </a:rPr>
-              <a:t>07</a:t>
+              <a:t>06</a:t>
             </a:r>
           </a:p>
         </p:txBody>
@@ -6074,7 +6309,7 @@
                 </a:solidFill>
                 <a:latin typeface="Georgia"/>
               </a:rPr>
-              <a:t>Metodologia di misura e riscontro in letteratura</a:t>
+              <a:t>Ottimizzazione: mac_table da HASH ad ARRAY</a:t>
             </a:r>
           </a:p>
         </p:txBody>
@@ -6109,7 +6344,7 @@
                 </a:solidFill>
                 <a:latin typeface="Segoe UI"/>
               </a:rPr>
-              <a:t>Perché il minimo su N trial, e cosa dice la letteratura</a:t>
+              <a:t>Collo di bottiglia trasversale, identico in tutte e tre le pipeline</a:t>
             </a:r>
           </a:p>
         </p:txBody>
@@ -6123,7 +6358,7 @@
         <p:spPr>
           <a:xfrm>
             <a:off x="640080" y="1783080"/>
-            <a:ext cx="5623560" cy="4114800"/>
+            <a:ext cx="5577840" cy="4114800"/>
           </a:xfrm>
           <a:prstGeom prst="rect">
             <a:avLst/>
@@ -6145,7 +6380,7 @@
               </a:spcAft>
             </a:pPr>
             <a:r>
-              <a:rPr sz="1300" b="1" dirty="0">
+              <a:rPr sz="1400" b="1" dirty="0">
                 <a:solidFill>
                   <a:srgbClr val="F5A623"/>
                 </a:solidFill>
@@ -6154,139 +6389,121 @@
               <a:t>▸ </a:t>
             </a:r>
             <a:r>
-              <a:rPr sz="1300" b="1" dirty="0" err="1">
+              <a:rPr sz="1400" b="1" dirty="0" err="1">
                 <a:solidFill>
                   <a:srgbClr val="F5A623"/>
                 </a:solidFill>
                 <a:latin typeface="Segoe UI"/>
               </a:rPr>
-              <a:t>Rumore</a:t>
-            </a:r>
-            <a:r>
-              <a:rPr sz="1300" b="1" dirty="0">
+              <a:t>mac_table</a:t>
+            </a:r>
+            <a:r>
+              <a:rPr sz="1400" b="1" dirty="0">
                 <a:solidFill>
                   <a:srgbClr val="F5A623"/>
                 </a:solidFill>
                 <a:latin typeface="Segoe UI"/>
               </a:rPr>
-              <a:t> a senso </a:t>
-            </a:r>
-            <a:r>
-              <a:rPr sz="1300" b="1" dirty="0" err="1">
-                <a:solidFill>
-                  <a:srgbClr val="F5A623"/>
-                </a:solidFill>
-                <a:latin typeface="Segoe UI"/>
-              </a:rPr>
-              <a:t>unico</a:t>
-            </a:r>
-            <a:r>
-              <a:rPr sz="1300" b="1" dirty="0">
-                <a:solidFill>
-                  <a:srgbClr val="F5A623"/>
-                </a:solidFill>
-                <a:latin typeface="Segoe UI"/>
-              </a:rPr>
-              <a:t>: </a:t>
-            </a:r>
-            <a:r>
-              <a:rPr sz="1300" dirty="0">
-                <a:solidFill>
-                  <a:srgbClr val="E6EDF3"/>
-                </a:solidFill>
-                <a:latin typeface="Segoe UI"/>
-              </a:rPr>
-              <a:t>interrupt/scheduling </a:t>
-            </a:r>
-            <a:r>
-              <a:rPr sz="1300" dirty="0" err="1">
-                <a:solidFill>
-                  <a:srgbClr val="E6EDF3"/>
-                </a:solidFill>
-                <a:latin typeface="Segoe UI"/>
-              </a:rPr>
-              <a:t>possono</a:t>
-            </a:r>
-            <a:r>
-              <a:rPr sz="1300" dirty="0">
-                <a:solidFill>
-                  <a:srgbClr val="E6EDF3"/>
-                </a:solidFill>
-                <a:latin typeface="Segoe UI"/>
-              </a:rPr>
-              <a:t> solo </a:t>
-            </a:r>
-            <a:r>
-              <a:rPr sz="1300" dirty="0" err="1">
-                <a:solidFill>
-                  <a:srgbClr val="E6EDF3"/>
-                </a:solidFill>
-                <a:latin typeface="Segoe UI"/>
-              </a:rPr>
-              <a:t>rallentare</a:t>
-            </a:r>
-            <a:r>
-              <a:rPr sz="1300" dirty="0">
-                <a:solidFill>
-                  <a:srgbClr val="E6EDF3"/>
-                </a:solidFill>
-                <a:latin typeface="Segoe UI"/>
-              </a:rPr>
-              <a:t> un </a:t>
-            </a:r>
-            <a:r>
-              <a:rPr sz="1300" dirty="0" err="1">
-                <a:solidFill>
-                  <a:srgbClr val="E6EDF3"/>
-                </a:solidFill>
-                <a:latin typeface="Segoe UI"/>
-              </a:rPr>
-              <a:t>campione</a:t>
-            </a:r>
-            <a:r>
-              <a:rPr sz="1300" dirty="0">
-                <a:solidFill>
-                  <a:srgbClr val="E6EDF3"/>
-                </a:solidFill>
-                <a:latin typeface="Segoe UI"/>
-              </a:rPr>
-              <a:t>, </a:t>
-            </a:r>
-            <a:r>
-              <a:rPr sz="1300" dirty="0" err="1">
-                <a:solidFill>
-                  <a:srgbClr val="E6EDF3"/>
-                </a:solidFill>
-                <a:latin typeface="Segoe UI"/>
-              </a:rPr>
-              <a:t>mai</a:t>
-            </a:r>
-            <a:r>
-              <a:rPr sz="1300" dirty="0">
-                <a:solidFill>
-                  <a:srgbClr val="E6EDF3"/>
-                </a:solidFill>
-                <a:latin typeface="Segoe UI"/>
-              </a:rPr>
               <a:t> </a:t>
             </a:r>
             <a:r>
-              <a:rPr sz="1300" dirty="0" err="1">
-                <a:solidFill>
-                  <a:srgbClr val="E6EDF3"/>
-                </a:solidFill>
-                <a:latin typeface="Segoe UI"/>
-              </a:rPr>
-              <a:t>accelerarlo</a:t>
-            </a:r>
-            <a:r>
-              <a:rPr sz="1300" dirty="0">
-                <a:solidFill>
-                  <a:srgbClr val="E6EDF3"/>
-                </a:solidFill>
-                <a:latin typeface="Segoe UI"/>
-              </a:rPr>
-              <a:t>.</a:t>
+              <a:rPr sz="1400" dirty="0">
+                <a:solidFill>
+                  <a:srgbClr val="E6EDF3"/>
+                </a:solidFill>
+                <a:latin typeface="Segoe UI"/>
+              </a:rPr>
+              <a:t>traduce la </a:t>
+            </a:r>
+            <a:r>
+              <a:rPr sz="1400" dirty="0" err="1">
+                <a:solidFill>
+                  <a:srgbClr val="E6EDF3"/>
+                </a:solidFill>
+                <a:latin typeface="Segoe UI"/>
+              </a:rPr>
+              <a:t>classe</a:t>
+            </a:r>
+            <a:r>
+              <a:rPr sz="1400" dirty="0">
+                <a:solidFill>
+                  <a:srgbClr val="E6EDF3"/>
+                </a:solidFill>
+                <a:latin typeface="Segoe UI"/>
+              </a:rPr>
+              <a:t> </a:t>
+            </a:r>
+            <a:r>
+              <a:rPr sz="1400" dirty="0" err="1">
+                <a:solidFill>
+                  <a:srgbClr val="E6EDF3"/>
+                </a:solidFill>
+                <a:latin typeface="Segoe UI"/>
+              </a:rPr>
+              <a:t>dell'argmax</a:t>
+            </a:r>
+            <a:r>
+              <a:rPr sz="1400" dirty="0">
+                <a:solidFill>
+                  <a:srgbClr val="E6EDF3"/>
+                </a:solidFill>
+                <a:latin typeface="Segoe UI"/>
+              </a:rPr>
+              <a:t> (</a:t>
+            </a:r>
+            <a:r>
+              <a:rPr sz="1400" dirty="0" err="1">
+                <a:solidFill>
+                  <a:srgbClr val="E6EDF3"/>
+                </a:solidFill>
+                <a:latin typeface="Segoe UI"/>
+              </a:rPr>
+              <a:t>intero</a:t>
+            </a:r>
+            <a:r>
+              <a:rPr sz="1400" dirty="0">
+                <a:solidFill>
+                  <a:srgbClr val="E6EDF3"/>
+                </a:solidFill>
+                <a:latin typeface="Segoe UI"/>
+              </a:rPr>
+              <a:t> </a:t>
+            </a:r>
+            <a:r>
+              <a:rPr sz="1400" dirty="0" err="1">
+                <a:solidFill>
+                  <a:srgbClr val="E6EDF3"/>
+                </a:solidFill>
+                <a:latin typeface="Segoe UI"/>
+              </a:rPr>
+              <a:t>denso</a:t>
+            </a:r>
+            <a:r>
+              <a:rPr sz="1400" dirty="0">
+                <a:solidFill>
+                  <a:srgbClr val="E6EDF3"/>
+                </a:solidFill>
+                <a:latin typeface="Segoe UI"/>
+              </a:rPr>
+              <a:t> 0..6) </a:t>
+            </a:r>
+            <a:r>
+              <a:rPr sz="1400" dirty="0" err="1">
+                <a:solidFill>
+                  <a:srgbClr val="E6EDF3"/>
+                </a:solidFill>
+                <a:latin typeface="Segoe UI"/>
+              </a:rPr>
+              <a:t>nell'azione</a:t>
+            </a:r>
+            <a:r>
+              <a:rPr sz="1400" dirty="0">
+                <a:solidFill>
+                  <a:srgbClr val="E6EDF3"/>
+                </a:solidFill>
+                <a:latin typeface="Segoe UI"/>
+              </a:rPr>
+              <a:t> di forwarding.</a:t>
             </a:r>
           </a:p>
           <a:p>
@@ -6299,88 +6516,43 @@
               </a:spcAft>
             </a:pPr>
             <a:r>
-              <a:rPr sz="1300" b="1" dirty="0">
+              <a:rPr sz="1400" b="1" dirty="0">
                 <a:solidFill>
                   <a:srgbClr val="F5A623"/>
                 </a:solidFill>
                 <a:latin typeface="Segoe UI"/>
               </a:rPr>
-              <a:t>▸ </a:t>
-            </a:r>
-            <a:r>
-              <a:rPr sz="1300" b="1" dirty="0" err="1">
-                <a:solidFill>
-                  <a:srgbClr val="F5A623"/>
-                </a:solidFill>
-                <a:latin typeface="Segoe UI"/>
-              </a:rPr>
-              <a:t>Quindi</a:t>
-            </a:r>
-            <a:r>
-              <a:rPr sz="1300" b="1" dirty="0">
-                <a:solidFill>
-                  <a:srgbClr val="F5A623"/>
-                </a:solidFill>
-                <a:latin typeface="Segoe UI"/>
-              </a:rPr>
-              <a:t> il </a:t>
-            </a:r>
-            <a:r>
-              <a:rPr sz="1300" b="1" dirty="0" err="1">
-                <a:solidFill>
-                  <a:srgbClr val="F5A623"/>
-                </a:solidFill>
-                <a:latin typeface="Segoe UI"/>
-              </a:rPr>
-              <a:t>minimo</a:t>
-            </a:r>
-            <a:r>
-              <a:rPr sz="1300" b="1" dirty="0">
-                <a:solidFill>
-                  <a:srgbClr val="F5A623"/>
+              <a:t>▸ Era BPF_HASH: </a:t>
+            </a:r>
+            <a:r>
+              <a:rPr sz="1400" dirty="0" err="1">
+                <a:solidFill>
+                  <a:srgbClr val="E6EDF3"/>
+                </a:solidFill>
+                <a:latin typeface="Segoe UI"/>
+              </a:rPr>
+              <a:t>ogni</a:t>
+            </a:r>
+            <a:r>
+              <a:rPr sz="1400" dirty="0">
+                <a:solidFill>
+                  <a:srgbClr val="E6EDF3"/>
                 </a:solidFill>
                 <a:latin typeface="Segoe UI"/>
               </a:rPr>
               <a:t> </a:t>
             </a:r>
             <a:r>
-              <a:rPr sz="1300" b="1" dirty="0" err="1">
-                <a:solidFill>
-                  <a:srgbClr val="F5A623"/>
-                </a:solidFill>
-                <a:latin typeface="Segoe UI"/>
-              </a:rPr>
-              <a:t>su</a:t>
-            </a:r>
-            <a:r>
-              <a:rPr sz="1300" b="1" dirty="0">
-                <a:solidFill>
-                  <a:srgbClr val="F5A623"/>
-                </a:solidFill>
-                <a:latin typeface="Segoe UI"/>
-              </a:rPr>
-              <a:t> N trial </a:t>
-            </a:r>
-            <a:r>
-              <a:rPr sz="1300" dirty="0">
-                <a:solidFill>
-                  <a:srgbClr val="E6EDF3"/>
-                </a:solidFill>
-                <a:latin typeface="Segoe UI"/>
-              </a:rPr>
-              <a:t>è la </a:t>
-            </a:r>
-            <a:r>
-              <a:rPr sz="1300" dirty="0" err="1">
-                <a:solidFill>
-                  <a:srgbClr val="E6EDF3"/>
-                </a:solidFill>
-                <a:latin typeface="Segoe UI"/>
-              </a:rPr>
-              <a:t>statistica</a:t>
-            </a:r>
-            <a:r>
-              <a:rPr sz="1300" dirty="0">
+              <a:rPr sz="1400" dirty="0" err="1">
+                <a:solidFill>
+                  <a:srgbClr val="E6EDF3"/>
+                </a:solidFill>
+                <a:latin typeface="Segoe UI"/>
+              </a:rPr>
+              <a:t>pacchetto</a:t>
+            </a:r>
+            <a:r>
+              <a:rPr sz="1400" dirty="0">
                 <a:solidFill>
                   <a:srgbClr val="E6EDF3"/>
                 </a:solidFill>
@@ -6389,40 +6561,76 @@
               <a:t> </a:t>
             </a:r>
             <a:r>
-              <a:rPr sz="1300" dirty="0" err="1">
-                <a:solidFill>
-                  <a:srgbClr val="E6EDF3"/>
-                </a:solidFill>
-                <a:latin typeface="Segoe UI"/>
-              </a:rPr>
-              <a:t>giusta</a:t>
-            </a:r>
-            <a:r>
-              <a:rPr sz="1300" dirty="0">
-                <a:solidFill>
-                  <a:srgbClr val="E6EDF3"/>
-                </a:solidFill>
-                <a:latin typeface="Segoe UI"/>
-              </a:rPr>
-              <a:t> (non media né </a:t>
-            </a:r>
-            <a:r>
-              <a:rPr sz="1300" dirty="0" err="1">
-                <a:solidFill>
-                  <a:srgbClr val="E6EDF3"/>
-                </a:solidFill>
-                <a:latin typeface="Segoe UI"/>
-              </a:rPr>
-              <a:t>mediana</a:t>
-            </a:r>
-            <a:r>
-              <a:rPr sz="1300" dirty="0">
-                <a:solidFill>
-                  <a:srgbClr val="E6EDF3"/>
-                </a:solidFill>
-                <a:latin typeface="Segoe UI"/>
-              </a:rPr>
-              <a:t>) — come hyperfine / Google Benchmark.</a:t>
+              <a:rPr sz="1400" dirty="0" err="1">
+                <a:solidFill>
+                  <a:srgbClr val="E6EDF3"/>
+                </a:solidFill>
+                <a:latin typeface="Segoe UI"/>
+              </a:rPr>
+              <a:t>redirettato</a:t>
+            </a:r>
+            <a:r>
+              <a:rPr sz="1400" dirty="0">
+                <a:solidFill>
+                  <a:srgbClr val="E6EDF3"/>
+                </a:solidFill>
+                <a:latin typeface="Segoe UI"/>
+              </a:rPr>
+              <a:t> </a:t>
+            </a:r>
+            <a:r>
+              <a:rPr sz="1400" dirty="0" err="1">
+                <a:solidFill>
+                  <a:srgbClr val="E6EDF3"/>
+                </a:solidFill>
+                <a:latin typeface="Segoe UI"/>
+              </a:rPr>
+              <a:t>paga</a:t>
+            </a:r>
+            <a:r>
+              <a:rPr sz="1400" dirty="0">
+                <a:solidFill>
+                  <a:srgbClr val="E6EDF3"/>
+                </a:solidFill>
+                <a:latin typeface="Segoe UI"/>
+              </a:rPr>
+              <a:t> hash + bucket + </a:t>
+            </a:r>
+            <a:r>
+              <a:rPr sz="1400" dirty="0" err="1">
+                <a:solidFill>
+                  <a:srgbClr val="E6EDF3"/>
+                </a:solidFill>
+                <a:latin typeface="Segoe UI"/>
+              </a:rPr>
+              <a:t>confronto</a:t>
+            </a:r>
+            <a:r>
+              <a:rPr sz="1400" dirty="0">
+                <a:solidFill>
+                  <a:srgbClr val="E6EDF3"/>
+                </a:solidFill>
+                <a:latin typeface="Segoe UI"/>
+              </a:rPr>
+              <a:t> — inutile con </a:t>
+            </a:r>
+            <a:r>
+              <a:rPr sz="1400" dirty="0" err="1">
+                <a:solidFill>
+                  <a:srgbClr val="E6EDF3"/>
+                </a:solidFill>
+                <a:latin typeface="Segoe UI"/>
+              </a:rPr>
+              <a:t>chiavi</a:t>
+            </a:r>
+            <a:r>
+              <a:rPr sz="1400" dirty="0">
+                <a:solidFill>
+                  <a:srgbClr val="E6EDF3"/>
+                </a:solidFill>
+                <a:latin typeface="Segoe UI"/>
+              </a:rPr>
+              <a:t> dense.</a:t>
             </a:r>
           </a:p>
           <a:p>
@@ -6435,201 +6643,583 @@
               </a:spcAft>
             </a:pPr>
             <a:r>
-              <a:rPr sz="1300" b="1" dirty="0">
+              <a:rPr sz="1400" b="1" dirty="0">
                 <a:solidFill>
                   <a:srgbClr val="F5A623"/>
                 </a:solidFill>
                 <a:latin typeface="Segoe UI"/>
               </a:rPr>
-              <a:t>▸ </a:t>
-            </a:r>
-            <a:r>
-              <a:rPr sz="1300" b="1" dirty="0" err="1">
+              <a:t>▸ Ora BPF_ARRAY: </a:t>
+            </a:r>
+            <a:r>
+              <a:rPr sz="1400" dirty="0" err="1">
+                <a:solidFill>
+                  <a:srgbClr val="E6EDF3"/>
+                </a:solidFill>
+                <a:latin typeface="Segoe UI"/>
+              </a:rPr>
+              <a:t>indice</a:t>
+            </a:r>
+            <a:r>
+              <a:rPr sz="1400" dirty="0">
+                <a:solidFill>
+                  <a:srgbClr val="E6EDF3"/>
+                </a:solidFill>
+                <a:latin typeface="Segoe UI"/>
+              </a:rPr>
+              <a:t> </a:t>
+            </a:r>
+            <a:r>
+              <a:rPr sz="1400" dirty="0" err="1">
+                <a:solidFill>
+                  <a:srgbClr val="E6EDF3"/>
+                </a:solidFill>
+                <a:latin typeface="Segoe UI"/>
+              </a:rPr>
+              <a:t>diretto</a:t>
+            </a:r>
+            <a:r>
+              <a:rPr sz="1400" dirty="0">
+                <a:solidFill>
+                  <a:srgbClr val="E6EDF3"/>
+                </a:solidFill>
+                <a:latin typeface="Segoe UI"/>
+              </a:rPr>
+              <a:t> O(1), </a:t>
+            </a:r>
+            <a:r>
+              <a:rPr sz="1400" dirty="0" err="1">
+                <a:solidFill>
+                  <a:srgbClr val="E6EDF3"/>
+                </a:solidFill>
+                <a:latin typeface="Segoe UI"/>
+              </a:rPr>
+              <a:t>memoria</a:t>
+            </a:r>
+            <a:r>
+              <a:rPr sz="1400" dirty="0">
+                <a:solidFill>
+                  <a:srgbClr val="E6EDF3"/>
+                </a:solidFill>
+                <a:latin typeface="Segoe UI"/>
+              </a:rPr>
+              <a:t> </a:t>
+            </a:r>
+            <a:r>
+              <a:rPr sz="1400" dirty="0" err="1">
+                <a:solidFill>
+                  <a:srgbClr val="E6EDF3"/>
+                </a:solidFill>
+                <a:latin typeface="Segoe UI"/>
+              </a:rPr>
+              <a:t>contigua</a:t>
+            </a:r>
+            <a:r>
+              <a:rPr sz="1400" dirty="0">
+                <a:solidFill>
+                  <a:srgbClr val="E6EDF3"/>
+                </a:solidFill>
+                <a:latin typeface="Segoe UI"/>
+              </a:rPr>
+              <a:t>. In P1, P2, P3 e </a:t>
+            </a:r>
+            <a:r>
+              <a:rPr sz="1400" dirty="0" err="1">
+                <a:solidFill>
+                  <a:srgbClr val="E6EDF3"/>
+                </a:solidFill>
+                <a:latin typeface="Segoe UI"/>
+              </a:rPr>
+              <a:t>nel</a:t>
+            </a:r>
+            <a:r>
+              <a:rPr sz="1400" dirty="0">
+                <a:solidFill>
+                  <a:srgbClr val="E6EDF3"/>
+                </a:solidFill>
+                <a:latin typeface="Segoe UI"/>
+              </a:rPr>
+              <a:t> </a:t>
+            </a:r>
+            <a:r>
+              <a:rPr sz="1400" dirty="0" err="1">
+                <a:solidFill>
+                  <a:srgbClr val="E6EDF3"/>
+                </a:solidFill>
+                <a:latin typeface="Segoe UI"/>
+              </a:rPr>
+              <a:t>generatore</a:t>
+            </a:r>
+            <a:r>
+              <a:rPr sz="1400" dirty="0">
+                <a:solidFill>
+                  <a:srgbClr val="E6EDF3"/>
+                </a:solidFill>
+                <a:latin typeface="Segoe UI"/>
+              </a:rPr>
+              <a:t> AOT.</a:t>
+            </a:r>
+          </a:p>
+        </p:txBody>
+      </p:sp>
+      <p:sp>
+        <p:nvSpPr>
+          <p:cNvPr id="7" name="Rounded Rectangle 6"/>
+          <p:cNvSpPr/>
+          <p:nvPr/>
+        </p:nvSpPr>
+        <p:spPr>
+          <a:xfrm>
+            <a:off x="6400800" y="1828800"/>
+            <a:ext cx="5257800" cy="1417320"/>
+          </a:xfrm>
+          <a:prstGeom prst="roundRect">
+            <a:avLst/>
+          </a:prstGeom>
+          <a:solidFill>
+            <a:srgbClr val="1B222E"/>
+          </a:solidFill>
+          <a:ln>
+            <a:noFill/>
+          </a:ln>
+          <a:effectLst/>
+        </p:spPr>
+        <p:style>
+          <a:lnRef idx="1">
+            <a:schemeClr val="accent1"/>
+          </a:lnRef>
+          <a:fillRef idx="3">
+            <a:schemeClr val="accent1"/>
+          </a:fillRef>
+          <a:effectRef idx="2">
+            <a:schemeClr val="accent1"/>
+          </a:effectRef>
+          <a:fontRef idx="minor">
+            <a:schemeClr val="lt1"/>
+          </a:fontRef>
+        </p:style>
+        <p:txBody>
+          <a:bodyPr rtlCol="0" anchor="ctr"/>
+          <a:lstStyle/>
+          <a:p>
+            <a:pPr algn="ctr"/>
+            <a:endParaRPr/>
+          </a:p>
+        </p:txBody>
+      </p:sp>
+      <p:sp>
+        <p:nvSpPr>
+          <p:cNvPr id="8" name="Rectangle 7"/>
+          <p:cNvSpPr/>
+          <p:nvPr/>
+        </p:nvSpPr>
+        <p:spPr>
+          <a:xfrm>
+            <a:off x="6492240" y="1874520"/>
+            <a:ext cx="5074920" cy="50800"/>
+          </a:xfrm>
+          <a:prstGeom prst="rect">
+            <a:avLst/>
+          </a:prstGeom>
+          <a:solidFill>
+            <a:srgbClr val="F5A623"/>
+          </a:solidFill>
+          <a:ln>
+            <a:noFill/>
+          </a:ln>
+          <a:effectLst/>
+        </p:spPr>
+        <p:style>
+          <a:lnRef idx="1">
+            <a:schemeClr val="accent1"/>
+          </a:lnRef>
+          <a:fillRef idx="3">
+            <a:schemeClr val="accent1"/>
+          </a:fillRef>
+          <a:effectRef idx="2">
+            <a:schemeClr val="accent1"/>
+          </a:effectRef>
+          <a:fontRef idx="minor">
+            <a:schemeClr val="lt1"/>
+          </a:fontRef>
+        </p:style>
+        <p:txBody>
+          <a:bodyPr rtlCol="0" anchor="ctr"/>
+          <a:lstStyle/>
+          <a:p>
+            <a:pPr algn="ctr"/>
+            <a:endParaRPr/>
+          </a:p>
+        </p:txBody>
+      </p:sp>
+      <p:sp>
+        <p:nvSpPr>
+          <p:cNvPr id="9" name="TextBox 8"/>
+          <p:cNvSpPr txBox="1"/>
+          <p:nvPr/>
+        </p:nvSpPr>
+        <p:spPr>
+          <a:xfrm>
+            <a:off x="6601968" y="1975104"/>
+            <a:ext cx="4892040" cy="365760"/>
+          </a:xfrm>
+          <a:prstGeom prst="rect">
+            <a:avLst/>
+          </a:prstGeom>
+          <a:noFill/>
+        </p:spPr>
+        <p:txBody>
+          <a:bodyPr wrap="square" lIns="0" tIns="0" rIns="0" bIns="0">
+            <a:spAutoFit/>
+          </a:bodyPr>
+          <a:lstStyle/>
+          <a:p>
+            <a:pPr algn="l"/>
+            <a:r>
+              <a:rPr sz="1350" b="1" i="0">
                 <a:solidFill>
                   <a:srgbClr val="F5A623"/>
                 </a:solidFill>
                 <a:latin typeface="Segoe UI"/>
               </a:rPr>
-              <a:t>Corretti</a:t>
-            </a:r>
-            <a:r>
-              <a:rPr sz="1300" b="1" dirty="0">
-                <a:solidFill>
-                  <a:srgbClr val="F5A623"/>
-                </a:solidFill>
-                <a:latin typeface="Segoe UI"/>
-              </a:rPr>
-              <a:t> il benchmark e la suite --only kernel </a:t>
-            </a:r>
-            <a:r>
-              <a:rPr sz="1300" dirty="0">
-                <a:solidFill>
-                  <a:srgbClr val="E6EDF3"/>
-                </a:solidFill>
-                <a:latin typeface="Segoe UI"/>
-              </a:rPr>
-              <a:t>(7 trial, min + p50/max). Prima un solo </a:t>
-            </a:r>
-            <a:r>
-              <a:rPr sz="1300" dirty="0" err="1">
-                <a:solidFill>
-                  <a:srgbClr val="E6EDF3"/>
-                </a:solidFill>
-                <a:latin typeface="Segoe UI"/>
-              </a:rPr>
-              <a:t>campione</a:t>
-            </a:r>
-            <a:r>
-              <a:rPr sz="1300" dirty="0">
-                <a:solidFill>
-                  <a:srgbClr val="E6EDF3"/>
-                </a:solidFill>
-                <a:latin typeface="Segoe UI"/>
+              <a:t>il cambio</a:t>
+            </a:r>
+          </a:p>
+        </p:txBody>
+      </p:sp>
+      <p:sp>
+        <p:nvSpPr>
+          <p:cNvPr id="10" name="TextBox 9"/>
+          <p:cNvSpPr txBox="1"/>
+          <p:nvPr/>
+        </p:nvSpPr>
+        <p:spPr>
+          <a:xfrm>
+            <a:off x="6601968" y="2194560"/>
+            <a:ext cx="4892040" cy="960120"/>
+          </a:xfrm>
+          <a:prstGeom prst="rect">
+            <a:avLst/>
+          </a:prstGeom>
+          <a:noFill/>
+        </p:spPr>
+        <p:txBody>
+          <a:bodyPr wrap="square" lIns="0" tIns="0" rIns="0" bIns="0">
+            <a:spAutoFit/>
+          </a:bodyPr>
+          <a:lstStyle/>
+          <a:p>
+            <a:pPr>
+              <a:lnSpc>
+                <a:spcPct val="115000"/>
+              </a:lnSpc>
+            </a:pPr>
+            <a:r>
+              <a:rPr sz="1200" dirty="0">
+                <a:solidFill>
+                  <a:srgbClr val="8B949E"/>
+                </a:solidFill>
+                <a:latin typeface="Consolas"/>
+              </a:rPr>
+              <a:t>- BPF_HASH(</a:t>
+            </a:r>
+            <a:r>
+              <a:rPr sz="1200" dirty="0" err="1">
+                <a:solidFill>
+                  <a:srgbClr val="8B949E"/>
+                </a:solidFill>
+                <a:latin typeface="Consolas"/>
+              </a:rPr>
+              <a:t>mac_table</a:t>
+            </a:r>
+            <a:r>
+              <a:rPr sz="1200" dirty="0">
+                <a:solidFill>
+                  <a:srgbClr val="8B949E"/>
+                </a:solidFill>
+                <a:latin typeface="Consolas"/>
+              </a:rPr>
+              <a:t>, __u32, ...);</a:t>
+            </a:r>
+          </a:p>
+          <a:p>
+            <a:pPr>
+              <a:lnSpc>
+                <a:spcPct val="115000"/>
+              </a:lnSpc>
+            </a:pPr>
+            <a:r>
+              <a:rPr sz="1200" dirty="0">
+                <a:solidFill>
+                  <a:srgbClr val="8B949E"/>
+                </a:solidFill>
+                <a:latin typeface="Consolas"/>
+              </a:rPr>
+              <a:t>+ BPF_ARRAY(</a:t>
+            </a:r>
+            <a:r>
+              <a:rPr sz="1200" dirty="0" err="1">
+                <a:solidFill>
+                  <a:srgbClr val="8B949E"/>
+                </a:solidFill>
+                <a:latin typeface="Consolas"/>
+              </a:rPr>
+              <a:t>mac_table</a:t>
+            </a:r>
+            <a:r>
+              <a:rPr sz="1200" dirty="0">
+                <a:solidFill>
+                  <a:srgbClr val="8B949E"/>
+                </a:solidFill>
+                <a:latin typeface="Consolas"/>
+              </a:rPr>
+              <a:t>, </a:t>
+            </a:r>
+            <a:r>
+              <a:rPr sz="1200" dirty="0" err="1">
+                <a:solidFill>
+                  <a:srgbClr val="8B949E"/>
+                </a:solidFill>
+                <a:latin typeface="Consolas"/>
+              </a:rPr>
+              <a:t>fwd_action</a:t>
+            </a:r>
+            <a:r>
+              <a:rPr sz="1200" dirty="0">
+                <a:solidFill>
+                  <a:srgbClr val="8B949E"/>
+                </a:solidFill>
+                <a:latin typeface="Consolas"/>
+              </a:rPr>
+              <a:t>, 8);</a:t>
+            </a:r>
+          </a:p>
+          <a:p>
+            <a:pPr>
+              <a:lnSpc>
+                <a:spcPct val="115000"/>
+              </a:lnSpc>
+            </a:pPr>
+            <a:endParaRPr sz="1200" dirty="0">
+              <a:solidFill>
+                <a:srgbClr val="8B949E"/>
+              </a:solidFill>
+              <a:latin typeface="Consolas"/>
+            </a:endParaRPr>
+          </a:p>
+          <a:p>
+            <a:pPr>
+              <a:lnSpc>
+                <a:spcPct val="115000"/>
+              </a:lnSpc>
+            </a:pPr>
+            <a:r>
+              <a:rPr sz="1200" dirty="0">
+                <a:solidFill>
+                  <a:srgbClr val="8B949E"/>
+                </a:solidFill>
+                <a:latin typeface="Consolas"/>
+              </a:rPr>
+              <a:t>// ARRAY non </a:t>
+            </a:r>
+            <a:r>
+              <a:rPr sz="1200" dirty="0" err="1">
+                <a:solidFill>
+                  <a:srgbClr val="8B949E"/>
+                </a:solidFill>
+                <a:latin typeface="Consolas"/>
+              </a:rPr>
+              <a:t>ritorna</a:t>
+            </a:r>
+            <a:r>
+              <a:rPr sz="1200" dirty="0">
+                <a:solidFill>
+                  <a:srgbClr val="8B949E"/>
+                </a:solidFill>
+                <a:latin typeface="Consolas"/>
               </a:rPr>
               <a:t> </a:t>
             </a:r>
             <a:r>
-              <a:rPr sz="1300" dirty="0" err="1">
-                <a:solidFill>
-                  <a:srgbClr val="E6EDF3"/>
-                </a:solidFill>
-                <a:latin typeface="Segoe UI"/>
-              </a:rPr>
-              <a:t>oscillava</a:t>
-            </a:r>
-            <a:r>
-              <a:rPr sz="1300" dirty="0">
-                <a:solidFill>
-                  <a:srgbClr val="E6EDF3"/>
-                </a:solidFill>
-                <a:latin typeface="Segoe UI"/>
-              </a:rPr>
-              <a:t> </a:t>
-            </a:r>
-            <a:r>
-              <a:rPr sz="1300" dirty="0" err="1">
-                <a:solidFill>
-                  <a:srgbClr val="E6EDF3"/>
-                </a:solidFill>
-                <a:latin typeface="Segoe UI"/>
-              </a:rPr>
-              <a:t>fino</a:t>
-            </a:r>
-            <a:r>
-              <a:rPr sz="1300" dirty="0">
-                <a:solidFill>
-                  <a:srgbClr val="E6EDF3"/>
-                </a:solidFill>
-                <a:latin typeface="Segoe UI"/>
-              </a:rPr>
-              <a:t> a 20×.</a:t>
-            </a:r>
-          </a:p>
-        </p:txBody>
-      </p:sp>
-      <p:sp>
-        <p:nvSpPr>
-          <p:cNvPr id="7" name="TextBox 6"/>
-          <p:cNvSpPr txBox="1"/>
-          <p:nvPr/>
-        </p:nvSpPr>
-        <p:spPr>
-          <a:xfrm>
-            <a:off x="6492240" y="1783080"/>
-            <a:ext cx="5120640" cy="4114800"/>
-          </a:xfrm>
-          <a:prstGeom prst="rect">
-            <a:avLst/>
-          </a:prstGeom>
-          <a:noFill/>
-        </p:spPr>
-        <p:txBody>
-          <a:bodyPr wrap="square" lIns="0" tIns="0" rIns="0" bIns="0">
-            <a:spAutoFit/>
-          </a:bodyPr>
-          <a:lstStyle/>
+              <a:rPr sz="1200" dirty="0" err="1">
+                <a:solidFill>
+                  <a:srgbClr val="8B949E"/>
+                </a:solidFill>
+                <a:latin typeface="Consolas"/>
+              </a:rPr>
+              <a:t>mai</a:t>
+            </a:r>
+            <a:r>
+              <a:rPr sz="1200" dirty="0">
+                <a:solidFill>
+                  <a:srgbClr val="8B949E"/>
+                </a:solidFill>
+                <a:latin typeface="Consolas"/>
+              </a:rPr>
+              <a:t> NULL:</a:t>
+            </a:r>
+          </a:p>
           <a:p>
             <a:pPr>
               <a:lnSpc>
-                <a:spcPct val="105000"/>
+                <a:spcPct val="115000"/>
               </a:lnSpc>
-              <a:spcAft>
-                <a:spcPts val="700"/>
-              </a:spcAft>
-            </a:pPr>
-            <a:r>
-              <a:rPr sz="1300" b="1">
-                <a:solidFill>
-                  <a:srgbClr val="3FD0C8"/>
-                </a:solidFill>
-                <a:latin typeface="Segoe UI"/>
-              </a:rPr>
-              <a:t>▸ XDP paper (CoNEXT 2018): </a:t>
-            </a:r>
-            <a:r>
-              <a:rPr sz="1300">
-                <a:solidFill>
-                  <a:srgbClr val="E6EDF3"/>
-                </a:solidFill>
-                <a:latin typeface="Segoe UI"/>
-              </a:rPr>
-              <a:t>metriche standard — Mpps a CPU satura, latenza per-hop, overhead del solo eBPF.</a:t>
-            </a:r>
-          </a:p>
+            </a:pPr>
+            <a:r>
+              <a:rPr sz="1200" dirty="0">
+                <a:solidFill>
+                  <a:srgbClr val="8B949E"/>
+                </a:solidFill>
+                <a:latin typeface="Consolas"/>
+              </a:rPr>
+              <a:t>// MISS  =  act-&gt;</a:t>
+            </a:r>
+            <a:r>
+              <a:rPr sz="1200" dirty="0" err="1">
+                <a:solidFill>
+                  <a:srgbClr val="8B949E"/>
+                </a:solidFill>
+                <a:latin typeface="Consolas"/>
+              </a:rPr>
+              <a:t>ifindex</a:t>
+            </a:r>
+            <a:r>
+              <a:rPr sz="1200" dirty="0">
+                <a:solidFill>
+                  <a:srgbClr val="8B949E"/>
+                </a:solidFill>
+                <a:latin typeface="Consolas"/>
+              </a:rPr>
+              <a:t> == 0</a:t>
+            </a:r>
+          </a:p>
+        </p:txBody>
+      </p:sp>
+      <p:sp>
+        <p:nvSpPr>
+          <p:cNvPr id="11" name="Rounded Rectangle 10"/>
+          <p:cNvSpPr/>
+          <p:nvPr/>
+        </p:nvSpPr>
+        <p:spPr>
+          <a:xfrm>
+            <a:off x="6400800" y="3520440"/>
+            <a:ext cx="5257800" cy="1737360"/>
+          </a:xfrm>
+          <a:prstGeom prst="roundRect">
+            <a:avLst/>
+          </a:prstGeom>
+          <a:solidFill>
+            <a:srgbClr val="1B222E"/>
+          </a:solidFill>
+          <a:ln>
+            <a:noFill/>
+          </a:ln>
+          <a:effectLst/>
+        </p:spPr>
+        <p:style>
+          <a:lnRef idx="1">
+            <a:schemeClr val="accent1"/>
+          </a:lnRef>
+          <a:fillRef idx="3">
+            <a:schemeClr val="accent1"/>
+          </a:fillRef>
+          <a:effectRef idx="2">
+            <a:schemeClr val="accent1"/>
+          </a:effectRef>
+          <a:fontRef idx="minor">
+            <a:schemeClr val="lt1"/>
+          </a:fontRef>
+        </p:style>
+        <p:txBody>
+          <a:bodyPr rtlCol="0" anchor="ctr"/>
+          <a:lstStyle/>
+          <a:p>
+            <a:pPr algn="ctr"/>
+            <a:endParaRPr/>
+          </a:p>
+        </p:txBody>
+      </p:sp>
+      <p:sp>
+        <p:nvSpPr>
+          <p:cNvPr id="12" name="Rectangle 11"/>
+          <p:cNvSpPr/>
+          <p:nvPr/>
+        </p:nvSpPr>
+        <p:spPr>
+          <a:xfrm>
+            <a:off x="6400800" y="3520440"/>
+            <a:ext cx="50800" cy="1737360"/>
+          </a:xfrm>
+          <a:prstGeom prst="rect">
+            <a:avLst/>
+          </a:prstGeom>
+          <a:solidFill>
+            <a:srgbClr val="3FB950"/>
+          </a:solidFill>
+          <a:ln>
+            <a:noFill/>
+          </a:ln>
+          <a:effectLst/>
+        </p:spPr>
+        <p:style>
+          <a:lnRef idx="1">
+            <a:schemeClr val="accent1"/>
+          </a:lnRef>
+          <a:fillRef idx="3">
+            <a:schemeClr val="accent1"/>
+          </a:fillRef>
+          <a:effectRef idx="2">
+            <a:schemeClr val="accent1"/>
+          </a:effectRef>
+          <a:fontRef idx="minor">
+            <a:schemeClr val="lt1"/>
+          </a:fontRef>
+        </p:style>
+        <p:txBody>
+          <a:bodyPr rtlCol="0" anchor="ctr"/>
+          <a:lstStyle/>
+          <a:p>
+            <a:pPr algn="ctr"/>
+            <a:endParaRPr/>
+          </a:p>
+        </p:txBody>
+      </p:sp>
+      <p:sp>
+        <p:nvSpPr>
+          <p:cNvPr id="13" name="TextBox 12"/>
+          <p:cNvSpPr txBox="1"/>
+          <p:nvPr/>
+        </p:nvSpPr>
+        <p:spPr>
+          <a:xfrm>
+            <a:off x="6601968" y="3611880"/>
+            <a:ext cx="4910328" cy="1554480"/>
+          </a:xfrm>
+          <a:prstGeom prst="rect">
+            <a:avLst/>
+          </a:prstGeom>
+          <a:noFill/>
+        </p:spPr>
+        <p:txBody>
+          <a:bodyPr wrap="square" lIns="0" tIns="0" rIns="0" bIns="0" anchor="ctr">
+            <a:spAutoFit/>
+          </a:bodyPr>
+          <a:lstStyle/>
           <a:p>
             <a:pPr>
               <a:lnSpc>
-                <a:spcPct val="105000"/>
+                <a:spcPct val="106000"/>
               </a:lnSpc>
-              <a:spcAft>
-                <a:spcPts val="700"/>
-              </a:spcAft>
-            </a:pPr>
-            <a:r>
-              <a:rPr sz="1300" b="1">
-                <a:solidFill>
-                  <a:srgbClr val="3FD0C8"/>
-                </a:solidFill>
-                <a:latin typeface="Segoe UI"/>
-              </a:rPr>
-              <a:t>▸ Heiser, 'Benchmarking Crimes': </a:t>
-            </a:r>
-            <a:r>
-              <a:rPr sz="1300">
-                <a:solidFill>
-                  <a:srgbClr val="E6EDF3"/>
-                </a:solidFill>
-                <a:latin typeface="Segoe UI"/>
-              </a:rPr>
-              <a:t>trappole — frequency scaling, C-state, accounting per-tick del softirq.</a:t>
-            </a:r>
-          </a:p>
-          <a:p>
-            <a:pPr>
-              <a:lnSpc>
-                <a:spcPct val="105000"/>
-              </a:lnSpc>
-              <a:spcAft>
-                <a:spcPts val="700"/>
-              </a:spcAft>
-            </a:pPr>
-            <a:r>
-              <a:rPr sz="1300" b="1">
-                <a:solidFill>
-                  <a:srgbClr val="3FD0C8"/>
-                </a:solidFill>
-                <a:latin typeface="Segoe UI"/>
-              </a:rPr>
-              <a:t>▸ Onestà sull'ambiente: </a:t>
-            </a:r>
-            <a:r>
-              <a:rPr sz="1300">
-                <a:solidFill>
-                  <a:srgbClr val="E6EDF3"/>
-                </a:solidFill>
-                <a:latin typeface="Segoe UI"/>
-              </a:rPr>
-              <a:t>VM senza CPU pinning → valori assoluti non comparabili a bare-metal; conta il relativo.</a:t>
+            </a:pPr>
+            <a:r>
+              <a:rPr sz="1200">
+                <a:solidFill>
+                  <a:srgbClr val="E6EDF3"/>
+                </a:solidFill>
+                <a:latin typeface="Segoe UI"/>
+              </a:rPr>
+              <a:t>Punto critico: una BPF_ARRAY non ritorna mai NULL (slot azzerati). La logica 'classe non provvista → MISS' usa ifindex==0 come sentinella. Suite --only kernel: PASS su tutte e 3.</a:t>
             </a:r>
           </a:p>
         </p:txBody>
@@ -6643,7 +7233,7 @@
 </file>
 
 <file path=ppt/slides/slide13.xml><?xml version="1.0" encoding="utf-8"?>
-<p:sld xmlns:a="http://schemas.openxmlformats.org/drawingml/2006/main" xmlns:r="http://schemas.openxmlformats.org/officeDocument/2006/relationships" xmlns:p="http://schemas.openxmlformats.org/presentationml/2006/main">
+<p:sld xmlns:a="http://schemas.openxmlformats.org/drawingml/2006/main" xmlns:p="http://schemas.openxmlformats.org/presentationml/2006/main" xmlns:r="http://schemas.openxmlformats.org/officeDocument/2006/relationships">
   <p:cSld>
     <p:spTree>
       <p:nvGrpSpPr>
@@ -6651,14 +7241,7 @@
         <p:cNvGrpSpPr/>
         <p:nvPr/>
       </p:nvGrpSpPr>
-      <p:grpSpPr>
-        <a:xfrm>
-          <a:off x="0" y="0"/>
-          <a:ext cx="0" cy="0"/>
-          <a:chOff x="0" y="0"/>
-          <a:chExt cx="0" cy="0"/>
-        </a:xfrm>
-      </p:grpSpPr>
+      <p:grpSpPr/>
       <p:sp>
         <p:nvSpPr>
           <p:cNvPr id="2" name="Rectangle 1"/>
@@ -6667,7 +7250,7 @@
         </p:nvSpPr>
         <p:spPr>
           <a:xfrm>
-            <a:off x="0" y="0"/>
+            <a:off x="0" y="7883"/>
             <a:ext cx="12191695" cy="6858000"/>
           </a:xfrm>
           <a:prstGeom prst="rect">
@@ -6734,7 +7317,7 @@
                 </a:solidFill>
                 <a:latin typeface="Georgia"/>
               </a:rPr>
-              <a:t>08</a:t>
+              <a:t>06</a:t>
             </a:r>
           </a:p>
         </p:txBody>
@@ -6769,7 +7352,7 @@
                 </a:solidFill>
                 <a:latin typeface="Georgia"/>
               </a:rPr>
-              <a:t>Polling FRR del link_state</a:t>
+              <a:t>Blocco pesi: da 147 letture di mappa a 8</a:t>
             </a:r>
           </a:p>
         </p:txBody>
@@ -6804,7 +7387,7 @@
                 </a:solidFill>
                 <a:latin typeface="Segoe UI"/>
               </a:rPr>
-              <a:t>Ogni quanto il monitor userspace aggiorna lo stato dei link</a:t>
+              <a:t>Quanto del costo di P2/P3 era flessibilità e quanto codifica?</a:t>
             </a:r>
           </a:p>
         </p:txBody>
@@ -6818,7 +7401,7 @@
         <p:spPr>
           <a:xfrm>
             <a:off x="640080" y="1783080"/>
-            <a:ext cx="10972800" cy="4114800"/>
+            <a:ext cx="5394960" cy="1473096"/>
           </a:xfrm>
           <a:prstGeom prst="rect">
             <a:avLst/>
@@ -6840,22 +7423,31 @@
               </a:spcAft>
             </a:pPr>
             <a:r>
-              <a:rPr sz="1400" b="1">
+              <a:rPr sz="1350" b="1">
                 <a:solidFill>
                   <a:srgbClr val="F5A623"/>
                 </a:solidFill>
                 <a:latin typeface="Segoe UI"/>
               </a:rPr>
-              <a:t>▸ link_state[0..5] </a:t>
-            </a:r>
-            <a:r>
-              <a:rPr sz="1400">
-                <a:solidFill>
-                  <a:srgbClr val="E6EDF3"/>
-                </a:solidFill>
-                <a:latin typeface="Segoe UI"/>
-              </a:rPr>
-              <a:t>è la feature di fast-reroute: 1 = su, 0 = giù, letta ad ogni pacchetto dai programmi eBPF.</a:t>
+              <a:t>▸ </a:t>
+            </a:r>
+            <a:r>
+              <a:rPr sz="1350" b="1">
+                <a:solidFill>
+                  <a:srgbClr val="CD8C21"/>
+                </a:solidFill>
+                <a:latin typeface="Segoe UI"/>
+              </a:rPr>
+              <a:t>Il sintomo. </a:t>
+            </a:r>
+            <a:r>
+              <a:rPr sz="1350" b="0">
+                <a:solidFill>
+                  <a:srgbClr val="E6EDF3"/>
+                </a:solidFill>
+                <a:latin typeface="Segoe UI"/>
+              </a:rPr>
+              <a:t>~139 delle 147 letture di P2 erano letture di un SINGOLO byte di peso, ognuna con la propria helper call e il proprio controllo di NULL.</a:t>
             </a:r>
           </a:p>
           <a:p>
@@ -6868,22 +7460,31 @@
               </a:spcAft>
             </a:pPr>
             <a:r>
-              <a:rPr sz="1400" b="1">
+              <a:rPr sz="1350" b="1">
                 <a:solidFill>
                   <a:srgbClr val="F5A623"/>
                 </a:solidFill>
                 <a:latin typeface="Segoe UI"/>
               </a:rPr>
-              <a:t>▸ Un thread userspace </a:t>
-            </a:r>
-            <a:r>
-              <a:rPr sz="1400">
-                <a:solidFill>
-                  <a:srgbClr val="E6EDF3"/>
-                </a:solidFill>
-                <a:latin typeface="Segoe UI"/>
-              </a:rPr>
-              <a:t>legge /sys/class/net/ethX/carrier e scrive nella mappa condivisa.</a:t>
+              <a:t>▸ </a:t>
+            </a:r>
+            <a:r>
+              <a:rPr sz="1350" b="1">
+                <a:solidFill>
+                  <a:srgbClr val="CD8C21"/>
+                </a:solidFill>
+                <a:latin typeface="Segoe UI"/>
+              </a:rPr>
+              <a:t>La cura. </a:t>
+            </a:r>
+            <a:r>
+              <a:rPr sz="1350" b="0">
+                <a:solidFill>
+                  <a:srgbClr val="E6EDF3"/>
+                </a:solidFill>
+                <a:latin typeface="Segoe UI"/>
+              </a:rPr>
+              <a:t>Tutto il blocco pesi in un'unica entry struct-valued: una lookup, poi accessi diretti su puntatore. La stessa trasformazione già applicata alle feature dense.</a:t>
             </a:r>
           </a:p>
           <a:p>
@@ -6896,73 +7497,56 @@
               </a:spcAft>
             </a:pPr>
             <a:r>
-              <a:rPr sz="1400" b="1">
+              <a:rPr sz="1350" b="1">
                 <a:solidFill>
                   <a:srgbClr val="F5A623"/>
                 </a:solidFill>
                 <a:latin typeface="Segoe UI"/>
               </a:rPr>
-              <a:t>▸ Polling impostato a 0.5 secondi. </a:t>
-            </a:r>
-            <a:r>
-              <a:rPr sz="1400">
-                <a:solidFill>
-                  <a:srgbClr val="E6EDF3"/>
-                </a:solidFill>
-                <a:latin typeface="Segoe UI"/>
-              </a:rPr>
-              <a:t>Corretta un'incoerenza: method5/method6 lo sovrascrivevano a 1.0 s → riportati a 0.5.</a:t>
-            </a:r>
-          </a:p>
-          <a:p>
-            <a:pPr>
-              <a:lnSpc>
-                <a:spcPct val="105000"/>
-              </a:lnSpc>
-              <a:spcAft>
-                <a:spcPts val="700"/>
-              </a:spcAft>
-            </a:pPr>
-            <a:r>
-              <a:rPr sz="1400" b="1">
-                <a:solidFill>
-                  <a:srgbClr val="F5A623"/>
-                </a:solidFill>
-                <a:latin typeface="Segoe UI"/>
-              </a:rPr>
-              <a:t>▸ Effetto: </a:t>
-            </a:r>
-            <a:r>
-              <a:rPr sz="1400">
-                <a:solidFill>
-                  <a:srgbClr val="E6EDF3"/>
-                </a:solidFill>
-                <a:latin typeface="Segoe UI"/>
-              </a:rPr>
-              <a:t>un link che cade è rilevato entro mezzo secondo; la feature va a 0 e l'argmax può scegliere un'altra uscita, senza reload.</a:t>
-            </a:r>
-          </a:p>
-        </p:txBody>
-      </p:sp>
-      <p:sp>
-        <p:nvSpPr>
-          <p:cNvPr id="7" name="Rounded Rectangle 6"/>
+              <a:t>▸ </a:t>
+            </a:r>
+            <a:r>
+              <a:rPr sz="1350" b="1">
+                <a:solidFill>
+                  <a:srgbClr val="CD8C21"/>
+                </a:solidFill>
+                <a:latin typeface="Segoe UI"/>
+              </a:rPr>
+              <a:t>Conclusione. </a:t>
+            </a:r>
+            <a:r>
+              <a:rPr sz="1350" b="0">
+                <a:solidFill>
+                  <a:srgbClr val="E6EDF3"/>
+                </a:solidFill>
+                <a:latin typeface="Segoe UI"/>
+              </a:rPr>
+              <a:t>~1/3 del costo per pacchetto non era il prezzo della flessibilità, era il prezzo di una codifica del contenitore dei pesi.</a:t>
+            </a:r>
+          </a:p>
+        </p:txBody>
+      </p:sp>
+      <p:sp>
+        <p:nvSpPr>
+          <p:cNvPr id="7" name="Rectangle 6"/>
           <p:cNvSpPr/>
           <p:nvPr/>
         </p:nvSpPr>
         <p:spPr>
           <a:xfrm>
-            <a:off x="640080" y="4754880"/>
-            <a:ext cx="2548890" cy="914400"/>
-          </a:xfrm>
-          <a:prstGeom prst="roundRect">
+            <a:off x="6355080" y="1828800"/>
+            <a:ext cx="5349240" cy="457200"/>
+          </a:xfrm>
+          <a:prstGeom prst="rect">
             <a:avLst/>
           </a:prstGeom>
           <a:solidFill>
-            <a:srgbClr val="1B222E"/>
+            <a:srgbClr val="222B38"/>
           </a:solidFill>
-          <a:ln>
-            <a:noFill/>
+          <a:ln w="6350">
+            <a:solidFill>
+              <a:srgbClr val="303945"/>
+            </a:solidFill>
           </a:ln>
           <a:effectLst/>
         </p:spPr>
@@ -6991,23 +7575,142 @@
       </p:sp>
       <p:sp>
         <p:nvSpPr>
-          <p:cNvPr id="8" name="Rectangle 7"/>
+          <p:cNvPr id="8" name="TextBox 7"/>
+          <p:cNvSpPr txBox="1"/>
+          <p:nvPr/>
+        </p:nvSpPr>
+        <p:spPr>
+          <a:xfrm>
+            <a:off x="6446520" y="1828800"/>
+            <a:ext cx="2331720" cy="457200"/>
+          </a:xfrm>
+          <a:prstGeom prst="rect">
+            <a:avLst/>
+          </a:prstGeom>
+          <a:noFill/>
+        </p:spPr>
+        <p:txBody>
+          <a:bodyPr wrap="square" lIns="0" tIns="0" rIns="0" bIns="0" anchor="ctr">
+            <a:spAutoFit/>
+          </a:bodyPr>
+          <a:lstStyle/>
+          <a:p>
+            <a:pPr>
+              <a:lnSpc>
+                <a:spcPct val="98000"/>
+              </a:lnSpc>
+            </a:pPr>
+            <a:r>
+              <a:rPr sz="1200" b="1">
+                <a:solidFill>
+                  <a:srgbClr val="F5A623"/>
+                </a:solidFill>
+                <a:latin typeface="Segoe UI"/>
+              </a:rPr>
+              <a:t>Metrica (P2)</a:t>
+            </a:r>
+          </a:p>
+        </p:txBody>
+      </p:sp>
+      <p:sp>
+        <p:nvSpPr>
+          <p:cNvPr id="9" name="TextBox 8"/>
+          <p:cNvSpPr txBox="1"/>
+          <p:nvPr/>
+        </p:nvSpPr>
+        <p:spPr>
+          <a:xfrm>
+            <a:off x="8915400" y="1828800"/>
+            <a:ext cx="1234440" cy="457200"/>
+          </a:xfrm>
+          <a:prstGeom prst="rect">
+            <a:avLst/>
+          </a:prstGeom>
+          <a:noFill/>
+        </p:spPr>
+        <p:txBody>
+          <a:bodyPr wrap="square" lIns="0" tIns="0" rIns="0" bIns="0" anchor="ctr">
+            <a:spAutoFit/>
+          </a:bodyPr>
+          <a:lstStyle/>
+          <a:p>
+            <a:pPr>
+              <a:lnSpc>
+                <a:spcPct val="98000"/>
+              </a:lnSpc>
+            </a:pPr>
+            <a:r>
+              <a:rPr sz="1200" b="1">
+                <a:solidFill>
+                  <a:srgbClr val="F5A623"/>
+                </a:solidFill>
+                <a:latin typeface="Segoe UI"/>
+              </a:rPr>
+              <a:t>prima</a:t>
+            </a:r>
+          </a:p>
+        </p:txBody>
+      </p:sp>
+      <p:sp>
+        <p:nvSpPr>
+          <p:cNvPr id="10" name="TextBox 9"/>
+          <p:cNvSpPr txBox="1"/>
+          <p:nvPr/>
+        </p:nvSpPr>
+        <p:spPr>
+          <a:xfrm>
+            <a:off x="10287000" y="1828800"/>
+            <a:ext cx="1371600" cy="457200"/>
+          </a:xfrm>
+          <a:prstGeom prst="rect">
+            <a:avLst/>
+          </a:prstGeom>
+          <a:noFill/>
+        </p:spPr>
+        <p:txBody>
+          <a:bodyPr wrap="square" lIns="0" tIns="0" rIns="0" bIns="0" anchor="ctr">
+            <a:spAutoFit/>
+          </a:bodyPr>
+          <a:lstStyle/>
+          <a:p>
+            <a:pPr>
+              <a:lnSpc>
+                <a:spcPct val="98000"/>
+              </a:lnSpc>
+            </a:pPr>
+            <a:r>
+              <a:rPr sz="1200" b="1">
+                <a:solidFill>
+                  <a:srgbClr val="F5A623"/>
+                </a:solidFill>
+                <a:latin typeface="Segoe UI"/>
+              </a:rPr>
+              <a:t>dopo</a:t>
+            </a:r>
+          </a:p>
+        </p:txBody>
+      </p:sp>
+      <p:sp>
+        <p:nvSpPr>
+          <p:cNvPr id="11" name="Rectangle 10"/>
           <p:cNvSpPr/>
           <p:nvPr/>
         </p:nvSpPr>
         <p:spPr>
           <a:xfrm>
-            <a:off x="713232" y="4800600"/>
-            <a:ext cx="2402586" cy="38100"/>
+            <a:off x="6355080" y="2286000"/>
+            <a:ext cx="5349240" cy="457200"/>
           </a:xfrm>
           <a:prstGeom prst="rect">
             <a:avLst/>
           </a:prstGeom>
           <a:solidFill>
-            <a:srgbClr val="303945"/>
+            <a:srgbClr val="1B222E"/>
           </a:solidFill>
-          <a:ln>
-            <a:noFill/>
+          <a:ln w="6350">
+            <a:solidFill>
+              <a:srgbClr val="303945"/>
+            </a:solidFill>
           </a:ln>
           <a:effectLst/>
         </p:spPr>
@@ -7036,14 +7739,14 @@
       </p:sp>
       <p:sp>
         <p:nvSpPr>
-          <p:cNvPr id="9" name="TextBox 8"/>
-          <p:cNvSpPr txBox="1"/>
-          <p:nvPr/>
-        </p:nvSpPr>
-        <p:spPr>
-          <a:xfrm>
-            <a:off x="694944" y="4754880"/>
-            <a:ext cx="2439162" cy="914400"/>
+          <p:cNvPr id="12" name="TextBox 11"/>
+          <p:cNvSpPr txBox="1"/>
+          <p:nvPr/>
+        </p:nvSpPr>
+        <p:spPr>
+          <a:xfrm>
+            <a:off x="6446520" y="2286000"/>
+            <a:ext cx="2331720" cy="457200"/>
           </a:xfrm>
           <a:prstGeom prst="rect">
             <a:avLst/>
@@ -7056,41 +7759,33 @@
           </a:bodyPr>
           <a:lstStyle/>
           <a:p>
-            <a:pPr algn="ctr"/>
-            <a:r>
-              <a:rPr sz="1250" b="1">
-                <a:solidFill>
-                  <a:srgbClr val="E6EDF3"/>
-                </a:solidFill>
-                <a:latin typeface="Segoe UI"/>
-              </a:rPr>
-              <a:t>/sys/.../carrier</a:t>
-            </a:r>
-          </a:p>
-          <a:p>
-            <a:pPr algn="ctr"/>
-            <a:r>
-              <a:rPr sz="950">
-                <a:solidFill>
-                  <a:srgbClr val="8B949E"/>
-                </a:solidFill>
-                <a:latin typeface="Consolas"/>
-              </a:rPr>
-              <a:t>kernel</a:t>
-            </a:r>
-          </a:p>
-        </p:txBody>
-      </p:sp>
-      <p:sp>
-        <p:nvSpPr>
-          <p:cNvPr id="10" name="TextBox 9"/>
-          <p:cNvSpPr txBox="1"/>
-          <p:nvPr/>
-        </p:nvSpPr>
-        <p:spPr>
-          <a:xfrm>
-            <a:off x="3188970" y="4754880"/>
-            <a:ext cx="274320" cy="914400"/>
+            <a:pPr>
+              <a:lnSpc>
+                <a:spcPct val="98000"/>
+              </a:lnSpc>
+            </a:pPr>
+            <a:r>
+              <a:rPr sz="1200" b="1">
+                <a:solidFill>
+                  <a:srgbClr val="E6EDF3"/>
+                </a:solidFill>
+                <a:latin typeface="Segoe UI"/>
+              </a:rPr>
+              <a:t>Lookup / pkt</a:t>
+            </a:r>
+          </a:p>
+        </p:txBody>
+      </p:sp>
+      <p:sp>
+        <p:nvSpPr>
+          <p:cNvPr id="13" name="TextBox 12"/>
+          <p:cNvSpPr txBox="1"/>
+          <p:nvPr/>
+        </p:nvSpPr>
+        <p:spPr>
+          <a:xfrm>
+            <a:off x="8915400" y="2286000"/>
+            <a:ext cx="1234440" cy="457200"/>
           </a:xfrm>
           <a:prstGeom prst="rect">
             <a:avLst/>
@@ -7103,38 +7798,83 @@
           </a:bodyPr>
           <a:lstStyle/>
           <a:p>
-            <a:pPr algn="ctr"/>
-            <a:r>
-              <a:rPr sz="2000" b="1" i="0">
-                <a:solidFill>
-                  <a:srgbClr val="F5A623"/>
-                </a:solidFill>
-                <a:latin typeface="Segoe UI"/>
-              </a:rPr>
-              <a:t>›</a:t>
-            </a:r>
-          </a:p>
-        </p:txBody>
-      </p:sp>
-      <p:sp>
-        <p:nvSpPr>
-          <p:cNvPr id="11" name="Rounded Rectangle 10"/>
+            <a:pPr>
+              <a:lnSpc>
+                <a:spcPct val="98000"/>
+              </a:lnSpc>
+            </a:pPr>
+            <a:r>
+              <a:rPr sz="1200" b="0">
+                <a:solidFill>
+                  <a:srgbClr val="E6EDF3"/>
+                </a:solidFill>
+                <a:latin typeface="Segoe UI"/>
+              </a:rPr>
+              <a:t>147.0</a:t>
+            </a:r>
+          </a:p>
+        </p:txBody>
+      </p:sp>
+      <p:sp>
+        <p:nvSpPr>
+          <p:cNvPr id="14" name="TextBox 13"/>
+          <p:cNvSpPr txBox="1"/>
+          <p:nvPr/>
+        </p:nvSpPr>
+        <p:spPr>
+          <a:xfrm>
+            <a:off x="10287000" y="2286000"/>
+            <a:ext cx="1371600" cy="457200"/>
+          </a:xfrm>
+          <a:prstGeom prst="rect">
+            <a:avLst/>
+          </a:prstGeom>
+          <a:noFill/>
+        </p:spPr>
+        <p:txBody>
+          <a:bodyPr wrap="square" lIns="0" tIns="0" rIns="0" bIns="0" anchor="ctr">
+            <a:spAutoFit/>
+          </a:bodyPr>
+          <a:lstStyle/>
+          <a:p>
+            <a:pPr>
+              <a:lnSpc>
+                <a:spcPct val="98000"/>
+              </a:lnSpc>
+            </a:pPr>
+            <a:r>
+              <a:rPr sz="1200" b="1">
+                <a:solidFill>
+                  <a:srgbClr val="3FB950"/>
+                </a:solidFill>
+                <a:latin typeface="Segoe UI"/>
+              </a:rPr>
+              <a:t>8.0</a:t>
+            </a:r>
+          </a:p>
+        </p:txBody>
+      </p:sp>
+      <p:sp>
+        <p:nvSpPr>
+          <p:cNvPr id="15" name="Rectangle 14"/>
           <p:cNvSpPr/>
           <p:nvPr/>
         </p:nvSpPr>
         <p:spPr>
           <a:xfrm>
-            <a:off x="3463290" y="4754880"/>
-            <a:ext cx="2548890" cy="914400"/>
-          </a:xfrm>
-          <a:prstGeom prst="roundRect">
+            <a:off x="6355080" y="2743200"/>
+            <a:ext cx="5349240" cy="457200"/>
+          </a:xfrm>
+          <a:prstGeom prst="rect">
             <a:avLst/>
           </a:prstGeom>
           <a:solidFill>
             <a:srgbClr val="1B222E"/>
           </a:solidFill>
-          <a:ln>
-            <a:noFill/>
+          <a:ln w="6350">
+            <a:solidFill>
+              <a:srgbClr val="303945"/>
+            </a:solidFill>
           </a:ln>
           <a:effectLst/>
         </p:spPr>
@@ -7163,23 +7903,142 @@
       </p:sp>
       <p:sp>
         <p:nvSpPr>
-          <p:cNvPr id="12" name="Rectangle 11"/>
+          <p:cNvPr id="16" name="TextBox 15"/>
+          <p:cNvSpPr txBox="1"/>
+          <p:nvPr/>
+        </p:nvSpPr>
+        <p:spPr>
+          <a:xfrm>
+            <a:off x="6446520" y="2743200"/>
+            <a:ext cx="2331720" cy="457200"/>
+          </a:xfrm>
+          <a:prstGeom prst="rect">
+            <a:avLst/>
+          </a:prstGeom>
+          <a:noFill/>
+        </p:spPr>
+        <p:txBody>
+          <a:bodyPr wrap="square" lIns="0" tIns="0" rIns="0" bIns="0" anchor="ctr">
+            <a:spAutoFit/>
+          </a:bodyPr>
+          <a:lstStyle/>
+          <a:p>
+            <a:pPr>
+              <a:lnSpc>
+                <a:spcPct val="98000"/>
+              </a:lnSpc>
+            </a:pPr>
+            <a:r>
+              <a:rPr sz="1200" b="1">
+                <a:solidFill>
+                  <a:srgbClr val="E6EDF3"/>
+                </a:solidFill>
+                <a:latin typeface="Segoe UI"/>
+              </a:rPr>
+              <a:t>Istruzioni</a:t>
+            </a:r>
+          </a:p>
+        </p:txBody>
+      </p:sp>
+      <p:sp>
+        <p:nvSpPr>
+          <p:cNvPr id="17" name="TextBox 16"/>
+          <p:cNvSpPr txBox="1"/>
+          <p:nvPr/>
+        </p:nvSpPr>
+        <p:spPr>
+          <a:xfrm>
+            <a:off x="8915400" y="2743200"/>
+            <a:ext cx="1234440" cy="457200"/>
+          </a:xfrm>
+          <a:prstGeom prst="rect">
+            <a:avLst/>
+          </a:prstGeom>
+          <a:noFill/>
+        </p:spPr>
+        <p:txBody>
+          <a:bodyPr wrap="square" lIns="0" tIns="0" rIns="0" bIns="0" anchor="ctr">
+            <a:spAutoFit/>
+          </a:bodyPr>
+          <a:lstStyle/>
+          <a:p>
+            <a:pPr>
+              <a:lnSpc>
+                <a:spcPct val="98000"/>
+              </a:lnSpc>
+            </a:pPr>
+            <a:r>
+              <a:rPr sz="1200" b="0">
+                <a:solidFill>
+                  <a:srgbClr val="E6EDF3"/>
+                </a:solidFill>
+                <a:latin typeface="Segoe UI"/>
+              </a:rPr>
+              <a:t>16 988</a:t>
+            </a:r>
+          </a:p>
+        </p:txBody>
+      </p:sp>
+      <p:sp>
+        <p:nvSpPr>
+          <p:cNvPr id="18" name="TextBox 17"/>
+          <p:cNvSpPr txBox="1"/>
+          <p:nvPr/>
+        </p:nvSpPr>
+        <p:spPr>
+          <a:xfrm>
+            <a:off x="10287000" y="2743200"/>
+            <a:ext cx="1371600" cy="457200"/>
+          </a:xfrm>
+          <a:prstGeom prst="rect">
+            <a:avLst/>
+          </a:prstGeom>
+          <a:noFill/>
+        </p:spPr>
+        <p:txBody>
+          <a:bodyPr wrap="square" lIns="0" tIns="0" rIns="0" bIns="0" anchor="ctr">
+            <a:spAutoFit/>
+          </a:bodyPr>
+          <a:lstStyle/>
+          <a:p>
+            <a:pPr>
+              <a:lnSpc>
+                <a:spcPct val="98000"/>
+              </a:lnSpc>
+            </a:pPr>
+            <a:r>
+              <a:rPr sz="1200" b="1">
+                <a:solidFill>
+                  <a:srgbClr val="3FB950"/>
+                </a:solidFill>
+                <a:latin typeface="Segoe UI"/>
+              </a:rPr>
+              <a:t>9 962</a:t>
+            </a:r>
+          </a:p>
+        </p:txBody>
+      </p:sp>
+      <p:sp>
+        <p:nvSpPr>
+          <p:cNvPr id="19" name="Rectangle 18"/>
           <p:cNvSpPr/>
           <p:nvPr/>
         </p:nvSpPr>
         <p:spPr>
           <a:xfrm>
-            <a:off x="3536442" y="4800600"/>
-            <a:ext cx="2402586" cy="38100"/>
+            <a:off x="6355080" y="3200400"/>
+            <a:ext cx="5349240" cy="457200"/>
           </a:xfrm>
           <a:prstGeom prst="rect">
             <a:avLst/>
           </a:prstGeom>
           <a:solidFill>
-            <a:srgbClr val="303945"/>
+            <a:srgbClr val="1B222E"/>
           </a:solidFill>
-          <a:ln>
-            <a:noFill/>
+          <a:ln w="6350">
+            <a:solidFill>
+              <a:srgbClr val="303945"/>
+            </a:solidFill>
           </a:ln>
           <a:effectLst/>
         </p:spPr>
@@ -7208,14 +8067,14 @@
       </p:sp>
       <p:sp>
         <p:nvSpPr>
-          <p:cNvPr id="13" name="TextBox 12"/>
-          <p:cNvSpPr txBox="1"/>
-          <p:nvPr/>
-        </p:nvSpPr>
-        <p:spPr>
-          <a:xfrm>
-            <a:off x="3518154" y="4754880"/>
-            <a:ext cx="2439162" cy="914400"/>
+          <p:cNvPr id="20" name="TextBox 19"/>
+          <p:cNvSpPr txBox="1"/>
+          <p:nvPr/>
+        </p:nvSpPr>
+        <p:spPr>
+          <a:xfrm>
+            <a:off x="6446520" y="3200400"/>
+            <a:ext cx="2331720" cy="457200"/>
           </a:xfrm>
           <a:prstGeom prst="rect">
             <a:avLst/>
@@ -7228,41 +8087,33 @@
           </a:bodyPr>
           <a:lstStyle/>
           <a:p>
-            <a:pPr algn="ctr"/>
-            <a:r>
-              <a:rPr sz="1250" b="1">
-                <a:solidFill>
-                  <a:srgbClr val="E6EDF3"/>
-                </a:solidFill>
-                <a:latin typeface="Segoe UI"/>
-              </a:rPr>
-              <a:t>monitor 0.5 s</a:t>
-            </a:r>
-          </a:p>
-          <a:p>
-            <a:pPr algn="ctr"/>
-            <a:r>
-              <a:rPr sz="950">
-                <a:solidFill>
-                  <a:srgbClr val="8B949E"/>
-                </a:solidFill>
-                <a:latin typeface="Consolas"/>
-              </a:rPr>
-              <a:t>userspace</a:t>
-            </a:r>
-          </a:p>
-        </p:txBody>
-      </p:sp>
-      <p:sp>
-        <p:nvSpPr>
-          <p:cNvPr id="14" name="TextBox 13"/>
-          <p:cNvSpPr txBox="1"/>
-          <p:nvPr/>
-        </p:nvSpPr>
-        <p:spPr>
-          <a:xfrm>
-            <a:off x="6012180" y="4754880"/>
-            <a:ext cx="274320" cy="914400"/>
+            <a:pPr>
+              <a:lnSpc>
+                <a:spcPct val="98000"/>
+              </a:lnSpc>
+            </a:pPr>
+            <a:r>
+              <a:rPr sz="1200" b="1">
+                <a:solidFill>
+                  <a:srgbClr val="E6EDF3"/>
+                </a:solidFill>
+                <a:latin typeface="Segoe UI"/>
+              </a:rPr>
+              <a:t>Memoria mappe (B)</a:t>
+            </a:r>
+          </a:p>
+        </p:txBody>
+      </p:sp>
+      <p:sp>
+        <p:nvSpPr>
+          <p:cNvPr id="21" name="TextBox 20"/>
+          <p:cNvSpPr txBox="1"/>
+          <p:nvPr/>
+        </p:nvSpPr>
+        <p:spPr>
+          <a:xfrm>
+            <a:off x="8915400" y="3200400"/>
+            <a:ext cx="1234440" cy="457200"/>
           </a:xfrm>
           <a:prstGeom prst="rect">
             <a:avLst/>
@@ -7275,38 +8126,89 @@
           </a:bodyPr>
           <a:lstStyle/>
           <a:p>
-            <a:pPr algn="ctr"/>
-            <a:r>
-              <a:rPr sz="2000" b="1" i="0">
-                <a:solidFill>
-                  <a:srgbClr val="F5A623"/>
-                </a:solidFill>
-                <a:latin typeface="Segoe UI"/>
-              </a:rPr>
-              <a:t>›</a:t>
-            </a:r>
-          </a:p>
-        </p:txBody>
-      </p:sp>
-      <p:sp>
-        <p:nvSpPr>
-          <p:cNvPr id="15" name="Rounded Rectangle 14"/>
+            <a:pPr>
+              <a:lnSpc>
+                <a:spcPct val="98000"/>
+              </a:lnSpc>
+            </a:pPr>
+            <a:r>
+              <a:rPr sz="1200" b="0">
+                <a:solidFill>
+                  <a:srgbClr val="E6EDF3"/>
+                </a:solidFill>
+                <a:latin typeface="Segoe UI"/>
+              </a:rPr>
+              <a:t>8 052</a:t>
+            </a:r>
+          </a:p>
+        </p:txBody>
+      </p:sp>
+      <p:sp>
+        <p:nvSpPr>
+          <p:cNvPr id="22" name="TextBox 21"/>
+          <p:cNvSpPr txBox="1"/>
+          <p:nvPr/>
+        </p:nvSpPr>
+        <p:spPr>
+          <a:xfrm>
+            <a:off x="10287000" y="3200400"/>
+            <a:ext cx="1371600" cy="457200"/>
+          </a:xfrm>
+          <a:prstGeom prst="rect">
+            <a:avLst/>
+          </a:prstGeom>
+          <a:noFill/>
+        </p:spPr>
+        <p:txBody>
+          <a:bodyPr wrap="square" lIns="0" tIns="0" rIns="0" bIns="0" anchor="ctr">
+            <a:spAutoFit/>
+          </a:bodyPr>
+          <a:lstStyle/>
+          <a:p>
+            <a:pPr>
+              <a:lnSpc>
+                <a:spcPct val="98000"/>
+              </a:lnSpc>
+            </a:pPr>
+            <a:r>
+              <a:rPr sz="1200" b="1" dirty="0">
+                <a:solidFill>
+                  <a:srgbClr val="3FB950"/>
+                </a:solidFill>
+                <a:latin typeface="Segoe UI"/>
+              </a:rPr>
+              <a:t>3 960</a:t>
+            </a:r>
+            <a:endParaRPr sz="1200" b="0" dirty="0">
+              <a:solidFill>
+                <a:srgbClr val="8B949E"/>
+              </a:solidFill>
+              <a:latin typeface="Segoe UI"/>
+            </a:endParaRPr>
+          </a:p>
+        </p:txBody>
+      </p:sp>
+      <p:sp>
+        <p:nvSpPr>
+          <p:cNvPr id="23" name="Rectangle 22"/>
           <p:cNvSpPr/>
           <p:nvPr/>
         </p:nvSpPr>
         <p:spPr>
           <a:xfrm>
-            <a:off x="6286500" y="4754880"/>
-            <a:ext cx="2548890" cy="914400"/>
-          </a:xfrm>
-          <a:prstGeom prst="roundRect">
+            <a:off x="6355080" y="3657600"/>
+            <a:ext cx="5349240" cy="457200"/>
+          </a:xfrm>
+          <a:prstGeom prst="rect">
             <a:avLst/>
           </a:prstGeom>
           <a:solidFill>
             <a:srgbClr val="1B222E"/>
           </a:solidFill>
-          <a:ln>
-            <a:noFill/>
+          <a:ln w="6350">
+            <a:solidFill>
+              <a:srgbClr val="303945"/>
+            </a:solidFill>
           </a:ln>
           <a:effectLst/>
         </p:spPr>
@@ -7335,59 +8237,14 @@
       </p:sp>
       <p:sp>
         <p:nvSpPr>
-          <p:cNvPr id="16" name="Rectangle 15"/>
-          <p:cNvSpPr/>
-          <p:nvPr/>
-        </p:nvSpPr>
-        <p:spPr>
-          <a:xfrm>
-            <a:off x="6359652" y="4800600"/>
-            <a:ext cx="2402586" cy="38100"/>
-          </a:xfrm>
-          <a:prstGeom prst="rect">
-            <a:avLst/>
-          </a:prstGeom>
-          <a:solidFill>
-            <a:srgbClr val="303945"/>
-          </a:solidFill>
-          <a:ln>
-            <a:noFill/>
-          </a:ln>
-          <a:effectLst/>
-        </p:spPr>
-        <p:style>
-          <a:lnRef idx="1">
-            <a:schemeClr val="accent1"/>
-          </a:lnRef>
-          <a:fillRef idx="3">
-            <a:schemeClr val="accent1"/>
-          </a:fillRef>
-          <a:effectRef idx="2">
-            <a:schemeClr val="accent1"/>
-          </a:effectRef>
-          <a:fontRef idx="minor">
-            <a:schemeClr val="lt1"/>
-          </a:fontRef>
-        </p:style>
-        <p:txBody>
-          <a:bodyPr rtlCol="0" anchor="ctr"/>
-          <a:lstStyle/>
-          <a:p>
-            <a:pPr algn="ctr"/>
-            <a:endParaRPr/>
-          </a:p>
-        </p:txBody>
-      </p:sp>
-      <p:sp>
-        <p:nvSpPr>
-          <p:cNvPr id="17" name="TextBox 16"/>
-          <p:cNvSpPr txBox="1"/>
-          <p:nvPr/>
-        </p:nvSpPr>
-        <p:spPr>
-          <a:xfrm>
-            <a:off x="6341364" y="4754880"/>
-            <a:ext cx="2439162" cy="914400"/>
+          <p:cNvPr id="24" name="TextBox 23"/>
+          <p:cNvSpPr txBox="1"/>
+          <p:nvPr/>
+        </p:nvSpPr>
+        <p:spPr>
+          <a:xfrm>
+            <a:off x="6446520" y="3657600"/>
+            <a:ext cx="2331720" cy="457200"/>
           </a:xfrm>
           <a:prstGeom prst="rect">
             <a:avLst/>
@@ -7400,199 +8257,132 @@
           </a:bodyPr>
           <a:lstStyle/>
           <a:p>
-            <a:pPr algn="ctr"/>
-            <a:r>
-              <a:rPr sz="1250" b="1">
-                <a:solidFill>
-                  <a:srgbClr val="E6EDF3"/>
-                </a:solidFill>
-                <a:latin typeface="Segoe UI"/>
-              </a:rPr>
-              <a:t>link_state[6]</a:t>
-            </a:r>
-          </a:p>
-          <a:p>
-            <a:pPr algn="ctr"/>
-            <a:r>
-              <a:rPr sz="950">
+            <a:pPr>
+              <a:lnSpc>
+                <a:spcPct val="98000"/>
+              </a:lnSpc>
+            </a:pPr>
+            <a:r>
+              <a:rPr sz="1200" b="1">
+                <a:solidFill>
+                  <a:srgbClr val="E6EDF3"/>
+                </a:solidFill>
+                <a:latin typeface="Segoe UI"/>
+              </a:rPr>
+              <a:t>× baseline</a:t>
+            </a:r>
+          </a:p>
+        </p:txBody>
+      </p:sp>
+      <p:sp>
+        <p:nvSpPr>
+          <p:cNvPr id="25" name="TextBox 24"/>
+          <p:cNvSpPr txBox="1"/>
+          <p:nvPr/>
+        </p:nvSpPr>
+        <p:spPr>
+          <a:xfrm>
+            <a:off x="8915400" y="3657600"/>
+            <a:ext cx="1234440" cy="457200"/>
+          </a:xfrm>
+          <a:prstGeom prst="rect">
+            <a:avLst/>
+          </a:prstGeom>
+          <a:noFill/>
+        </p:spPr>
+        <p:txBody>
+          <a:bodyPr wrap="square" lIns="0" tIns="0" rIns="0" bIns="0" anchor="ctr">
+            <a:spAutoFit/>
+          </a:bodyPr>
+          <a:lstStyle/>
+          <a:p>
+            <a:pPr>
+              <a:lnSpc>
+                <a:spcPct val="98000"/>
+              </a:lnSpc>
+            </a:pPr>
+            <a:r>
+              <a:rPr sz="1200" b="0">
+                <a:solidFill>
+                  <a:srgbClr val="E6EDF3"/>
+                </a:solidFill>
+                <a:latin typeface="Segoe UI"/>
+              </a:rPr>
+              <a:t>12.48</a:t>
+            </a:r>
+          </a:p>
+        </p:txBody>
+      </p:sp>
+      <p:sp>
+        <p:nvSpPr>
+          <p:cNvPr id="26" name="TextBox 25"/>
+          <p:cNvSpPr txBox="1"/>
+          <p:nvPr/>
+        </p:nvSpPr>
+        <p:spPr>
+          <a:xfrm>
+            <a:off x="10287000" y="3657600"/>
+            <a:ext cx="1371600" cy="457200"/>
+          </a:xfrm>
+          <a:prstGeom prst="rect">
+            <a:avLst/>
+          </a:prstGeom>
+          <a:noFill/>
+        </p:spPr>
+        <p:txBody>
+          <a:bodyPr wrap="square" lIns="0" tIns="0" rIns="0" bIns="0" anchor="ctr">
+            <a:spAutoFit/>
+          </a:bodyPr>
+          <a:lstStyle/>
+          <a:p>
+            <a:pPr>
+              <a:lnSpc>
+                <a:spcPct val="98000"/>
+              </a:lnSpc>
+            </a:pPr>
+            <a:r>
+              <a:rPr sz="1200" b="1">
+                <a:solidFill>
+                  <a:srgbClr val="3FB950"/>
+                </a:solidFill>
+                <a:latin typeface="Segoe UI"/>
+              </a:rPr>
+              <a:t>8.00</a:t>
+            </a:r>
+          </a:p>
+        </p:txBody>
+      </p:sp>
+      <p:sp>
+        <p:nvSpPr>
+          <p:cNvPr id="27" name="TextBox 26"/>
+          <p:cNvSpPr txBox="1"/>
+          <p:nvPr/>
+        </p:nvSpPr>
+        <p:spPr>
+          <a:xfrm>
+            <a:off x="6355080" y="4663440"/>
+            <a:ext cx="5303520" cy="822960"/>
+          </a:xfrm>
+          <a:prstGeom prst="rect">
+            <a:avLst/>
+          </a:prstGeom>
+          <a:noFill/>
+        </p:spPr>
+        <p:txBody>
+          <a:bodyPr wrap="square" lIns="0" tIns="0" rIns="0" bIns="0">
+            <a:spAutoFit/>
+          </a:bodyPr>
+          <a:lstStyle/>
+          <a:p>
+            <a:pPr algn="l"/>
+            <a:r>
+              <a:rPr sz="1100" b="0" i="1">
                 <a:solidFill>
                   <a:srgbClr val="8B949E"/>
                 </a:solidFill>
-                <a:latin typeface="Consolas"/>
-              </a:rPr>
-              <a:t>mappa BPF</a:t>
-            </a:r>
-          </a:p>
-        </p:txBody>
-      </p:sp>
-      <p:sp>
-        <p:nvSpPr>
-          <p:cNvPr id="18" name="TextBox 17"/>
-          <p:cNvSpPr txBox="1"/>
-          <p:nvPr/>
-        </p:nvSpPr>
-        <p:spPr>
-          <a:xfrm>
-            <a:off x="8835390" y="4754880"/>
-            <a:ext cx="274320" cy="914400"/>
-          </a:xfrm>
-          <a:prstGeom prst="rect">
-            <a:avLst/>
-          </a:prstGeom>
-          <a:noFill/>
-        </p:spPr>
-        <p:txBody>
-          <a:bodyPr wrap="square" lIns="0" tIns="0" rIns="0" bIns="0" anchor="ctr">
-            <a:spAutoFit/>
-          </a:bodyPr>
-          <a:lstStyle/>
-          <a:p>
-            <a:pPr algn="ctr"/>
-            <a:r>
-              <a:rPr sz="2000" b="1" i="0">
-                <a:solidFill>
-                  <a:srgbClr val="F5A623"/>
-                </a:solidFill>
-                <a:latin typeface="Segoe UI"/>
-              </a:rPr>
-              <a:t>›</a:t>
-            </a:r>
-          </a:p>
-        </p:txBody>
-      </p:sp>
-      <p:sp>
-        <p:nvSpPr>
-          <p:cNvPr id="19" name="Rounded Rectangle 18"/>
-          <p:cNvSpPr/>
-          <p:nvPr/>
-        </p:nvSpPr>
-        <p:spPr>
-          <a:xfrm>
-            <a:off x="9109710" y="4754880"/>
-            <a:ext cx="2548890" cy="914400"/>
-          </a:xfrm>
-          <a:prstGeom prst="roundRect">
-            <a:avLst/>
-          </a:prstGeom>
-          <a:solidFill>
-            <a:srgbClr val="1B222E"/>
-          </a:solidFill>
-          <a:ln>
-            <a:noFill/>
-          </a:ln>
-          <a:effectLst/>
-        </p:spPr>
-        <p:style>
-          <a:lnRef idx="1">
-            <a:schemeClr val="accent1"/>
-          </a:lnRef>
-          <a:fillRef idx="3">
-            <a:schemeClr val="accent1"/>
-          </a:fillRef>
-          <a:effectRef idx="2">
-            <a:schemeClr val="accent1"/>
-          </a:effectRef>
-          <a:fontRef idx="minor">
-            <a:schemeClr val="lt1"/>
-          </a:fontRef>
-        </p:style>
-        <p:txBody>
-          <a:bodyPr rtlCol="0" anchor="ctr"/>
-          <a:lstStyle/>
-          <a:p>
-            <a:pPr algn="ctr"/>
-            <a:endParaRPr/>
-          </a:p>
-        </p:txBody>
-      </p:sp>
-      <p:sp>
-        <p:nvSpPr>
-          <p:cNvPr id="20" name="Rectangle 19"/>
-          <p:cNvSpPr/>
-          <p:nvPr/>
-        </p:nvSpPr>
-        <p:spPr>
-          <a:xfrm>
-            <a:off x="9182862" y="4800600"/>
-            <a:ext cx="2402586" cy="38100"/>
-          </a:xfrm>
-          <a:prstGeom prst="rect">
-            <a:avLst/>
-          </a:prstGeom>
-          <a:solidFill>
-            <a:srgbClr val="303945"/>
-          </a:solidFill>
-          <a:ln>
-            <a:noFill/>
-          </a:ln>
-          <a:effectLst/>
-        </p:spPr>
-        <p:style>
-          <a:lnRef idx="1">
-            <a:schemeClr val="accent1"/>
-          </a:lnRef>
-          <a:fillRef idx="3">
-            <a:schemeClr val="accent1"/>
-          </a:fillRef>
-          <a:effectRef idx="2">
-            <a:schemeClr val="accent1"/>
-          </a:effectRef>
-          <a:fontRef idx="minor">
-            <a:schemeClr val="lt1"/>
-          </a:fontRef>
-        </p:style>
-        <p:txBody>
-          <a:bodyPr rtlCol="0" anchor="ctr"/>
-          <a:lstStyle/>
-          <a:p>
-            <a:pPr algn="ctr"/>
-            <a:endParaRPr/>
-          </a:p>
-        </p:txBody>
-      </p:sp>
-      <p:sp>
-        <p:nvSpPr>
-          <p:cNvPr id="21" name="TextBox 20"/>
-          <p:cNvSpPr txBox="1"/>
-          <p:nvPr/>
-        </p:nvSpPr>
-        <p:spPr>
-          <a:xfrm>
-            <a:off x="9164574" y="4754880"/>
-            <a:ext cx="2439162" cy="914400"/>
-          </a:xfrm>
-          <a:prstGeom prst="rect">
-            <a:avLst/>
-          </a:prstGeom>
-          <a:noFill/>
-        </p:spPr>
-        <p:txBody>
-          <a:bodyPr wrap="square" lIns="0" tIns="0" rIns="0" bIns="0" anchor="ctr">
-            <a:spAutoFit/>
-          </a:bodyPr>
-          <a:lstStyle/>
-          <a:p>
-            <a:pPr algn="ctr"/>
-            <a:r>
-              <a:rPr sz="1250" b="1">
-                <a:solidFill>
-                  <a:srgbClr val="E6EDF3"/>
-                </a:solidFill>
-                <a:latin typeface="Segoe UI"/>
-              </a:rPr>
-              <a:t>XDP</a:t>
-            </a:r>
-          </a:p>
-          <a:p>
-            <a:pPr algn="ctr"/>
-            <a:r>
-              <a:rPr sz="950">
-                <a:solidFill>
-                  <a:srgbClr val="8B949E"/>
-                </a:solidFill>
-                <a:latin typeface="Consolas"/>
-              </a:rPr>
-              <a:t>inferenza</a:t>
+                <a:latin typeface="Segoe UI"/>
+              </a:rPr>
+              <a:t>P3 in parallelo: 160 → 26 letture, 15 767 → 8 209 istruzioni. Inferenza invariata su tutta la suite. Registrare un modello è ora UNA bpf_map_update_elem invece di 319 (P2) / 2048 (P3).</a:t>
             </a:r>
           </a:p>
         </p:txBody>
@@ -7630,7 +8420,7 @@
         </p:nvSpPr>
         <p:spPr>
           <a:xfrm>
-            <a:off x="0" y="0"/>
+            <a:off x="0" y="7883"/>
             <a:ext cx="12191695" cy="6858000"/>
           </a:xfrm>
           <a:prstGeom prst="rect">
@@ -7697,7 +8487,7 @@
                 </a:solidFill>
                 <a:latin typeface="Georgia"/>
               </a:rPr>
-              <a:t>—</a:t>
+              <a:t>07</a:t>
             </a:r>
           </a:p>
         </p:txBody>
@@ -7732,7 +8522,7 @@
                 </a:solidFill>
                 <a:latin typeface="Georgia"/>
               </a:rPr>
-              <a:t>Riepilogo e stato</a:t>
+              <a:t>Metodologia di misura e riscontro in letteratura</a:t>
             </a:r>
           </a:p>
         </p:txBody>
@@ -7767,7 +8557,7 @@
                 </a:solidFill>
                 <a:latin typeface="Segoe UI"/>
               </a:rPr>
-              <a:t>Cosa è stato fatto, verificato e documentato</a:t>
+              <a:t>Perché il minimo su N trial, e cosa dice la letteratura</a:t>
             </a:r>
           </a:p>
         </p:txBody>
@@ -7803,22 +8593,148 @@
               </a:spcAft>
             </a:pPr>
             <a:r>
-              <a:rPr sz="1300" b="1">
+              <a:rPr sz="1300" b="1" dirty="0">
                 <a:solidFill>
                   <a:srgbClr val="F5A623"/>
                 </a:solidFill>
                 <a:latin typeface="Segoe UI"/>
               </a:rPr>
-              <a:t>▸ Input vector flessibile </a:t>
-            </a:r>
-            <a:r>
-              <a:rPr sz="1300">
-                <a:solidFill>
-                  <a:srgbClr val="E6EDF3"/>
-                </a:solidFill>
-                <a:latin typeface="Segoe UI"/>
-              </a:rPr>
-              <a:t>su tutte e 3 le pipeline (default byte-identico).</a:t>
+              <a:t>▸ </a:t>
+            </a:r>
+            <a:r>
+              <a:rPr sz="1300" b="1" dirty="0" err="1">
+                <a:solidFill>
+                  <a:srgbClr val="F5A623"/>
+                </a:solidFill>
+                <a:latin typeface="Segoe UI"/>
+              </a:rPr>
+              <a:t>Rumore</a:t>
+            </a:r>
+            <a:r>
+              <a:rPr sz="1300" b="1" dirty="0">
+                <a:solidFill>
+                  <a:srgbClr val="F5A623"/>
+                </a:solidFill>
+                <a:latin typeface="Segoe UI"/>
+              </a:rPr>
+              <a:t> a senso </a:t>
+            </a:r>
+            <a:r>
+              <a:rPr sz="1300" b="1" dirty="0" err="1">
+                <a:solidFill>
+                  <a:srgbClr val="F5A623"/>
+                </a:solidFill>
+                <a:latin typeface="Segoe UI"/>
+              </a:rPr>
+              <a:t>unico</a:t>
+            </a:r>
+            <a:r>
+              <a:rPr sz="1300" b="1" dirty="0">
+                <a:solidFill>
+                  <a:srgbClr val="F5A623"/>
+                </a:solidFill>
+                <a:latin typeface="Segoe UI"/>
+              </a:rPr>
+              <a:t>: </a:t>
+            </a:r>
+            <a:r>
+              <a:rPr sz="1300" dirty="0">
+                <a:solidFill>
+                  <a:srgbClr val="E6EDF3"/>
+                </a:solidFill>
+                <a:latin typeface="Segoe UI"/>
+              </a:rPr>
+              <a:t>interrupt/scheduling </a:t>
+            </a:r>
+            <a:r>
+              <a:rPr sz="1300" dirty="0" err="1">
+                <a:solidFill>
+                  <a:srgbClr val="E6EDF3"/>
+                </a:solidFill>
+                <a:latin typeface="Segoe UI"/>
+              </a:rPr>
+              <a:t>possono</a:t>
+            </a:r>
+            <a:r>
+              <a:rPr sz="1300" dirty="0">
+                <a:solidFill>
+                  <a:srgbClr val="E6EDF3"/>
+                </a:solidFill>
+                <a:latin typeface="Segoe UI"/>
+              </a:rPr>
+              <a:t> solo </a:t>
+            </a:r>
+            <a:r>
+              <a:rPr sz="1300" dirty="0" err="1">
+                <a:solidFill>
+                  <a:srgbClr val="E6EDF3"/>
+                </a:solidFill>
+                <a:latin typeface="Segoe UI"/>
+              </a:rPr>
+              <a:t>rallentare</a:t>
+            </a:r>
+            <a:r>
+              <a:rPr sz="1300" dirty="0">
+                <a:solidFill>
+                  <a:srgbClr val="E6EDF3"/>
+                </a:solidFill>
+                <a:latin typeface="Segoe UI"/>
+              </a:rPr>
+              <a:t> un </a:t>
+            </a:r>
+            <a:r>
+              <a:rPr sz="1300" dirty="0" err="1">
+                <a:solidFill>
+                  <a:srgbClr val="E6EDF3"/>
+                </a:solidFill>
+                <a:latin typeface="Segoe UI"/>
+              </a:rPr>
+              <a:t>campione</a:t>
+            </a:r>
+            <a:r>
+              <a:rPr sz="1300" dirty="0">
+                <a:solidFill>
+                  <a:srgbClr val="E6EDF3"/>
+                </a:solidFill>
+                <a:latin typeface="Segoe UI"/>
+              </a:rPr>
+              <a:t>, </a:t>
+            </a:r>
+            <a:r>
+              <a:rPr sz="1300" dirty="0" err="1">
+                <a:solidFill>
+                  <a:srgbClr val="E6EDF3"/>
+                </a:solidFill>
+                <a:latin typeface="Segoe UI"/>
+              </a:rPr>
+              <a:t>mai</a:t>
+            </a:r>
+            <a:r>
+              <a:rPr sz="1300" dirty="0">
+                <a:solidFill>
+                  <a:srgbClr val="E6EDF3"/>
+                </a:solidFill>
+                <a:latin typeface="Segoe UI"/>
+              </a:rPr>
+              <a:t> </a:t>
+            </a:r>
+            <a:r>
+              <a:rPr sz="1300" dirty="0" err="1">
+                <a:solidFill>
+                  <a:srgbClr val="E6EDF3"/>
+                </a:solidFill>
+                <a:latin typeface="Segoe UI"/>
+              </a:rPr>
+              <a:t>accelerarlo</a:t>
+            </a:r>
+            <a:r>
+              <a:rPr sz="1300" dirty="0">
+                <a:solidFill>
+                  <a:srgbClr val="E6EDF3"/>
+                </a:solidFill>
+                <a:latin typeface="Segoe UI"/>
+              </a:rPr>
+              <a:t>.</a:t>
             </a:r>
           </a:p>
           <a:p>
@@ -7831,22 +8747,130 @@
               </a:spcAft>
             </a:pPr>
             <a:r>
-              <a:rPr sz="1300" b="1">
+              <a:rPr sz="1300" b="1" dirty="0">
                 <a:solidFill>
                   <a:srgbClr val="F5A623"/>
                 </a:solidFill>
                 <a:latin typeface="Segoe UI"/>
               </a:rPr>
-              <a:t>▸ Profondità variabile </a:t>
-            </a:r>
-            <a:r>
-              <a:rPr sz="1300">
-                <a:solidFill>
-                  <a:srgbClr val="E6EDF3"/>
-                </a:solidFill>
-                <a:latin typeface="Segoe UI"/>
-              </a:rPr>
-              <a:t>+ studio larghezza-vs-profondità (allargare batte approfondire).</a:t>
+              <a:t>▸ </a:t>
+            </a:r>
+            <a:r>
+              <a:rPr sz="1300" b="1" dirty="0" err="1">
+                <a:solidFill>
+                  <a:srgbClr val="F5A623"/>
+                </a:solidFill>
+                <a:latin typeface="Segoe UI"/>
+              </a:rPr>
+              <a:t>Quindi</a:t>
+            </a:r>
+            <a:r>
+              <a:rPr sz="1300" b="1" dirty="0">
+                <a:solidFill>
+                  <a:srgbClr val="F5A623"/>
+                </a:solidFill>
+                <a:latin typeface="Segoe UI"/>
+              </a:rPr>
+              <a:t> il </a:t>
+            </a:r>
+            <a:r>
+              <a:rPr sz="1300" b="1" dirty="0" err="1">
+                <a:solidFill>
+                  <a:srgbClr val="F5A623"/>
+                </a:solidFill>
+                <a:latin typeface="Segoe UI"/>
+              </a:rPr>
+              <a:t>minimo</a:t>
+            </a:r>
+            <a:r>
+              <a:rPr sz="1300" b="1" dirty="0">
+                <a:solidFill>
+                  <a:srgbClr val="F5A623"/>
+                </a:solidFill>
+                <a:latin typeface="Segoe UI"/>
+              </a:rPr>
+              <a:t> </a:t>
+            </a:r>
+            <a:r>
+              <a:rPr sz="1300" b="1" dirty="0" err="1">
+                <a:solidFill>
+                  <a:srgbClr val="F5A623"/>
+                </a:solidFill>
+                <a:latin typeface="Segoe UI"/>
+              </a:rPr>
+              <a:t>su</a:t>
+            </a:r>
+            <a:r>
+              <a:rPr sz="1300" b="1" dirty="0">
+                <a:solidFill>
+                  <a:srgbClr val="F5A623"/>
+                </a:solidFill>
+                <a:latin typeface="Segoe UI"/>
+              </a:rPr>
+              <a:t> N trial </a:t>
+            </a:r>
+            <a:r>
+              <a:rPr sz="1300" dirty="0">
+                <a:solidFill>
+                  <a:srgbClr val="E6EDF3"/>
+                </a:solidFill>
+                <a:latin typeface="Segoe UI"/>
+              </a:rPr>
+              <a:t>è la </a:t>
+            </a:r>
+            <a:r>
+              <a:rPr sz="1300" dirty="0" err="1">
+                <a:solidFill>
+                  <a:srgbClr val="E6EDF3"/>
+                </a:solidFill>
+                <a:latin typeface="Segoe UI"/>
+              </a:rPr>
+              <a:t>statistica</a:t>
+            </a:r>
+            <a:r>
+              <a:rPr sz="1300" dirty="0">
+                <a:solidFill>
+                  <a:srgbClr val="E6EDF3"/>
+                </a:solidFill>
+                <a:latin typeface="Segoe UI"/>
+              </a:rPr>
+              <a:t> </a:t>
+            </a:r>
+            <a:r>
+              <a:rPr sz="1300" dirty="0" err="1">
+                <a:solidFill>
+                  <a:srgbClr val="E6EDF3"/>
+                </a:solidFill>
+                <a:latin typeface="Segoe UI"/>
+              </a:rPr>
+              <a:t>giusta</a:t>
+            </a:r>
+            <a:r>
+              <a:rPr sz="1300" dirty="0">
+                <a:solidFill>
+                  <a:srgbClr val="E6EDF3"/>
+                </a:solidFill>
+                <a:latin typeface="Segoe UI"/>
+              </a:rPr>
+              <a:t> (non media né </a:t>
+            </a:r>
+            <a:r>
+              <a:rPr sz="1300" dirty="0" err="1">
+                <a:solidFill>
+                  <a:srgbClr val="E6EDF3"/>
+                </a:solidFill>
+                <a:latin typeface="Segoe UI"/>
+              </a:rPr>
+              <a:t>mediana</a:t>
+            </a:r>
+            <a:r>
+              <a:rPr sz="1300" dirty="0">
+                <a:solidFill>
+                  <a:srgbClr val="E6EDF3"/>
+                </a:solidFill>
+                <a:latin typeface="Segoe UI"/>
+              </a:rPr>
+              <a:t>) — come hyperfine / Google Benchmark.</a:t>
             </a:r>
           </a:p>
           <a:p>
@@ -7859,24 +8883,119 @@
               </a:spcAft>
             </a:pPr>
             <a:r>
-              <a:rPr sz="1300" b="1">
+              <a:rPr sz="1300" b="1" dirty="0">
                 <a:solidFill>
                   <a:srgbClr val="F5A623"/>
                 </a:solidFill>
                 <a:latin typeface="Segoe UI"/>
               </a:rPr>
-              <a:t>▸ AOT-literal sostituisce BCC </a:t>
-            </a:r>
-            <a:r>
-              <a:rPr sz="1300">
-                <a:solidFill>
-                  <a:srgbClr val="E6EDF3"/>
-                </a:solidFill>
-                <a:latin typeface="Segoe UI"/>
-              </a:rPr>
-              <a:t>nel deploy — verificato attaccato su Kathara.</a:t>
-            </a:r>
-          </a:p>
+              <a:t>▸ </a:t>
+            </a:r>
+            <a:r>
+              <a:rPr sz="1300" b="1" dirty="0" err="1">
+                <a:solidFill>
+                  <a:srgbClr val="F5A623"/>
+                </a:solidFill>
+                <a:latin typeface="Segoe UI"/>
+              </a:rPr>
+              <a:t>Corretti</a:t>
+            </a:r>
+            <a:r>
+              <a:rPr sz="1300" b="1" dirty="0">
+                <a:solidFill>
+                  <a:srgbClr val="F5A623"/>
+                </a:solidFill>
+                <a:latin typeface="Segoe UI"/>
+              </a:rPr>
+              <a:t> il benchmark e la suite --only kernel </a:t>
+            </a:r>
+            <a:r>
+              <a:rPr sz="1300" dirty="0">
+                <a:solidFill>
+                  <a:srgbClr val="E6EDF3"/>
+                </a:solidFill>
+                <a:latin typeface="Segoe UI"/>
+              </a:rPr>
+              <a:t>(7 trial, min + p50/max). Prima un solo </a:t>
+            </a:r>
+            <a:r>
+              <a:rPr sz="1300" dirty="0" err="1">
+                <a:solidFill>
+                  <a:srgbClr val="E6EDF3"/>
+                </a:solidFill>
+                <a:latin typeface="Segoe UI"/>
+              </a:rPr>
+              <a:t>campione</a:t>
+            </a:r>
+            <a:r>
+              <a:rPr sz="1300" dirty="0">
+                <a:solidFill>
+                  <a:srgbClr val="E6EDF3"/>
+                </a:solidFill>
+                <a:latin typeface="Segoe UI"/>
+              </a:rPr>
+              <a:t> </a:t>
+            </a:r>
+            <a:r>
+              <a:rPr sz="1300" dirty="0" err="1">
+                <a:solidFill>
+                  <a:srgbClr val="E6EDF3"/>
+                </a:solidFill>
+                <a:latin typeface="Segoe UI"/>
+              </a:rPr>
+              <a:t>oscillava</a:t>
+            </a:r>
+            <a:r>
+              <a:rPr sz="1300" dirty="0">
+                <a:solidFill>
+                  <a:srgbClr val="E6EDF3"/>
+                </a:solidFill>
+                <a:latin typeface="Segoe UI"/>
+              </a:rPr>
+              <a:t> </a:t>
+            </a:r>
+            <a:r>
+              <a:rPr sz="1300" dirty="0" err="1">
+                <a:solidFill>
+                  <a:srgbClr val="E6EDF3"/>
+                </a:solidFill>
+                <a:latin typeface="Segoe UI"/>
+              </a:rPr>
+              <a:t>fino</a:t>
+            </a:r>
+            <a:r>
+              <a:rPr sz="1300" dirty="0">
+                <a:solidFill>
+                  <a:srgbClr val="E6EDF3"/>
+                </a:solidFill>
+                <a:latin typeface="Segoe UI"/>
+              </a:rPr>
+              <a:t> a 20×.</a:t>
+            </a:r>
+          </a:p>
+        </p:txBody>
+      </p:sp>
+      <p:sp>
+        <p:nvSpPr>
+          <p:cNvPr id="7" name="TextBox 6"/>
+          <p:cNvSpPr txBox="1"/>
+          <p:nvPr/>
+        </p:nvSpPr>
+        <p:spPr>
+          <a:xfrm>
+            <a:off x="6492240" y="1783080"/>
+            <a:ext cx="5120640" cy="4114800"/>
+          </a:xfrm>
+          <a:prstGeom prst="rect">
+            <a:avLst/>
+          </a:prstGeom>
+          <a:noFill/>
+        </p:spPr>
+        <p:txBody>
+          <a:bodyPr wrap="square" lIns="0" tIns="0" rIns="0" bIns="0">
+            <a:spAutoFit/>
+          </a:bodyPr>
+          <a:lstStyle/>
           <a:p>
             <a:pPr>
               <a:lnSpc>
@@ -7889,11 +9008,11 @@
             <a:r>
               <a:rPr sz="1300" b="1">
                 <a:solidFill>
-                  <a:srgbClr val="F5A623"/>
-                </a:solidFill>
-                <a:latin typeface="Segoe UI"/>
-              </a:rPr>
-              <a:t>▸ Baseline vs hardcoded </a:t>
+                  <a:srgbClr val="3FD0C8"/>
+                </a:solidFill>
+                <a:latin typeface="Segoe UI"/>
+              </a:rPr>
+              <a:t>▸ XDP paper (CoNEXT 2018): </a:t>
             </a:r>
             <a:r>
               <a:rPr sz="1300">
@@ -7902,7 +9021,7 @@
                 </a:solidFill>
                 <a:latin typeface="Segoe UI"/>
               </a:rPr>
-              <a:t>misurati: ~1.6× il pavimento XDP.</a:t>
+              <a:t>metriche standard — Mpps a CPU satura, latenza per-hop, overhead del solo eBPF.</a:t>
             </a:r>
           </a:p>
           <a:p>
@@ -7917,11 +9036,11 @@
             <a:r>
               <a:rPr sz="1300" b="1">
                 <a:solidFill>
-                  <a:srgbClr val="F5A623"/>
-                </a:solidFill>
-                <a:latin typeface="Segoe UI"/>
-              </a:rPr>
-              <a:t>▸ mac_table → ARRAY </a:t>
+                  <a:srgbClr val="3FD0C8"/>
+                </a:solidFill>
+                <a:latin typeface="Segoe UI"/>
+              </a:rPr>
+              <a:t>▸ Heiser, 'Benchmarking Crimes': </a:t>
             </a:r>
             <a:r>
               <a:rPr sz="1300">
@@ -7930,7 +9049,7 @@
                 </a:solidFill>
                 <a:latin typeface="Segoe UI"/>
               </a:rPr>
-              <a:t>+ 3 colli di bottiglia trasversali documentati.</a:t>
+              <a:t>trappole — frequency scaling, C-state, accounting per-tick del softirq.</a:t>
             </a:r>
           </a:p>
           <a:p>
@@ -7945,20 +9064,398 @@
             <a:r>
               <a:rPr sz="1300" b="1">
                 <a:solidFill>
+                  <a:srgbClr val="3FD0C8"/>
+                </a:solidFill>
+                <a:latin typeface="Segoe UI"/>
+              </a:rPr>
+              <a:t>▸ Onestà sull'ambiente: </a:t>
+            </a:r>
+            <a:r>
+              <a:rPr sz="1300">
+                <a:solidFill>
+                  <a:srgbClr val="E6EDF3"/>
+                </a:solidFill>
+                <a:latin typeface="Segoe UI"/>
+              </a:rPr>
+              <a:t>VM senza CPU pinning → valori assoluti non comparabili a bare-metal; conta il relativo.</a:t>
+            </a:r>
+          </a:p>
+          <a:p>
+            <a:pPr>
+              <a:spcAft>
+                <a:spcPts val="700"/>
+              </a:spcAft>
+            </a:pPr>
+            <a:r>
+              <a:rPr sz="1300" b="1">
+                <a:solidFill>
+                  <a:srgbClr val="3FD0C8"/>
+                </a:solidFill>
+                <a:latin typeface="Segoe UI"/>
+              </a:rPr>
+              <a:t>▸ </a:t>
+            </a:r>
+            <a:r>
+              <a:rPr sz="1300" b="1">
+                <a:solidFill>
+                  <a:srgbClr val="3FD0C8"/>
+                </a:solidFill>
+                <a:latin typeface="Segoe UI"/>
+              </a:rPr>
+              <a:t>Survey COMST 2024: </a:t>
+            </a:r>
+            <a:r>
+              <a:rPr sz="1300" b="0">
+                <a:solidFill>
+                  <a:srgbClr val="E6EDF3"/>
+                </a:solidFill>
+                <a:latin typeface="Segoe UI"/>
+              </a:rPr>
+              <a:t>tre assi di valutazione — modello, sistema, risorse. Qui il primo è invariante per costruzione, e va detto.</a:t>
+            </a:r>
+          </a:p>
+          <a:p>
+            <a:pPr>
+              <a:spcAft>
+                <a:spcPts val="700"/>
+              </a:spcAft>
+            </a:pPr>
+            <a:r>
+              <a:rPr sz="1300" b="1">
+                <a:solidFill>
+                  <a:srgbClr val="3FD0C8"/>
+                </a:solidFill>
+                <a:latin typeface="Segoe UI"/>
+              </a:rPr>
+              <a:t>▸ </a:t>
+            </a:r>
+            <a:r>
+              <a:rPr sz="1300" b="1">
+                <a:solidFill>
+                  <a:srgbClr val="3FD0C8"/>
+                </a:solidFill>
+                <a:latin typeface="Segoe UI"/>
+              </a:rPr>
+              <a:t>N3IC (NSDI 22): </a:t>
+            </a:r>
+            <a:r>
+              <a:rPr sz="1300" b="0">
+                <a:solidFill>
+                  <a:srgbClr val="E6EDF3"/>
+                </a:solidFill>
+                <a:latin typeface="Segoe UI"/>
+              </a:rPr>
+              <a:t>generatore back-to-back, verifica che il collo di bottiglia sia il sistema sotto test, latenza come percentile. TEST_RUN non misura MLFFR né multi-core, ma isola il costo del solo programma eBPF.</a:t>
+            </a:r>
+          </a:p>
+        </p:txBody>
+      </p:sp>
+    </p:spTree>
+  </p:cSld>
+  <p:clrMapOvr>
+    <a:masterClrMapping/>
+  </p:clrMapOvr>
+</p:sld>
+</file>
+
+<file path=ppt/slides/slide15.xml><?xml version="1.0" encoding="utf-8"?>
+<p:sld xmlns:a="http://schemas.openxmlformats.org/drawingml/2006/main" xmlns:r="http://schemas.openxmlformats.org/officeDocument/2006/relationships" xmlns:p="http://schemas.openxmlformats.org/presentationml/2006/main">
+  <p:cSld>
+    <p:spTree>
+      <p:nvGrpSpPr>
+        <p:cNvPr id="1" name=""/>
+        <p:cNvGrpSpPr/>
+        <p:nvPr/>
+      </p:nvGrpSpPr>
+      <p:grpSpPr>
+        <a:xfrm>
+          <a:off x="0" y="0"/>
+          <a:ext cx="0" cy="0"/>
+          <a:chOff x="0" y="0"/>
+          <a:chExt cx="0" cy="0"/>
+        </a:xfrm>
+      </p:grpSpPr>
+      <p:sp>
+        <p:nvSpPr>
+          <p:cNvPr id="2" name="Rectangle 1"/>
+          <p:cNvSpPr/>
+          <p:nvPr/>
+        </p:nvSpPr>
+        <p:spPr>
+          <a:xfrm>
+            <a:off x="0" y="0"/>
+            <a:ext cx="12191695" cy="6858000"/>
+          </a:xfrm>
+          <a:prstGeom prst="rect">
+            <a:avLst/>
+          </a:prstGeom>
+          <a:solidFill>
+            <a:srgbClr val="0D1117"/>
+          </a:solidFill>
+          <a:ln>
+            <a:noFill/>
+          </a:ln>
+          <a:effectLst/>
+        </p:spPr>
+        <p:style>
+          <a:lnRef idx="1">
+            <a:schemeClr val="accent1"/>
+          </a:lnRef>
+          <a:fillRef idx="3">
+            <a:schemeClr val="accent1"/>
+          </a:fillRef>
+          <a:effectRef idx="2">
+            <a:schemeClr val="accent1"/>
+          </a:effectRef>
+          <a:fontRef idx="minor">
+            <a:schemeClr val="lt1"/>
+          </a:fontRef>
+        </p:style>
+        <p:txBody>
+          <a:bodyPr rtlCol="0" anchor="ctr"/>
+          <a:lstStyle/>
+          <a:p>
+            <a:pPr algn="ctr"/>
+            <a:endParaRPr/>
+          </a:p>
+        </p:txBody>
+      </p:sp>
+      <p:sp>
+        <p:nvSpPr>
+          <p:cNvPr id="3" name="TextBox 2"/>
+          <p:cNvSpPr txBox="1"/>
+          <p:nvPr/>
+        </p:nvSpPr>
+        <p:spPr>
+          <a:xfrm>
+            <a:off x="566928" y="365760"/>
+            <a:ext cx="1051560" cy="822960"/>
+          </a:xfrm>
+          <a:prstGeom prst="rect">
+            <a:avLst/>
+          </a:prstGeom>
+          <a:noFill/>
+        </p:spPr>
+        <p:txBody>
+          <a:bodyPr wrap="square" lIns="0" tIns="0" rIns="0" bIns="0">
+            <a:spAutoFit/>
+          </a:bodyPr>
+          <a:lstStyle/>
+          <a:p>
+            <a:pPr algn="l"/>
+            <a:r>
+              <a:rPr sz="4000" b="1" i="0">
+                <a:solidFill>
                   <a:srgbClr val="F5A623"/>
                 </a:solidFill>
-                <a:latin typeface="Segoe UI"/>
-              </a:rPr>
-              <a:t>▸ Polling FRR </a:t>
-            </a:r>
-            <a:r>
-              <a:rPr sz="1300">
-                <a:solidFill>
-                  <a:srgbClr val="E6EDF3"/>
-                </a:solidFill>
-                <a:latin typeface="Segoe UI"/>
-              </a:rPr>
-              <a:t>a 0.5 s, coerente ovunque.</a:t>
+                <a:latin typeface="Georgia"/>
+              </a:rPr>
+              <a:t>08</a:t>
+            </a:r>
+          </a:p>
+        </p:txBody>
+      </p:sp>
+      <p:sp>
+        <p:nvSpPr>
+          <p:cNvPr id="4" name="TextBox 3"/>
+          <p:cNvSpPr txBox="1"/>
+          <p:nvPr/>
+        </p:nvSpPr>
+        <p:spPr>
+          <a:xfrm>
+            <a:off x="1645920" y="384048"/>
+            <a:ext cx="10058400" cy="731520"/>
+          </a:xfrm>
+          <a:prstGeom prst="rect">
+            <a:avLst/>
+          </a:prstGeom>
+          <a:noFill/>
+        </p:spPr>
+        <p:txBody>
+          <a:bodyPr wrap="square" lIns="0" tIns="0" rIns="0" bIns="0">
+            <a:spAutoFit/>
+          </a:bodyPr>
+          <a:lstStyle/>
+          <a:p>
+            <a:pPr algn="l"/>
+            <a:r>
+              <a:rPr sz="3000" b="1" i="0">
+                <a:solidFill>
+                  <a:srgbClr val="E6EDF3"/>
+                </a:solidFill>
+                <a:latin typeface="Georgia"/>
+              </a:rPr>
+              <a:t>Polling FRR del link_state</a:t>
+            </a:r>
+          </a:p>
+        </p:txBody>
+      </p:sp>
+      <p:sp>
+        <p:nvSpPr>
+          <p:cNvPr id="5" name="TextBox 4"/>
+          <p:cNvSpPr txBox="1"/>
+          <p:nvPr/>
+        </p:nvSpPr>
+        <p:spPr>
+          <a:xfrm>
+            <a:off x="1673352" y="1078992"/>
+            <a:ext cx="10058400" cy="457200"/>
+          </a:xfrm>
+          <a:prstGeom prst="rect">
+            <a:avLst/>
+          </a:prstGeom>
+          <a:noFill/>
+        </p:spPr>
+        <p:txBody>
+          <a:bodyPr wrap="square" lIns="0" tIns="0" rIns="0" bIns="0">
+            <a:spAutoFit/>
+          </a:bodyPr>
+          <a:lstStyle/>
+          <a:p>
+            <a:pPr algn="l"/>
+            <a:r>
+              <a:rPr sz="1350" b="0" i="0">
+                <a:solidFill>
+                  <a:srgbClr val="8B949E"/>
+                </a:solidFill>
+                <a:latin typeface="Segoe UI"/>
+              </a:rPr>
+              <a:t>Ogni quanto il monitor userspace aggiorna lo stato dei link</a:t>
+            </a:r>
+          </a:p>
+        </p:txBody>
+      </p:sp>
+      <p:sp>
+        <p:nvSpPr>
+          <p:cNvPr id="6" name="TextBox 5"/>
+          <p:cNvSpPr txBox="1"/>
+          <p:nvPr/>
+        </p:nvSpPr>
+        <p:spPr>
+          <a:xfrm>
+            <a:off x="640080" y="1783080"/>
+            <a:ext cx="10972800" cy="4114800"/>
+          </a:xfrm>
+          <a:prstGeom prst="rect">
+            <a:avLst/>
+          </a:prstGeom>
+          <a:noFill/>
+        </p:spPr>
+        <p:txBody>
+          <a:bodyPr wrap="square" lIns="0" tIns="0" rIns="0" bIns="0">
+            <a:spAutoFit/>
+          </a:bodyPr>
+          <a:lstStyle/>
+          <a:p>
+            <a:pPr>
+              <a:lnSpc>
+                <a:spcPct val="105000"/>
+              </a:lnSpc>
+              <a:spcAft>
+                <a:spcPts val="700"/>
+              </a:spcAft>
+            </a:pPr>
+            <a:r>
+              <a:rPr sz="1400" b="1">
+                <a:solidFill>
+                  <a:srgbClr val="F5A623"/>
+                </a:solidFill>
+                <a:latin typeface="Segoe UI"/>
+              </a:rPr>
+              <a:t>▸ link_state[0..5] </a:t>
+            </a:r>
+            <a:r>
+              <a:rPr sz="1400">
+                <a:solidFill>
+                  <a:srgbClr val="E6EDF3"/>
+                </a:solidFill>
+                <a:latin typeface="Segoe UI"/>
+              </a:rPr>
+              <a:t>è la feature di fast-reroute: 1 = su, 0 = giù, letta ad ogni pacchetto dai programmi eBPF.</a:t>
+            </a:r>
+          </a:p>
+          <a:p>
+            <a:pPr>
+              <a:lnSpc>
+                <a:spcPct val="105000"/>
+              </a:lnSpc>
+              <a:spcAft>
+                <a:spcPts val="700"/>
+              </a:spcAft>
+            </a:pPr>
+            <a:r>
+              <a:rPr sz="1400" b="1">
+                <a:solidFill>
+                  <a:srgbClr val="F5A623"/>
+                </a:solidFill>
+                <a:latin typeface="Segoe UI"/>
+              </a:rPr>
+              <a:t>▸ Un thread userspace </a:t>
+            </a:r>
+            <a:r>
+              <a:rPr sz="1400">
+                <a:solidFill>
+                  <a:srgbClr val="E6EDF3"/>
+                </a:solidFill>
+                <a:latin typeface="Segoe UI"/>
+              </a:rPr>
+              <a:t>legge /sys/class/net/ethX/carrier e scrive nella mappa condivisa.</a:t>
+            </a:r>
+          </a:p>
+          <a:p>
+            <a:pPr>
+              <a:lnSpc>
+                <a:spcPct val="105000"/>
+              </a:lnSpc>
+              <a:spcAft>
+                <a:spcPts val="700"/>
+              </a:spcAft>
+            </a:pPr>
+            <a:r>
+              <a:rPr sz="1400" b="1">
+                <a:solidFill>
+                  <a:srgbClr val="F5A623"/>
+                </a:solidFill>
+                <a:latin typeface="Segoe UI"/>
+              </a:rPr>
+              <a:t>▸ Polling impostato a 0.5 secondi. </a:t>
+            </a:r>
+            <a:r>
+              <a:rPr sz="1400">
+                <a:solidFill>
+                  <a:srgbClr val="E6EDF3"/>
+                </a:solidFill>
+                <a:latin typeface="Segoe UI"/>
+              </a:rPr>
+              <a:t>Corretta un'incoerenza: method5/method6 lo sovrascrivevano a 1.0 s → riportati a 0.5.</a:t>
+            </a:r>
+          </a:p>
+          <a:p>
+            <a:pPr>
+              <a:lnSpc>
+                <a:spcPct val="105000"/>
+              </a:lnSpc>
+              <a:spcAft>
+                <a:spcPts val="700"/>
+              </a:spcAft>
+            </a:pPr>
+            <a:r>
+              <a:rPr sz="1400" b="1">
+                <a:solidFill>
+                  <a:srgbClr val="F5A623"/>
+                </a:solidFill>
+                <a:latin typeface="Segoe UI"/>
+              </a:rPr>
+              <a:t>▸ Effetto: </a:t>
+            </a:r>
+            <a:r>
+              <a:rPr sz="1400">
+                <a:solidFill>
+                  <a:srgbClr val="E6EDF3"/>
+                </a:solidFill>
+                <a:latin typeface="Segoe UI"/>
+              </a:rPr>
+              <a:t>un link che cade è rilevato entro mezzo secondo; la feature va a 0 e l'argmax può scegliere un'altra uscita, senza reload.</a:t>
             </a:r>
           </a:p>
         </p:txBody>
@@ -7971,8 +9468,8 @@
         </p:nvSpPr>
         <p:spPr>
           <a:xfrm>
-            <a:off x="6492240" y="1783080"/>
-            <a:ext cx="5120640" cy="1554480"/>
+            <a:off x="640080" y="4754880"/>
+            <a:ext cx="2548890" cy="914400"/>
           </a:xfrm>
           <a:prstGeom prst="roundRect">
             <a:avLst/>
@@ -8016,6 +9513,1034 @@
         </p:nvSpPr>
         <p:spPr>
           <a:xfrm>
+            <a:off x="713232" y="4800600"/>
+            <a:ext cx="2402586" cy="38100"/>
+          </a:xfrm>
+          <a:prstGeom prst="rect">
+            <a:avLst/>
+          </a:prstGeom>
+          <a:solidFill>
+            <a:srgbClr val="303945"/>
+          </a:solidFill>
+          <a:ln>
+            <a:noFill/>
+          </a:ln>
+          <a:effectLst/>
+        </p:spPr>
+        <p:style>
+          <a:lnRef idx="1">
+            <a:schemeClr val="accent1"/>
+          </a:lnRef>
+          <a:fillRef idx="3">
+            <a:schemeClr val="accent1"/>
+          </a:fillRef>
+          <a:effectRef idx="2">
+            <a:schemeClr val="accent1"/>
+          </a:effectRef>
+          <a:fontRef idx="minor">
+            <a:schemeClr val="lt1"/>
+          </a:fontRef>
+        </p:style>
+        <p:txBody>
+          <a:bodyPr rtlCol="0" anchor="ctr"/>
+          <a:lstStyle/>
+          <a:p>
+            <a:pPr algn="ctr"/>
+            <a:endParaRPr/>
+          </a:p>
+        </p:txBody>
+      </p:sp>
+      <p:sp>
+        <p:nvSpPr>
+          <p:cNvPr id="9" name="TextBox 8"/>
+          <p:cNvSpPr txBox="1"/>
+          <p:nvPr/>
+        </p:nvSpPr>
+        <p:spPr>
+          <a:xfrm>
+            <a:off x="694944" y="4754880"/>
+            <a:ext cx="2439162" cy="914400"/>
+          </a:xfrm>
+          <a:prstGeom prst="rect">
+            <a:avLst/>
+          </a:prstGeom>
+          <a:noFill/>
+        </p:spPr>
+        <p:txBody>
+          <a:bodyPr wrap="square" lIns="0" tIns="0" rIns="0" bIns="0" anchor="ctr">
+            <a:spAutoFit/>
+          </a:bodyPr>
+          <a:lstStyle/>
+          <a:p>
+            <a:pPr algn="ctr"/>
+            <a:r>
+              <a:rPr sz="1250" b="1">
+                <a:solidFill>
+                  <a:srgbClr val="E6EDF3"/>
+                </a:solidFill>
+                <a:latin typeface="Segoe UI"/>
+              </a:rPr>
+              <a:t>/sys/.../carrier</a:t>
+            </a:r>
+          </a:p>
+          <a:p>
+            <a:pPr algn="ctr"/>
+            <a:r>
+              <a:rPr sz="950">
+                <a:solidFill>
+                  <a:srgbClr val="8B949E"/>
+                </a:solidFill>
+                <a:latin typeface="Consolas"/>
+              </a:rPr>
+              <a:t>kernel</a:t>
+            </a:r>
+          </a:p>
+        </p:txBody>
+      </p:sp>
+      <p:sp>
+        <p:nvSpPr>
+          <p:cNvPr id="10" name="TextBox 9"/>
+          <p:cNvSpPr txBox="1"/>
+          <p:nvPr/>
+        </p:nvSpPr>
+        <p:spPr>
+          <a:xfrm>
+            <a:off x="3188970" y="4754880"/>
+            <a:ext cx="274320" cy="914400"/>
+          </a:xfrm>
+          <a:prstGeom prst="rect">
+            <a:avLst/>
+          </a:prstGeom>
+          <a:noFill/>
+        </p:spPr>
+        <p:txBody>
+          <a:bodyPr wrap="square" lIns="0" tIns="0" rIns="0" bIns="0" anchor="ctr">
+            <a:spAutoFit/>
+          </a:bodyPr>
+          <a:lstStyle/>
+          <a:p>
+            <a:pPr algn="ctr"/>
+            <a:r>
+              <a:rPr sz="2000" b="1" i="0">
+                <a:solidFill>
+                  <a:srgbClr val="F5A623"/>
+                </a:solidFill>
+                <a:latin typeface="Segoe UI"/>
+              </a:rPr>
+              <a:t>›</a:t>
+            </a:r>
+          </a:p>
+        </p:txBody>
+      </p:sp>
+      <p:sp>
+        <p:nvSpPr>
+          <p:cNvPr id="11" name="Rounded Rectangle 10"/>
+          <p:cNvSpPr/>
+          <p:nvPr/>
+        </p:nvSpPr>
+        <p:spPr>
+          <a:xfrm>
+            <a:off x="3463290" y="4754880"/>
+            <a:ext cx="2548890" cy="914400"/>
+          </a:xfrm>
+          <a:prstGeom prst="roundRect">
+            <a:avLst/>
+          </a:prstGeom>
+          <a:solidFill>
+            <a:srgbClr val="1B222E"/>
+          </a:solidFill>
+          <a:ln>
+            <a:noFill/>
+          </a:ln>
+          <a:effectLst/>
+        </p:spPr>
+        <p:style>
+          <a:lnRef idx="1">
+            <a:schemeClr val="accent1"/>
+          </a:lnRef>
+          <a:fillRef idx="3">
+            <a:schemeClr val="accent1"/>
+          </a:fillRef>
+          <a:effectRef idx="2">
+            <a:schemeClr val="accent1"/>
+          </a:effectRef>
+          <a:fontRef idx="minor">
+            <a:schemeClr val="lt1"/>
+          </a:fontRef>
+        </p:style>
+        <p:txBody>
+          <a:bodyPr rtlCol="0" anchor="ctr"/>
+          <a:lstStyle/>
+          <a:p>
+            <a:pPr algn="ctr"/>
+            <a:endParaRPr/>
+          </a:p>
+        </p:txBody>
+      </p:sp>
+      <p:sp>
+        <p:nvSpPr>
+          <p:cNvPr id="12" name="Rectangle 11"/>
+          <p:cNvSpPr/>
+          <p:nvPr/>
+        </p:nvSpPr>
+        <p:spPr>
+          <a:xfrm>
+            <a:off x="3536442" y="4800600"/>
+            <a:ext cx="2402586" cy="38100"/>
+          </a:xfrm>
+          <a:prstGeom prst="rect">
+            <a:avLst/>
+          </a:prstGeom>
+          <a:solidFill>
+            <a:srgbClr val="303945"/>
+          </a:solidFill>
+          <a:ln>
+            <a:noFill/>
+          </a:ln>
+          <a:effectLst/>
+        </p:spPr>
+        <p:style>
+          <a:lnRef idx="1">
+            <a:schemeClr val="accent1"/>
+          </a:lnRef>
+          <a:fillRef idx="3">
+            <a:schemeClr val="accent1"/>
+          </a:fillRef>
+          <a:effectRef idx="2">
+            <a:schemeClr val="accent1"/>
+          </a:effectRef>
+          <a:fontRef idx="minor">
+            <a:schemeClr val="lt1"/>
+          </a:fontRef>
+        </p:style>
+        <p:txBody>
+          <a:bodyPr rtlCol="0" anchor="ctr"/>
+          <a:lstStyle/>
+          <a:p>
+            <a:pPr algn="ctr"/>
+            <a:endParaRPr/>
+          </a:p>
+        </p:txBody>
+      </p:sp>
+      <p:sp>
+        <p:nvSpPr>
+          <p:cNvPr id="13" name="TextBox 12"/>
+          <p:cNvSpPr txBox="1"/>
+          <p:nvPr/>
+        </p:nvSpPr>
+        <p:spPr>
+          <a:xfrm>
+            <a:off x="3518154" y="4754880"/>
+            <a:ext cx="2439162" cy="914400"/>
+          </a:xfrm>
+          <a:prstGeom prst="rect">
+            <a:avLst/>
+          </a:prstGeom>
+          <a:noFill/>
+        </p:spPr>
+        <p:txBody>
+          <a:bodyPr wrap="square" lIns="0" tIns="0" rIns="0" bIns="0" anchor="ctr">
+            <a:spAutoFit/>
+          </a:bodyPr>
+          <a:lstStyle/>
+          <a:p>
+            <a:pPr algn="ctr"/>
+            <a:r>
+              <a:rPr sz="1250" b="1">
+                <a:solidFill>
+                  <a:srgbClr val="E6EDF3"/>
+                </a:solidFill>
+                <a:latin typeface="Segoe UI"/>
+              </a:rPr>
+              <a:t>monitor 0.5 s</a:t>
+            </a:r>
+          </a:p>
+          <a:p>
+            <a:pPr algn="ctr"/>
+            <a:r>
+              <a:rPr sz="950">
+                <a:solidFill>
+                  <a:srgbClr val="8B949E"/>
+                </a:solidFill>
+                <a:latin typeface="Consolas"/>
+              </a:rPr>
+              <a:t>userspace</a:t>
+            </a:r>
+          </a:p>
+        </p:txBody>
+      </p:sp>
+      <p:sp>
+        <p:nvSpPr>
+          <p:cNvPr id="14" name="TextBox 13"/>
+          <p:cNvSpPr txBox="1"/>
+          <p:nvPr/>
+        </p:nvSpPr>
+        <p:spPr>
+          <a:xfrm>
+            <a:off x="6012180" y="4754880"/>
+            <a:ext cx="274320" cy="914400"/>
+          </a:xfrm>
+          <a:prstGeom prst="rect">
+            <a:avLst/>
+          </a:prstGeom>
+          <a:noFill/>
+        </p:spPr>
+        <p:txBody>
+          <a:bodyPr wrap="square" lIns="0" tIns="0" rIns="0" bIns="0" anchor="ctr">
+            <a:spAutoFit/>
+          </a:bodyPr>
+          <a:lstStyle/>
+          <a:p>
+            <a:pPr algn="ctr"/>
+            <a:r>
+              <a:rPr sz="2000" b="1" i="0">
+                <a:solidFill>
+                  <a:srgbClr val="F5A623"/>
+                </a:solidFill>
+                <a:latin typeface="Segoe UI"/>
+              </a:rPr>
+              <a:t>›</a:t>
+            </a:r>
+          </a:p>
+        </p:txBody>
+      </p:sp>
+      <p:sp>
+        <p:nvSpPr>
+          <p:cNvPr id="15" name="Rounded Rectangle 14"/>
+          <p:cNvSpPr/>
+          <p:nvPr/>
+        </p:nvSpPr>
+        <p:spPr>
+          <a:xfrm>
+            <a:off x="6286500" y="4754880"/>
+            <a:ext cx="2548890" cy="914400"/>
+          </a:xfrm>
+          <a:prstGeom prst="roundRect">
+            <a:avLst/>
+          </a:prstGeom>
+          <a:solidFill>
+            <a:srgbClr val="1B222E"/>
+          </a:solidFill>
+          <a:ln>
+            <a:noFill/>
+          </a:ln>
+          <a:effectLst/>
+        </p:spPr>
+        <p:style>
+          <a:lnRef idx="1">
+            <a:schemeClr val="accent1"/>
+          </a:lnRef>
+          <a:fillRef idx="3">
+            <a:schemeClr val="accent1"/>
+          </a:fillRef>
+          <a:effectRef idx="2">
+            <a:schemeClr val="accent1"/>
+          </a:effectRef>
+          <a:fontRef idx="minor">
+            <a:schemeClr val="lt1"/>
+          </a:fontRef>
+        </p:style>
+        <p:txBody>
+          <a:bodyPr rtlCol="0" anchor="ctr"/>
+          <a:lstStyle/>
+          <a:p>
+            <a:pPr algn="ctr"/>
+            <a:endParaRPr/>
+          </a:p>
+        </p:txBody>
+      </p:sp>
+      <p:sp>
+        <p:nvSpPr>
+          <p:cNvPr id="16" name="Rectangle 15"/>
+          <p:cNvSpPr/>
+          <p:nvPr/>
+        </p:nvSpPr>
+        <p:spPr>
+          <a:xfrm>
+            <a:off x="6359652" y="4800600"/>
+            <a:ext cx="2402586" cy="38100"/>
+          </a:xfrm>
+          <a:prstGeom prst="rect">
+            <a:avLst/>
+          </a:prstGeom>
+          <a:solidFill>
+            <a:srgbClr val="303945"/>
+          </a:solidFill>
+          <a:ln>
+            <a:noFill/>
+          </a:ln>
+          <a:effectLst/>
+        </p:spPr>
+        <p:style>
+          <a:lnRef idx="1">
+            <a:schemeClr val="accent1"/>
+          </a:lnRef>
+          <a:fillRef idx="3">
+            <a:schemeClr val="accent1"/>
+          </a:fillRef>
+          <a:effectRef idx="2">
+            <a:schemeClr val="accent1"/>
+          </a:effectRef>
+          <a:fontRef idx="minor">
+            <a:schemeClr val="lt1"/>
+          </a:fontRef>
+        </p:style>
+        <p:txBody>
+          <a:bodyPr rtlCol="0" anchor="ctr"/>
+          <a:lstStyle/>
+          <a:p>
+            <a:pPr algn="ctr"/>
+            <a:endParaRPr/>
+          </a:p>
+        </p:txBody>
+      </p:sp>
+      <p:sp>
+        <p:nvSpPr>
+          <p:cNvPr id="17" name="TextBox 16"/>
+          <p:cNvSpPr txBox="1"/>
+          <p:nvPr/>
+        </p:nvSpPr>
+        <p:spPr>
+          <a:xfrm>
+            <a:off x="6341364" y="4754880"/>
+            <a:ext cx="2439162" cy="914400"/>
+          </a:xfrm>
+          <a:prstGeom prst="rect">
+            <a:avLst/>
+          </a:prstGeom>
+          <a:noFill/>
+        </p:spPr>
+        <p:txBody>
+          <a:bodyPr wrap="square" lIns="0" tIns="0" rIns="0" bIns="0" anchor="ctr">
+            <a:spAutoFit/>
+          </a:bodyPr>
+          <a:lstStyle/>
+          <a:p>
+            <a:pPr algn="ctr"/>
+            <a:r>
+              <a:rPr sz="1250" b="1">
+                <a:solidFill>
+                  <a:srgbClr val="E6EDF3"/>
+                </a:solidFill>
+                <a:latin typeface="Segoe UI"/>
+              </a:rPr>
+              <a:t>link_state[6]</a:t>
+            </a:r>
+          </a:p>
+          <a:p>
+            <a:pPr algn="ctr"/>
+            <a:r>
+              <a:rPr sz="950">
+                <a:solidFill>
+                  <a:srgbClr val="8B949E"/>
+                </a:solidFill>
+                <a:latin typeface="Consolas"/>
+              </a:rPr>
+              <a:t>mappa BPF</a:t>
+            </a:r>
+          </a:p>
+        </p:txBody>
+      </p:sp>
+      <p:sp>
+        <p:nvSpPr>
+          <p:cNvPr id="18" name="TextBox 17"/>
+          <p:cNvSpPr txBox="1"/>
+          <p:nvPr/>
+        </p:nvSpPr>
+        <p:spPr>
+          <a:xfrm>
+            <a:off x="8835390" y="4754880"/>
+            <a:ext cx="274320" cy="914400"/>
+          </a:xfrm>
+          <a:prstGeom prst="rect">
+            <a:avLst/>
+          </a:prstGeom>
+          <a:noFill/>
+        </p:spPr>
+        <p:txBody>
+          <a:bodyPr wrap="square" lIns="0" tIns="0" rIns="0" bIns="0" anchor="ctr">
+            <a:spAutoFit/>
+          </a:bodyPr>
+          <a:lstStyle/>
+          <a:p>
+            <a:pPr algn="ctr"/>
+            <a:r>
+              <a:rPr sz="2000" b="1" i="0">
+                <a:solidFill>
+                  <a:srgbClr val="F5A623"/>
+                </a:solidFill>
+                <a:latin typeface="Segoe UI"/>
+              </a:rPr>
+              <a:t>›</a:t>
+            </a:r>
+          </a:p>
+        </p:txBody>
+      </p:sp>
+      <p:sp>
+        <p:nvSpPr>
+          <p:cNvPr id="19" name="Rounded Rectangle 18"/>
+          <p:cNvSpPr/>
+          <p:nvPr/>
+        </p:nvSpPr>
+        <p:spPr>
+          <a:xfrm>
+            <a:off x="9109710" y="4754880"/>
+            <a:ext cx="2548890" cy="914400"/>
+          </a:xfrm>
+          <a:prstGeom prst="roundRect">
+            <a:avLst/>
+          </a:prstGeom>
+          <a:solidFill>
+            <a:srgbClr val="1B222E"/>
+          </a:solidFill>
+          <a:ln>
+            <a:noFill/>
+          </a:ln>
+          <a:effectLst/>
+        </p:spPr>
+        <p:style>
+          <a:lnRef idx="1">
+            <a:schemeClr val="accent1"/>
+          </a:lnRef>
+          <a:fillRef idx="3">
+            <a:schemeClr val="accent1"/>
+          </a:fillRef>
+          <a:effectRef idx="2">
+            <a:schemeClr val="accent1"/>
+          </a:effectRef>
+          <a:fontRef idx="minor">
+            <a:schemeClr val="lt1"/>
+          </a:fontRef>
+        </p:style>
+        <p:txBody>
+          <a:bodyPr rtlCol="0" anchor="ctr"/>
+          <a:lstStyle/>
+          <a:p>
+            <a:pPr algn="ctr"/>
+            <a:endParaRPr/>
+          </a:p>
+        </p:txBody>
+      </p:sp>
+      <p:sp>
+        <p:nvSpPr>
+          <p:cNvPr id="20" name="Rectangle 19"/>
+          <p:cNvSpPr/>
+          <p:nvPr/>
+        </p:nvSpPr>
+        <p:spPr>
+          <a:xfrm>
+            <a:off x="9182862" y="4800600"/>
+            <a:ext cx="2402586" cy="38100"/>
+          </a:xfrm>
+          <a:prstGeom prst="rect">
+            <a:avLst/>
+          </a:prstGeom>
+          <a:solidFill>
+            <a:srgbClr val="303945"/>
+          </a:solidFill>
+          <a:ln>
+            <a:noFill/>
+          </a:ln>
+          <a:effectLst/>
+        </p:spPr>
+        <p:style>
+          <a:lnRef idx="1">
+            <a:schemeClr val="accent1"/>
+          </a:lnRef>
+          <a:fillRef idx="3">
+            <a:schemeClr val="accent1"/>
+          </a:fillRef>
+          <a:effectRef idx="2">
+            <a:schemeClr val="accent1"/>
+          </a:effectRef>
+          <a:fontRef idx="minor">
+            <a:schemeClr val="lt1"/>
+          </a:fontRef>
+        </p:style>
+        <p:txBody>
+          <a:bodyPr rtlCol="0" anchor="ctr"/>
+          <a:lstStyle/>
+          <a:p>
+            <a:pPr algn="ctr"/>
+            <a:endParaRPr/>
+          </a:p>
+        </p:txBody>
+      </p:sp>
+      <p:sp>
+        <p:nvSpPr>
+          <p:cNvPr id="21" name="TextBox 20"/>
+          <p:cNvSpPr txBox="1"/>
+          <p:nvPr/>
+        </p:nvSpPr>
+        <p:spPr>
+          <a:xfrm>
+            <a:off x="9164574" y="4754880"/>
+            <a:ext cx="2439162" cy="914400"/>
+          </a:xfrm>
+          <a:prstGeom prst="rect">
+            <a:avLst/>
+          </a:prstGeom>
+          <a:noFill/>
+        </p:spPr>
+        <p:txBody>
+          <a:bodyPr wrap="square" lIns="0" tIns="0" rIns="0" bIns="0" anchor="ctr">
+            <a:spAutoFit/>
+          </a:bodyPr>
+          <a:lstStyle/>
+          <a:p>
+            <a:pPr algn="ctr"/>
+            <a:r>
+              <a:rPr sz="1250" b="1">
+                <a:solidFill>
+                  <a:srgbClr val="E6EDF3"/>
+                </a:solidFill>
+                <a:latin typeface="Segoe UI"/>
+              </a:rPr>
+              <a:t>XDP</a:t>
+            </a:r>
+          </a:p>
+          <a:p>
+            <a:pPr algn="ctr"/>
+            <a:r>
+              <a:rPr sz="950">
+                <a:solidFill>
+                  <a:srgbClr val="8B949E"/>
+                </a:solidFill>
+                <a:latin typeface="Consolas"/>
+              </a:rPr>
+              <a:t>inferenza</a:t>
+            </a:r>
+          </a:p>
+        </p:txBody>
+      </p:sp>
+    </p:spTree>
+  </p:cSld>
+  <p:clrMapOvr>
+    <a:masterClrMapping/>
+  </p:clrMapOvr>
+</p:sld>
+</file>
+
+<file path=ppt/slides/slide16.xml><?xml version="1.0" encoding="utf-8"?>
+<p:sld xmlns:a="http://schemas.openxmlformats.org/drawingml/2006/main" xmlns:r="http://schemas.openxmlformats.org/officeDocument/2006/relationships" xmlns:p="http://schemas.openxmlformats.org/presentationml/2006/main">
+  <p:cSld>
+    <p:spTree>
+      <p:nvGrpSpPr>
+        <p:cNvPr id="1" name=""/>
+        <p:cNvGrpSpPr/>
+        <p:nvPr/>
+      </p:nvGrpSpPr>
+      <p:grpSpPr>
+        <a:xfrm>
+          <a:off x="0" y="0"/>
+          <a:ext cx="0" cy="0"/>
+          <a:chOff x="0" y="0"/>
+          <a:chExt cx="0" cy="0"/>
+        </a:xfrm>
+      </p:grpSpPr>
+      <p:sp>
+        <p:nvSpPr>
+          <p:cNvPr id="2" name="Rectangle 1"/>
+          <p:cNvSpPr/>
+          <p:nvPr/>
+        </p:nvSpPr>
+        <p:spPr>
+          <a:xfrm>
+            <a:off x="0" y="0"/>
+            <a:ext cx="12191695" cy="6858000"/>
+          </a:xfrm>
+          <a:prstGeom prst="rect">
+            <a:avLst/>
+          </a:prstGeom>
+          <a:solidFill>
+            <a:srgbClr val="0D1117"/>
+          </a:solidFill>
+          <a:ln>
+            <a:noFill/>
+          </a:ln>
+          <a:effectLst/>
+        </p:spPr>
+        <p:style>
+          <a:lnRef idx="1">
+            <a:schemeClr val="accent1"/>
+          </a:lnRef>
+          <a:fillRef idx="3">
+            <a:schemeClr val="accent1"/>
+          </a:fillRef>
+          <a:effectRef idx="2">
+            <a:schemeClr val="accent1"/>
+          </a:effectRef>
+          <a:fontRef idx="minor">
+            <a:schemeClr val="lt1"/>
+          </a:fontRef>
+        </p:style>
+        <p:txBody>
+          <a:bodyPr rtlCol="0" anchor="ctr"/>
+          <a:lstStyle/>
+          <a:p>
+            <a:pPr algn="ctr"/>
+            <a:endParaRPr/>
+          </a:p>
+        </p:txBody>
+      </p:sp>
+      <p:sp>
+        <p:nvSpPr>
+          <p:cNvPr id="3" name="TextBox 2"/>
+          <p:cNvSpPr txBox="1"/>
+          <p:nvPr/>
+        </p:nvSpPr>
+        <p:spPr>
+          <a:xfrm>
+            <a:off x="566928" y="365760"/>
+            <a:ext cx="1051560" cy="822960"/>
+          </a:xfrm>
+          <a:prstGeom prst="rect">
+            <a:avLst/>
+          </a:prstGeom>
+          <a:noFill/>
+        </p:spPr>
+        <p:txBody>
+          <a:bodyPr wrap="square" lIns="0" tIns="0" rIns="0" bIns="0">
+            <a:spAutoFit/>
+          </a:bodyPr>
+          <a:lstStyle/>
+          <a:p>
+            <a:pPr algn="l"/>
+            <a:r>
+              <a:rPr sz="4000" b="1" i="0">
+                <a:solidFill>
+                  <a:srgbClr val="F5A623"/>
+                </a:solidFill>
+                <a:latin typeface="Georgia"/>
+              </a:rPr>
+              <a:t>—</a:t>
+            </a:r>
+          </a:p>
+        </p:txBody>
+      </p:sp>
+      <p:sp>
+        <p:nvSpPr>
+          <p:cNvPr id="4" name="TextBox 3"/>
+          <p:cNvSpPr txBox="1"/>
+          <p:nvPr/>
+        </p:nvSpPr>
+        <p:spPr>
+          <a:xfrm>
+            <a:off x="1645920" y="384048"/>
+            <a:ext cx="10058400" cy="731520"/>
+          </a:xfrm>
+          <a:prstGeom prst="rect">
+            <a:avLst/>
+          </a:prstGeom>
+          <a:noFill/>
+        </p:spPr>
+        <p:txBody>
+          <a:bodyPr wrap="square" lIns="0" tIns="0" rIns="0" bIns="0">
+            <a:spAutoFit/>
+          </a:bodyPr>
+          <a:lstStyle/>
+          <a:p>
+            <a:pPr algn="l"/>
+            <a:r>
+              <a:rPr sz="3000" b="1" i="0">
+                <a:solidFill>
+                  <a:srgbClr val="E6EDF3"/>
+                </a:solidFill>
+                <a:latin typeface="Georgia"/>
+              </a:rPr>
+              <a:t>Riepilogo e stato</a:t>
+            </a:r>
+          </a:p>
+        </p:txBody>
+      </p:sp>
+      <p:sp>
+        <p:nvSpPr>
+          <p:cNvPr id="5" name="TextBox 4"/>
+          <p:cNvSpPr txBox="1"/>
+          <p:nvPr/>
+        </p:nvSpPr>
+        <p:spPr>
+          <a:xfrm>
+            <a:off x="1673352" y="1078992"/>
+            <a:ext cx="10058400" cy="457200"/>
+          </a:xfrm>
+          <a:prstGeom prst="rect">
+            <a:avLst/>
+          </a:prstGeom>
+          <a:noFill/>
+        </p:spPr>
+        <p:txBody>
+          <a:bodyPr wrap="square" lIns="0" tIns="0" rIns="0" bIns="0">
+            <a:spAutoFit/>
+          </a:bodyPr>
+          <a:lstStyle/>
+          <a:p>
+            <a:pPr algn="l"/>
+            <a:r>
+              <a:rPr sz="1350" b="0" i="0">
+                <a:solidFill>
+                  <a:srgbClr val="8B949E"/>
+                </a:solidFill>
+                <a:latin typeface="Segoe UI"/>
+              </a:rPr>
+              <a:t>Cosa è stato fatto, verificato e documentato</a:t>
+            </a:r>
+          </a:p>
+        </p:txBody>
+      </p:sp>
+      <p:sp>
+        <p:nvSpPr>
+          <p:cNvPr id="6" name="TextBox 5"/>
+          <p:cNvSpPr txBox="1"/>
+          <p:nvPr/>
+        </p:nvSpPr>
+        <p:spPr>
+          <a:xfrm>
+            <a:off x="640080" y="1783080"/>
+            <a:ext cx="5623560" cy="4114800"/>
+          </a:xfrm>
+          <a:prstGeom prst="rect">
+            <a:avLst/>
+          </a:prstGeom>
+          <a:noFill/>
+        </p:spPr>
+        <p:txBody>
+          <a:bodyPr wrap="square" lIns="0" tIns="0" rIns="0" bIns="0">
+            <a:spAutoFit/>
+          </a:bodyPr>
+          <a:lstStyle/>
+          <a:p>
+            <a:pPr>
+              <a:lnSpc>
+                <a:spcPct val="105000"/>
+              </a:lnSpc>
+              <a:spcAft>
+                <a:spcPts val="700"/>
+              </a:spcAft>
+            </a:pPr>
+            <a:r>
+              <a:rPr sz="1300" b="1">
+                <a:solidFill>
+                  <a:srgbClr val="F5A623"/>
+                </a:solidFill>
+                <a:latin typeface="Segoe UI"/>
+              </a:rPr>
+              <a:t>▸ Input vector flessibile </a:t>
+            </a:r>
+            <a:r>
+              <a:rPr sz="1300">
+                <a:solidFill>
+                  <a:srgbClr val="E6EDF3"/>
+                </a:solidFill>
+                <a:latin typeface="Segoe UI"/>
+              </a:rPr>
+              <a:t>su tutte e 3 le pipeline (default byte-identico).</a:t>
+            </a:r>
+          </a:p>
+          <a:p>
+            <a:pPr>
+              <a:lnSpc>
+                <a:spcPct val="105000"/>
+              </a:lnSpc>
+              <a:spcAft>
+                <a:spcPts val="700"/>
+              </a:spcAft>
+            </a:pPr>
+            <a:r>
+              <a:rPr sz="1300" b="1">
+                <a:solidFill>
+                  <a:srgbClr val="F5A623"/>
+                </a:solidFill>
+                <a:latin typeface="Segoe UI"/>
+              </a:rPr>
+              <a:t>▸ Profondità variabile </a:t>
+            </a:r>
+            <a:r>
+              <a:rPr sz="1300">
+                <a:solidFill>
+                  <a:srgbClr val="E6EDF3"/>
+                </a:solidFill>
+                <a:latin typeface="Segoe UI"/>
+              </a:rPr>
+              <a:t>+ studio larghezza-vs-profondità (allargare batte approfondire).</a:t>
+            </a:r>
+          </a:p>
+          <a:p>
+            <a:pPr>
+              <a:lnSpc>
+                <a:spcPct val="105000"/>
+              </a:lnSpc>
+              <a:spcAft>
+                <a:spcPts val="700"/>
+              </a:spcAft>
+            </a:pPr>
+            <a:r>
+              <a:rPr sz="1300" b="1">
+                <a:solidFill>
+                  <a:srgbClr val="F5A623"/>
+                </a:solidFill>
+                <a:latin typeface="Segoe UI"/>
+              </a:rPr>
+              <a:t>▸ AOT-literal sostituisce BCC </a:t>
+            </a:r>
+            <a:r>
+              <a:rPr sz="1300">
+                <a:solidFill>
+                  <a:srgbClr val="E6EDF3"/>
+                </a:solidFill>
+                <a:latin typeface="Segoe UI"/>
+              </a:rPr>
+              <a:t>nel deploy — verificato attaccato su Kathara.</a:t>
+            </a:r>
+          </a:p>
+          <a:p>
+            <a:pPr>
+              <a:lnSpc>
+                <a:spcPct val="105000"/>
+              </a:lnSpc>
+              <a:spcAft>
+                <a:spcPts val="700"/>
+              </a:spcAft>
+            </a:pPr>
+            <a:r>
+              <a:rPr sz="1300" b="1">
+                <a:solidFill>
+                  <a:srgbClr val="F5A623"/>
+                </a:solidFill>
+                <a:latin typeface="Segoe UI"/>
+              </a:rPr>
+              <a:t>▸ Baseline vs hardcoded </a:t>
+            </a:r>
+            <a:r>
+              <a:rPr sz="1300">
+                <a:solidFill>
+                  <a:srgbClr val="E6EDF3"/>
+                </a:solidFill>
+                <a:latin typeface="Segoe UI"/>
+              </a:rPr>
+              <a:t>misurati: 1.68× il pavimento XDP.</a:t>
+            </a:r>
+          </a:p>
+          <a:p>
+            <a:pPr>
+              <a:lnSpc>
+                <a:spcPct val="105000"/>
+              </a:lnSpc>
+              <a:spcAft>
+                <a:spcPts val="700"/>
+              </a:spcAft>
+            </a:pPr>
+            <a:r>
+              <a:rPr sz="1300" b="1">
+                <a:solidFill>
+                  <a:srgbClr val="F5A623"/>
+                </a:solidFill>
+                <a:latin typeface="Segoe UI"/>
+              </a:rPr>
+              <a:t>▸ </a:t>
+            </a:r>
+            <a:r>
+              <a:rPr sz="1300" b="1">
+                <a:solidFill>
+                  <a:srgbClr val="CD8C21"/>
+                </a:solidFill>
+                <a:latin typeface="Segoe UI"/>
+              </a:rPr>
+              <a:t>mac_table → ARRAY e blocco pesi struct-valued </a:t>
+            </a:r>
+            <a:r>
+              <a:rPr sz="1300" b="0">
+                <a:solidFill>
+                  <a:srgbClr val="E6EDF3"/>
+                </a:solidFill>
+                <a:latin typeface="Segoe UI"/>
+              </a:rPr>
+              <a:t>(P2 147→8 letture, P3 160→26), più 3 colli di bottiglia documentati.</a:t>
+            </a:r>
+          </a:p>
+          <a:p>
+            <a:pPr>
+              <a:lnSpc>
+                <a:spcPct val="105000"/>
+              </a:lnSpc>
+              <a:spcAft>
+                <a:spcPts val="700"/>
+              </a:spcAft>
+            </a:pPr>
+            <a:r>
+              <a:rPr sz="1300" b="1">
+                <a:solidFill>
+                  <a:srgbClr val="F5A623"/>
+                </a:solidFill>
+                <a:latin typeface="Segoe UI"/>
+              </a:rPr>
+              <a:t>▸ Polling FRR </a:t>
+            </a:r>
+            <a:r>
+              <a:rPr sz="1300">
+                <a:solidFill>
+                  <a:srgbClr val="E6EDF3"/>
+                </a:solidFill>
+                <a:latin typeface="Segoe UI"/>
+              </a:rPr>
+              <a:t>a 0.5 s, coerente ovunque.</a:t>
+            </a:r>
+          </a:p>
+        </p:txBody>
+      </p:sp>
+      <p:sp>
+        <p:nvSpPr>
+          <p:cNvPr id="7" name="Rounded Rectangle 6"/>
+          <p:cNvSpPr/>
+          <p:nvPr/>
+        </p:nvSpPr>
+        <p:spPr>
+          <a:xfrm>
+            <a:off x="6492240" y="1783080"/>
+            <a:ext cx="5120640" cy="1554480"/>
+          </a:xfrm>
+          <a:prstGeom prst="roundRect">
+            <a:avLst/>
+          </a:prstGeom>
+          <a:solidFill>
+            <a:srgbClr val="1B222E"/>
+          </a:solidFill>
+          <a:ln>
+            <a:noFill/>
+          </a:ln>
+          <a:effectLst/>
+        </p:spPr>
+        <p:style>
+          <a:lnRef idx="1">
+            <a:schemeClr val="accent1"/>
+          </a:lnRef>
+          <a:fillRef idx="3">
+            <a:schemeClr val="accent1"/>
+          </a:fillRef>
+          <a:effectRef idx="2">
+            <a:schemeClr val="accent1"/>
+          </a:effectRef>
+          <a:fontRef idx="minor">
+            <a:schemeClr val="lt1"/>
+          </a:fontRef>
+        </p:style>
+        <p:txBody>
+          <a:bodyPr rtlCol="0" anchor="ctr"/>
+          <a:lstStyle/>
+          <a:p>
+            <a:pPr algn="ctr"/>
+            <a:endParaRPr/>
+          </a:p>
+        </p:txBody>
+      </p:sp>
+      <p:sp>
+        <p:nvSpPr>
+          <p:cNvPr id="8" name="Rectangle 7"/>
+          <p:cNvSpPr/>
+          <p:nvPr/>
+        </p:nvSpPr>
+        <p:spPr>
+          <a:xfrm>
             <a:off x="6492240" y="1783080"/>
             <a:ext cx="50800" cy="1554480"/>
           </a:xfrm>
@@ -8087,7 +10612,7 @@
                 </a:solidFill>
                 <a:latin typeface="Segoe UI"/>
               </a:rPr>
-              <a:t>Documentazione per la tesi: bozza LaTeX in stile Sapthesis (3 capitoli) e documento cronologico delle modifiche (Task 1–11) in docs/.</a:t>
+              <a:t>Documentazione per la tesi: capitolo LaTeX aggiornato con le nuove misure, sezione dedicata al blocco pesi e riscontro metodologico in letteratura (N3IC, survey COMST).</a:t>
             </a:r>
           </a:p>
         </p:txBody>
@@ -8216,7 +10741,7 @@
                 </a:solidFill>
                 <a:latin typeface="Segoe UI"/>
               </a:rPr>
-              <a:t>Verifica: test_suite --only kernel = PASS (correttezza + architetture alternative). Da rimisurare solo i numeri assoluti dopo il cambio mac_table → ARRAY.</a:t>
+              <a:t>Verifica: test_suite --only kernel = PASS su 2 run completi. Aperti: semantica ingress_iface divergente fra P1 e P2/P3; P2/P3 oltre il cap di 4096 istruzioni dei nodi Kathara.</a:t>
             </a:r>
           </a:p>
         </p:txBody>
@@ -9410,7 +11935,7 @@
                 </a:solidFill>
                 <a:latin typeface="Segoe UI"/>
               </a:rPr>
-              <a:t>10</a:t>
+              <a:t>10–11</a:t>
             </a:r>
           </a:p>
         </p:txBody>
@@ -9574,7 +12099,7 @@
                 </a:solidFill>
                 <a:latin typeface="Segoe UI"/>
               </a:rPr>
-              <a:t>13</a:t>
+              <a:t>14</a:t>
             </a:r>
           </a:p>
         </p:txBody>
@@ -9738,7 +12263,7 @@
                 </a:solidFill>
                 <a:latin typeface="Segoe UI"/>
               </a:rPr>
-              <a:t>15</a:t>
+              <a:t>16</a:t>
             </a:r>
           </a:p>
         </p:txBody>
@@ -9902,7 +12427,7 @@
                 </a:solidFill>
                 <a:latin typeface="Segoe UI"/>
               </a:rPr>
-              <a:t>14</a:t>
+              <a:t>15</a:t>
             </a:r>
           </a:p>
         </p:txBody>
